--- a/presentation_slides.pptx
+++ b/presentation_slides.pptx
@@ -13,11 +13,6 @@
     <p:sldId id="261" r:id="rId12"/>
     <p:sldId id="262" r:id="rId13"/>
     <p:sldId id="263" r:id="rId14"/>
-    <p:sldId id="264" r:id="rId15"/>
-    <p:sldId id="265" r:id="rId16"/>
-    <p:sldId id="266" r:id="rId17"/>
-    <p:sldId id="267" r:id="rId18"/>
-    <p:sldId id="268" r:id="rId19"/>
   </p:sldIdLst>
   <p:sldSz cx="12188952" cy="6858000" type="screen4x3"/>
   <p:notesSz cx="6858000" cy="9144000"/>
@@ -3151,8 +3146,8 @@
         </p:nvSpPr>
         <p:spPr>
           <a:xfrm>
-            <a:off x="274320" y="1097280"/>
-            <a:ext cx="11612880" cy="4114800"/>
+            <a:off x="320040" y="1005840"/>
+            <a:ext cx="11521440" cy="4572000"/>
           </a:xfrm>
           <a:prstGeom prst="rect">
             <a:avLst/>
@@ -3194,8 +3189,8 @@
         </p:nvSpPr>
         <p:spPr>
           <a:xfrm>
-            <a:off x="548640" y="1280160"/>
-            <a:ext cx="11064240" cy="1645920"/>
+            <a:off x="594360" y="1188720"/>
+            <a:ext cx="10972800" cy="1737360"/>
           </a:xfrm>
           <a:prstGeom prst="rect">
             <a:avLst/>
@@ -3210,7 +3205,7 @@
           <a:p>
             <a:pPr algn="l"/>
             <a:r>
-              <a:rPr sz="3000" b="1" i="0">
+              <a:rPr sz="3200" b="1" i="0">
                 <a:solidFill>
                   <a:srgbClr val="1A2F5E"/>
                 </a:solidFill>
@@ -3229,8 +3224,8 @@
         </p:nvSpPr>
         <p:spPr>
           <a:xfrm>
-            <a:off x="548640" y="2834640"/>
-            <a:ext cx="11064240" cy="457200"/>
+            <a:off x="594360" y="2880360"/>
+            <a:ext cx="10972800" cy="457200"/>
           </a:xfrm>
           <a:prstGeom prst="rect">
             <a:avLst/>
@@ -3245,7 +3240,7 @@
           <a:p>
             <a:pPr algn="l"/>
             <a:r>
-              <a:rPr sz="1800" b="0" i="0">
+              <a:rPr sz="1900" b="0" i="0">
                 <a:solidFill>
                   <a:srgbClr val="2C3E50"/>
                 </a:solidFill>
@@ -3263,8 +3258,8 @@
         </p:nvSpPr>
         <p:spPr>
           <a:xfrm>
-            <a:off x="548640" y="3246120"/>
-            <a:ext cx="11064240" cy="365760"/>
+            <a:off x="594360" y="3291840"/>
+            <a:ext cx="10972800" cy="365760"/>
           </a:xfrm>
           <a:prstGeom prst="rect">
             <a:avLst/>
@@ -3297,8 +3292,8 @@
         </p:nvSpPr>
         <p:spPr>
           <a:xfrm>
-            <a:off x="548640" y="3703320"/>
-            <a:ext cx="11064240" cy="640080"/>
+            <a:off x="594360" y="3703320"/>
+            <a:ext cx="10972800" cy="365760"/>
           </a:xfrm>
           <a:prstGeom prst="rect">
             <a:avLst/>
@@ -3318,8 +3313,7 @@
                   <a:srgbClr val="2C3E50"/>
                 </a:solidFill>
               </a:rPr>
-              <a:t>CHI '25  ·  Yokohama, Japan  ·  April 26–May 1, 2025
-DOI: 10.1145/3706598.3713827</a:t>
+              <a:t>CHI '25  ·  Yokohama, Japan  ·  April 26–May 1, 2025</a:t>
             </a:r>
           </a:p>
         </p:txBody>
@@ -3332,8 +3326,8 @@
         </p:nvSpPr>
         <p:spPr>
           <a:xfrm>
-            <a:off x="548640" y="6309360"/>
-            <a:ext cx="11064240" cy="365760"/>
+            <a:off x="594360" y="4069080"/>
+            <a:ext cx="10972800" cy="320040"/>
           </a:xfrm>
           <a:prstGeom prst="rect">
             <a:avLst/>
@@ -3348,6 +3342,40 @@
           <a:p>
             <a:pPr algn="l"/>
             <a:r>
+              <a:rPr sz="1500" b="0" i="0">
+                <a:solidFill>
+                  <a:srgbClr val="276BC6"/>
+                </a:solidFill>
+              </a:rPr>
+              <a:t>DOI: 10.1145/3706598.3713827</a:t>
+            </a:r>
+          </a:p>
+        </p:txBody>
+      </p:sp>
+      <p:sp>
+        <p:nvSpPr>
+          <p:cNvPr id="9" name="TextBox 8"/>
+          <p:cNvSpPr txBox="1"/>
+          <p:nvPr/>
+        </p:nvSpPr>
+        <p:spPr>
+          <a:xfrm>
+            <a:off x="594360" y="6309360"/>
+            <a:ext cx="10972800" cy="365760"/>
+          </a:xfrm>
+          <a:prstGeom prst="rect">
+            <a:avLst/>
+          </a:prstGeom>
+          <a:noFill/>
+        </p:spPr>
+        <p:txBody>
+          <a:bodyPr wrap="square">
+            <a:spAutoFit/>
+          </a:bodyPr>
+          <a:lstStyle/>
+          <a:p>
+            <a:pPr algn="l"/>
+            <a:r>
               <a:rPr sz="1400" b="0" i="1">
                 <a:solidFill>
                   <a:srgbClr val="ECF0F1"/>
@@ -3360,13 +3388,13 @@
       </p:sp>
       <p:sp>
         <p:nvSpPr>
-          <p:cNvPr id="9" name="TextBox 8"/>
+          <p:cNvPr id="10" name="TextBox 9"/>
           <p:cNvSpPr txBox="1"/>
           <p:nvPr/>
         </p:nvSpPr>
         <p:spPr>
           <a:xfrm>
-            <a:off x="11704320" y="6492240"/>
+            <a:off x="11704320" y="6537960"/>
             <a:ext cx="365760" cy="274320"/>
           </a:xfrm>
           <a:prstGeom prst="rect">
@@ -3400,7 +3428,7 @@
 </p:sld>
 </file>
 
-<file path=ppt/slides/slide10.xml><?xml version="1.0" encoding="utf-8"?>
+<file path=ppt/slides/slide2.xml><?xml version="1.0" encoding="utf-8"?>
 <p:sld xmlns:a="http://schemas.openxmlformats.org/drawingml/2006/main" xmlns:p="http://schemas.openxmlformats.org/presentationml/2006/main" xmlns:r="http://schemas.openxmlformats.org/officeDocument/2006/relationships">
   <p:cSld>
     <p:spTree>
@@ -3419,7 +3447,7 @@
         <p:spPr>
           <a:xfrm>
             <a:off x="0" y="0"/>
-            <a:ext cx="12188952" cy="1143000"/>
+            <a:ext cx="12188952" cy="1097280"/>
           </a:xfrm>
           <a:prstGeom prst="rect">
             <a:avLst/>
@@ -3461,8 +3489,8 @@
         </p:nvSpPr>
         <p:spPr>
           <a:xfrm>
-            <a:off x="320040" y="137160"/>
-            <a:ext cx="11430000" cy="685800"/>
+            <a:off x="365760" y="91440"/>
+            <a:ext cx="11430000" cy="640080"/>
           </a:xfrm>
           <a:prstGeom prst="rect">
             <a:avLst/>
@@ -3482,7 +3510,7 @@
                   <a:srgbClr val="FFFFFF"/>
                 </a:solidFill>
               </a:rPr>
-              <a:t>What I Find Compelling</a:t>
+              <a:t>Why This Paper?</a:t>
             </a:r>
           </a:p>
         </p:txBody>
@@ -3495,8 +3523,8 @@
         </p:nvSpPr>
         <p:spPr>
           <a:xfrm>
-            <a:off x="320040" y="749808"/>
-            <a:ext cx="11430000" cy="365760"/>
+            <a:off x="365760" y="713232"/>
+            <a:ext cx="11430000" cy="347472"/>
           </a:xfrm>
           <a:prstGeom prst="rect">
             <a:avLst/>
@@ -3511,32 +3539,198 @@
           <a:p>
             <a:pPr algn="l"/>
             <a:r>
-              <a:rPr sz="1600" b="0" i="0">
+              <a:rPr sz="1500" b="0" i="1">
                 <a:solidFill>
                   <a:srgbClr val="ECF0F1"/>
                 </a:solidFill>
               </a:rPr>
-              <a:t>Presenter's perspective</a:t>
-            </a:r>
-          </a:p>
-        </p:txBody>
-      </p:sp>
-      <p:sp>
-        <p:nvSpPr>
-          <p:cNvPr id="5" name="Rectangle 4"/>
+              <a:t>Novelty &amp; Research Questions</a:t>
+            </a:r>
+          </a:p>
+        </p:txBody>
+      </p:sp>
+      <p:sp>
+        <p:nvSpPr>
+          <p:cNvPr id="5" name="TextBox 4"/>
+          <p:cNvSpPr txBox="1"/>
+          <p:nvPr/>
+        </p:nvSpPr>
+        <p:spPr>
+          <a:xfrm>
+            <a:off x="365760" y="1234440"/>
+            <a:ext cx="5486400" cy="320040"/>
+          </a:xfrm>
+          <a:prstGeom prst="rect">
+            <a:avLst/>
+          </a:prstGeom>
+          <a:noFill/>
+        </p:spPr>
+        <p:txBody>
+          <a:bodyPr wrap="square">
+            <a:spAutoFit/>
+          </a:bodyPr>
+          <a:lstStyle/>
+          <a:p>
+            <a:pPr algn="l"/>
+            <a:r>
+              <a:rPr sz="1900" b="1" i="0">
+                <a:solidFill>
+                  <a:srgbClr val="1A2F5E"/>
+                </a:solidFill>
+              </a:rPr>
+              <a:t>What is novel:</a:t>
+            </a:r>
+          </a:p>
+        </p:txBody>
+      </p:sp>
+      <p:sp>
+        <p:nvSpPr>
+          <p:cNvPr id="6" name="TextBox 5"/>
+          <p:cNvSpPr txBox="1"/>
+          <p:nvPr/>
+        </p:nvSpPr>
+        <p:spPr>
+          <a:xfrm>
+            <a:off x="365760" y="1581912"/>
+            <a:ext cx="5486400" cy="2011680"/>
+          </a:xfrm>
+          <a:prstGeom prst="rect">
+            <a:avLst/>
+          </a:prstGeom>
+          <a:noFill/>
+        </p:spPr>
+        <p:txBody>
+          <a:bodyPr wrap="square">
+            <a:spAutoFit/>
+          </a:bodyPr>
+          <a:lstStyle/>
+          <a:p>
+            <a:pPr>
+              <a:spcBef>
+                <a:spcPts val="300"/>
+              </a:spcBef>
+            </a:pPr>
+            <a:r>
+              <a:rPr sz="1800">
+                <a:solidFill>
+                  <a:srgbClr val="2C3E50"/>
+                </a:solidFill>
+              </a:rPr>
+              <a:t>•  First study at the intersection of GenAI in science AND professional knowledge work</a:t>
+            </a:r>
+          </a:p>
+          <a:p>
+            <a:pPr>
+              <a:spcBef>
+                <a:spcPts val="300"/>
+              </a:spcBef>
+            </a:pPr>
+            <a:r>
+              <a:rPr sz="1800">
+                <a:solidFill>
+                  <a:srgbClr val="2C3E50"/>
+                </a:solidFill>
+              </a:rPr>
+              <a:t>•  Combines real usage data (telemetry) with survey and interviews — rare in HCI</a:t>
+            </a:r>
+          </a:p>
+          <a:p>
+            <a:pPr>
+              <a:spcBef>
+                <a:spcPts val="300"/>
+              </a:spcBef>
+            </a:pPr>
+            <a:r>
+              <a:rPr sz="1800">
+                <a:solidFill>
+                  <a:srgbClr val="2C3E50"/>
+                </a:solidFill>
+              </a:rPr>
+              <a:t>•  Includes both Science and Operations workers in a single organization</a:t>
+            </a:r>
+          </a:p>
+          <a:p>
+            <a:pPr>
+              <a:spcBef>
+                <a:spcPts val="300"/>
+              </a:spcBef>
+            </a:pPr>
+            <a:r>
+              <a:rPr sz="1800">
+                <a:solidFill>
+                  <a:srgbClr val="2C3E50"/>
+                </a:solidFill>
+              </a:rPr>
+              <a:t>•  Studies GenAI risks specific to a science context: classified data,</a:t>
+            </a:r>
+          </a:p>
+          <a:p>
+            <a:pPr>
+              <a:spcBef>
+                <a:spcPts val="300"/>
+              </a:spcBef>
+            </a:pPr>
+            <a:r>
+              <a:rPr sz="1800">
+                <a:solidFill>
+                  <a:srgbClr val="2C3E50"/>
+                </a:solidFill>
+              </a:rPr>
+              <a:t>    academic publishing integrity, pre-publication research</a:t>
+            </a:r>
+          </a:p>
+        </p:txBody>
+      </p:sp>
+      <p:sp>
+        <p:nvSpPr>
+          <p:cNvPr id="7" name="TextBox 6"/>
+          <p:cNvSpPr txBox="1"/>
+          <p:nvPr/>
+        </p:nvSpPr>
+        <p:spPr>
+          <a:xfrm>
+            <a:off x="365760" y="3703320"/>
+            <a:ext cx="5486400" cy="320040"/>
+          </a:xfrm>
+          <a:prstGeom prst="rect">
+            <a:avLst/>
+          </a:prstGeom>
+          <a:noFill/>
+        </p:spPr>
+        <p:txBody>
+          <a:bodyPr wrap="square">
+            <a:spAutoFit/>
+          </a:bodyPr>
+          <a:lstStyle/>
+          <a:p>
+            <a:pPr algn="l"/>
+            <a:r>
+              <a:rPr sz="1900" b="1" i="0">
+                <a:solidFill>
+                  <a:srgbClr val="1A2F5E"/>
+                </a:solidFill>
+              </a:rPr>
+              <a:t>The gap it fills:</a:t>
+            </a:r>
+          </a:p>
+        </p:txBody>
+      </p:sp>
+      <p:sp>
+        <p:nvSpPr>
+          <p:cNvPr id="8" name="Rectangle 7"/>
           <p:cNvSpPr/>
           <p:nvPr/>
         </p:nvSpPr>
         <p:spPr>
           <a:xfrm>
-            <a:off x="137160" y="1097280"/>
-            <a:ext cx="164592" cy="5577840"/>
+            <a:off x="365760" y="4023360"/>
+            <a:ext cx="5486400" cy="777240"/>
           </a:xfrm>
           <a:prstGeom prst="rect">
             <a:avLst/>
           </a:prstGeom>
           <a:solidFill>
-            <a:srgbClr val="1A2F5E"/>
+            <a:srgbClr val="ECF0F1"/>
           </a:solidFill>
           <a:ln>
             <a:noFill/>
@@ -3566,14 +3760,14 @@
       </p:sp>
       <p:sp>
         <p:nvSpPr>
-          <p:cNvPr id="6" name="TextBox 5"/>
+          <p:cNvPr id="9" name="TextBox 8"/>
           <p:cNvSpPr txBox="1"/>
           <p:nvPr/>
         </p:nvSpPr>
         <p:spPr>
           <a:xfrm>
-            <a:off x="320040" y="1280160"/>
-            <a:ext cx="11521440" cy="320040"/>
+            <a:off x="457200" y="4069080"/>
+            <a:ext cx="5303520" cy="685800"/>
           </a:xfrm>
           <a:prstGeom prst="rect">
             <a:avLst/>
@@ -3588,26 +3782,26 @@
           <a:p>
             <a:pPr algn="l"/>
             <a:r>
-              <a:rPr sz="1800" b="1" i="0">
+              <a:rPr sz="1700" b="0" i="1">
                 <a:solidFill>
                   <a:srgbClr val="1A2F5E"/>
                 </a:solidFill>
               </a:rPr>
-              <a:t>1.  Triangulation is a genuine strength</a:t>
-            </a:r>
-          </a:p>
-        </p:txBody>
-      </p:sp>
-      <p:sp>
-        <p:nvSpPr>
-          <p:cNvPr id="7" name="TextBox 6"/>
+              <a:t>Prior work studied GenAI for science tasks OR for professional workers — never both together, and never with organizational adoption data.</a:t>
+            </a:r>
+          </a:p>
+        </p:txBody>
+      </p:sp>
+      <p:sp>
+        <p:nvSpPr>
+          <p:cNvPr id="10" name="TextBox 9"/>
           <p:cNvSpPr txBox="1"/>
           <p:nvPr/>
         </p:nvSpPr>
         <p:spPr>
           <a:xfrm>
-            <a:off x="320040" y="1600200"/>
-            <a:ext cx="11521440" cy="457200"/>
+            <a:off x="6400800" y="1234440"/>
+            <a:ext cx="5394960" cy="320040"/>
           </a:xfrm>
           <a:prstGeom prst="rect">
             <a:avLst/>
@@ -3622,288 +3816,32 @@
           <a:p>
             <a:pPr algn="l"/>
             <a:r>
-              <a:rPr sz="1700" b="0" i="0">
-                <a:solidFill>
-                  <a:srgbClr val="2C3E50"/>
+              <a:rPr sz="1900" b="1" i="0">
+                <a:solidFill>
+                  <a:srgbClr val="1A2F5E"/>
                 </a:solidFill>
               </a:rPr>
-              <a:t>Behavioral data (Argo telemetry) + self-report (survey) + qualitative (interviews) is rare in HCI studies of AI adoption. Each data source checks the others.</a:t>
-            </a:r>
-          </a:p>
-        </p:txBody>
-      </p:sp>
-      <p:sp>
-        <p:nvSpPr>
-          <p:cNvPr id="8" name="TextBox 7"/>
-          <p:cNvSpPr txBox="1"/>
-          <p:nvPr/>
-        </p:nvSpPr>
-        <p:spPr>
-          <a:xfrm>
-            <a:off x="320040" y="2240280"/>
-            <a:ext cx="11521440" cy="320040"/>
-          </a:xfrm>
-          <a:prstGeom prst="rect">
-            <a:avLst/>
-          </a:prstGeom>
-          <a:noFill/>
-        </p:spPr>
-        <p:txBody>
-          <a:bodyPr wrap="square">
-            <a:spAutoFit/>
-          </a:bodyPr>
-          <a:lstStyle/>
-          <a:p>
-            <a:pPr algn="l"/>
-            <a:r>
-              <a:rPr sz="1800" b="1" i="0">
-                <a:solidFill>
-                  <a:srgbClr val="1A2F5E"/>
-                </a:solidFill>
-              </a:rPr>
-              <a:t>2.  The copilot / workflow agent distinction is actionable</a:t>
-            </a:r>
-          </a:p>
-        </p:txBody>
-      </p:sp>
-      <p:sp>
-        <p:nvSpPr>
-          <p:cNvPr id="9" name="TextBox 8"/>
-          <p:cNvSpPr txBox="1"/>
-          <p:nvPr/>
-        </p:nvSpPr>
-        <p:spPr>
-          <a:xfrm>
-            <a:off x="320040" y="2560320"/>
-            <a:ext cx="11521440" cy="457200"/>
-          </a:xfrm>
-          <a:prstGeom prst="rect">
-            <a:avLst/>
-          </a:prstGeom>
-          <a:noFill/>
-        </p:spPr>
-        <p:txBody>
-          <a:bodyPr wrap="square">
-            <a:spAutoFit/>
-          </a:bodyPr>
-          <a:lstStyle/>
-          <a:p>
-            <a:pPr algn="l"/>
-            <a:r>
-              <a:rPr sz="1700" b="0" i="0">
-                <a:solidFill>
-                  <a:srgbClr val="2C3E50"/>
-                </a:solidFill>
-              </a:rPr>
-              <a:t>It maps directly onto a real organizational decision: one shared chatbot vs. custom domain automation. The paper's answer: both, but designed differently.</a:t>
-            </a:r>
-          </a:p>
-        </p:txBody>
-      </p:sp>
-      <p:sp>
-        <p:nvSpPr>
-          <p:cNvPr id="10" name="TextBox 9"/>
-          <p:cNvSpPr txBox="1"/>
-          <p:nvPr/>
-        </p:nvSpPr>
-        <p:spPr>
-          <a:xfrm>
-            <a:off x="320040" y="3200400"/>
-            <a:ext cx="11521440" cy="320040"/>
-          </a:xfrm>
-          <a:prstGeom prst="rect">
-            <a:avLst/>
-          </a:prstGeom>
-          <a:noFill/>
-        </p:spPr>
-        <p:txBody>
-          <a:bodyPr wrap="square">
-            <a:spAutoFit/>
-          </a:bodyPr>
-          <a:lstStyle/>
-          <a:p>
-            <a:pPr algn="l"/>
-            <a:r>
-              <a:rPr sz="1800" b="1" i="0">
-                <a:solidFill>
-                  <a:srgbClr val="1A2F5E"/>
-                </a:solidFill>
-              </a:rPr>
-              <a:t>3.  The Science–Operations similarity finding is counterintuitive</a:t>
-            </a:r>
-          </a:p>
-        </p:txBody>
-      </p:sp>
-      <p:sp>
-        <p:nvSpPr>
-          <p:cNvPr id="11" name="TextBox 10"/>
-          <p:cNvSpPr txBox="1"/>
-          <p:nvPr/>
-        </p:nvSpPr>
-        <p:spPr>
-          <a:xfrm>
-            <a:off x="320040" y="3520440"/>
-            <a:ext cx="11521440" cy="457200"/>
-          </a:xfrm>
-          <a:prstGeom prst="rect">
-            <a:avLst/>
-          </a:prstGeom>
-          <a:noFill/>
-        </p:spPr>
-        <p:txBody>
-          <a:bodyPr wrap="square">
-            <a:spAutoFit/>
-          </a:bodyPr>
-          <a:lstStyle/>
-          <a:p>
-            <a:pPr algn="l"/>
-            <a:r>
-              <a:rPr sz="1700" b="0" i="0">
-                <a:solidFill>
-                  <a:srgbClr val="2C3E50"/>
-                </a:solidFill>
-              </a:rPr>
-              <a:t>Most assume scientists and admin staff would want completely different tools. Copilot needs overlap — a shared org-wide tool is defensible.</a:t>
-            </a:r>
-          </a:p>
-        </p:txBody>
-      </p:sp>
-      <p:sp>
-        <p:nvSpPr>
-          <p:cNvPr id="12" name="TextBox 11"/>
-          <p:cNvSpPr txBox="1"/>
-          <p:nvPr/>
-        </p:nvSpPr>
-        <p:spPr>
-          <a:xfrm>
-            <a:off x="320040" y="4160520"/>
-            <a:ext cx="11521440" cy="320040"/>
-          </a:xfrm>
-          <a:prstGeom prst="rect">
-            <a:avLst/>
-          </a:prstGeom>
-          <a:noFill/>
-        </p:spPr>
-        <p:txBody>
-          <a:bodyPr wrap="square">
-            <a:spAutoFit/>
-          </a:bodyPr>
-          <a:lstStyle/>
-          <a:p>
-            <a:pPr algn="l"/>
-            <a:r>
-              <a:rPr sz="1800" b="1" i="0">
-                <a:solidFill>
-                  <a:srgbClr val="1A2F5E"/>
-                </a:solidFill>
-              </a:rPr>
-              <a:t>4.  P1's story is the most compelling evidence</a:t>
-            </a:r>
-          </a:p>
-        </p:txBody>
-      </p:sp>
-      <p:sp>
-        <p:nvSpPr>
-          <p:cNvPr id="13" name="TextBox 12"/>
-          <p:cNvSpPr txBox="1"/>
-          <p:nvPr/>
-        </p:nvSpPr>
-        <p:spPr>
-          <a:xfrm>
-            <a:off x="320040" y="4480560"/>
-            <a:ext cx="11521440" cy="457200"/>
-          </a:xfrm>
-          <a:prstGeom prst="rect">
-            <a:avLst/>
-          </a:prstGeom>
-          <a:noFill/>
-        </p:spPr>
-        <p:txBody>
-          <a:bodyPr wrap="square">
-            <a:spAutoFit/>
-          </a:bodyPr>
-          <a:lstStyle/>
-          <a:p>
-            <a:pPr algn="l"/>
-            <a:r>
-              <a:rPr sz="1700" b="0" i="0">
-                <a:solidFill>
-                  <a:srgbClr val="2C3E50"/>
-                </a:solidFill>
-              </a:rPr>
-              <a:t>One Operations employee (no SE background) built a working safety instrument app in days. A concrete, verifiable productivity claim — not a stated preference.</a:t>
-            </a:r>
-          </a:p>
-        </p:txBody>
-      </p:sp>
-      <p:sp>
-        <p:nvSpPr>
-          <p:cNvPr id="14" name="TextBox 13"/>
-          <p:cNvSpPr txBox="1"/>
-          <p:nvPr/>
-        </p:nvSpPr>
-        <p:spPr>
-          <a:xfrm>
-            <a:off x="11704320" y="6492240"/>
-            <a:ext cx="365760" cy="274320"/>
-          </a:xfrm>
-          <a:prstGeom prst="rect">
-            <a:avLst/>
-          </a:prstGeom>
-          <a:noFill/>
-        </p:spPr>
-        <p:txBody>
-          <a:bodyPr wrap="square">
-            <a:spAutoFit/>
-          </a:bodyPr>
-          <a:lstStyle/>
-          <a:p>
-            <a:pPr algn="r"/>
-            <a:r>
-              <a:rPr sz="1200" b="0" i="0">
-                <a:solidFill>
-                  <a:srgbClr val="7F8C8D"/>
-                </a:solidFill>
-              </a:rPr>
-              <a:t>10</a:t>
-            </a:r>
-          </a:p>
-        </p:txBody>
-      </p:sp>
-    </p:spTree>
-  </p:cSld>
-  <p:clrMapOvr>
-    <a:masterClrMapping/>
-  </p:clrMapOvr>
-</p:sld>
-</file>
-
-<file path=ppt/slides/slide11.xml><?xml version="1.0" encoding="utf-8"?>
-<p:sld xmlns:a="http://schemas.openxmlformats.org/drawingml/2006/main" xmlns:p="http://schemas.openxmlformats.org/presentationml/2006/main" xmlns:r="http://schemas.openxmlformats.org/officeDocument/2006/relationships">
-  <p:cSld>
-    <p:spTree>
-      <p:nvGrpSpPr>
-        <p:cNvPr id="1" name=""/>
-        <p:cNvGrpSpPr/>
-        <p:nvPr/>
-      </p:nvGrpSpPr>
-      <p:grpSpPr/>
-      <p:sp>
-        <p:nvSpPr>
-          <p:cNvPr id="2" name="Rectangle 1"/>
+              <a:t>Research Questions:</a:t>
+            </a:r>
+          </a:p>
+        </p:txBody>
+      </p:sp>
+      <p:sp>
+        <p:nvSpPr>
+          <p:cNvPr id="11" name="Rectangle 10"/>
           <p:cNvSpPr/>
           <p:nvPr/>
         </p:nvSpPr>
         <p:spPr>
           <a:xfrm>
-            <a:off x="0" y="0"/>
-            <a:ext cx="12188952" cy="1143000"/>
+            <a:off x="6400800" y="1581912"/>
+            <a:ext cx="5394960" cy="1143000"/>
           </a:xfrm>
           <a:prstGeom prst="rect">
             <a:avLst/>
           </a:prstGeom>
           <a:solidFill>
-            <a:srgbClr val="1A2F5E"/>
+            <a:srgbClr val="EAF2FF"/>
           </a:solidFill>
           <a:ln>
             <a:noFill/>
@@ -3933,14 +3871,14 @@
       </p:sp>
       <p:sp>
         <p:nvSpPr>
-          <p:cNvPr id="3" name="TextBox 2"/>
+          <p:cNvPr id="12" name="TextBox 11"/>
           <p:cNvSpPr txBox="1"/>
           <p:nvPr/>
         </p:nvSpPr>
         <p:spPr>
           <a:xfrm>
-            <a:off x="320040" y="137160"/>
-            <a:ext cx="11430000" cy="685800"/>
+            <a:off x="6537960" y="1645920"/>
+            <a:ext cx="502920" cy="320040"/>
           </a:xfrm>
           <a:prstGeom prst="rect">
             <a:avLst/>
@@ -3955,26 +3893,26 @@
           <a:p>
             <a:pPr algn="l"/>
             <a:r>
-              <a:rPr sz="2800" b="1" i="0">
-                <a:solidFill>
-                  <a:srgbClr val="FFFFFF"/>
+              <a:rPr sz="1600" b="1" i="0">
+                <a:solidFill>
+                  <a:srgbClr val="1A2F5E"/>
                 </a:solidFill>
               </a:rPr>
-              <a:t>What I Don't Buy</a:t>
-            </a:r>
-          </a:p>
-        </p:txBody>
-      </p:sp>
-      <p:sp>
-        <p:nvSpPr>
-          <p:cNvPr id="4" name="TextBox 3"/>
+              <a:t>RQ1</a:t>
+            </a:r>
+          </a:p>
+        </p:txBody>
+      </p:sp>
+      <p:sp>
+        <p:nvSpPr>
+          <p:cNvPr id="13" name="TextBox 12"/>
           <p:cNvSpPr txBox="1"/>
           <p:nvPr/>
         </p:nvSpPr>
         <p:spPr>
           <a:xfrm>
-            <a:off x="320040" y="749808"/>
-            <a:ext cx="11430000" cy="365760"/>
+            <a:off x="7040880" y="1645920"/>
+            <a:ext cx="4617720" cy="594360"/>
           </a:xfrm>
           <a:prstGeom prst="rect">
             <a:avLst/>
@@ -3991,24 +3929,67 @@
             <a:r>
               <a:rPr sz="1600" b="0" i="0">
                 <a:solidFill>
-                  <a:srgbClr val="ECF0F1"/>
+                  <a:srgbClr val="2C3E50"/>
                 </a:solidFill>
               </a:rPr>
-              <a:t>Presenter's critique — evidence-grounded</a:t>
-            </a:r>
-          </a:p>
-        </p:txBody>
-      </p:sp>
-      <p:sp>
-        <p:nvSpPr>
-          <p:cNvPr id="5" name="TextBox 4"/>
+              <a:t>How are Science and Operations workers using — and envisioning — generative AI to support their work?</a:t>
+            </a:r>
+          </a:p>
+        </p:txBody>
+      </p:sp>
+      <p:sp>
+        <p:nvSpPr>
+          <p:cNvPr id="14" name="Rectangle 13"/>
+          <p:cNvSpPr/>
+          <p:nvPr/>
+        </p:nvSpPr>
+        <p:spPr>
+          <a:xfrm>
+            <a:off x="6400800" y="2834640"/>
+            <a:ext cx="5394960" cy="1005840"/>
+          </a:xfrm>
+          <a:prstGeom prst="rect">
+            <a:avLst/>
+          </a:prstGeom>
+          <a:solidFill>
+            <a:srgbClr val="EAF2FF"/>
+          </a:solidFill>
+          <a:ln>
+            <a:noFill/>
+          </a:ln>
+        </p:spPr>
+        <p:style>
+          <a:lnRef idx="1">
+            <a:schemeClr val="accent1"/>
+          </a:lnRef>
+          <a:fillRef idx="3">
+            <a:schemeClr val="accent1"/>
+          </a:fillRef>
+          <a:effectRef idx="2">
+            <a:schemeClr val="accent1"/>
+          </a:effectRef>
+          <a:fontRef idx="minor">
+            <a:schemeClr val="lt1"/>
+          </a:fontRef>
+        </p:style>
+        <p:txBody>
+          <a:bodyPr rtlCol="0" anchor="ctr"/>
+          <a:lstStyle/>
+          <a:p>
+            <a:pPr algn="ctr"/>
+          </a:p>
+        </p:txBody>
+      </p:sp>
+      <p:sp>
+        <p:nvSpPr>
+          <p:cNvPr id="15" name="TextBox 14"/>
           <p:cNvSpPr txBox="1"/>
           <p:nvPr/>
         </p:nvSpPr>
         <p:spPr>
           <a:xfrm>
-            <a:off x="8046720" y="1280160"/>
-            <a:ext cx="3931920" cy="320040"/>
+            <a:off x="6537960" y="2898648"/>
+            <a:ext cx="502920" cy="320040"/>
           </a:xfrm>
           <a:prstGeom prst="rect">
             <a:avLst/>
@@ -4023,12 +4004,375 @@
           <a:p>
             <a:pPr algn="l"/>
             <a:r>
+              <a:rPr sz="1600" b="1" i="0">
+                <a:solidFill>
+                  <a:srgbClr val="1A2F5E"/>
+                </a:solidFill>
+              </a:rPr>
+              <a:t>RQ2</a:t>
+            </a:r>
+          </a:p>
+        </p:txBody>
+      </p:sp>
+      <p:sp>
+        <p:nvSpPr>
+          <p:cNvPr id="16" name="TextBox 15"/>
+          <p:cNvSpPr txBox="1"/>
+          <p:nvPr/>
+        </p:nvSpPr>
+        <p:spPr>
+          <a:xfrm>
+            <a:off x="7040880" y="2898648"/>
+            <a:ext cx="4617720" cy="594360"/>
+          </a:xfrm>
+          <a:prstGeom prst="rect">
+            <a:avLst/>
+          </a:prstGeom>
+          <a:noFill/>
+        </p:spPr>
+        <p:txBody>
+          <a:bodyPr wrap="square">
+            <a:spAutoFit/>
+          </a:bodyPr>
+          <a:lstStyle/>
+          <a:p>
+            <a:pPr algn="l"/>
+            <a:r>
+              <a:rPr sz="1600" b="0" i="0">
+                <a:solidFill>
+                  <a:srgbClr val="2C3E50"/>
+                </a:solidFill>
+              </a:rPr>
+              <a:t>What risks (privacy, security, ethics) exist for using generative AI at a national lab?</a:t>
+            </a:r>
+          </a:p>
+        </p:txBody>
+      </p:sp>
+      <p:sp>
+        <p:nvSpPr>
+          <p:cNvPr id="17" name="TextBox 16"/>
+          <p:cNvSpPr txBox="1"/>
+          <p:nvPr/>
+        </p:nvSpPr>
+        <p:spPr>
+          <a:xfrm>
+            <a:off x="6400800" y="4023360"/>
+            <a:ext cx="5394960" cy="320040"/>
+          </a:xfrm>
+          <a:prstGeom prst="rect">
+            <a:avLst/>
+          </a:prstGeom>
+          <a:noFill/>
+        </p:spPr>
+        <p:txBody>
+          <a:bodyPr wrap="square">
+            <a:spAutoFit/>
+          </a:bodyPr>
+          <a:lstStyle/>
+          <a:p>
+            <a:pPr algn="l"/>
+            <a:r>
+              <a:rPr sz="1700" b="1" i="0">
+                <a:solidFill>
+                  <a:srgbClr val="1A2F5E"/>
+                </a:solidFill>
+              </a:rPr>
+              <a:t>Five contributions:</a:t>
+            </a:r>
+          </a:p>
+        </p:txBody>
+      </p:sp>
+      <p:sp>
+        <p:nvSpPr>
+          <p:cNvPr id="18" name="TextBox 17"/>
+          <p:cNvSpPr txBox="1"/>
+          <p:nvPr/>
+        </p:nvSpPr>
+        <p:spPr>
+          <a:xfrm>
+            <a:off x="6400800" y="4361688"/>
+            <a:ext cx="5394960" cy="1828800"/>
+          </a:xfrm>
+          <a:prstGeom prst="rect">
+            <a:avLst/>
+          </a:prstGeom>
+          <a:noFill/>
+        </p:spPr>
+        <p:txBody>
+          <a:bodyPr wrap="square">
+            <a:spAutoFit/>
+          </a:bodyPr>
+          <a:lstStyle/>
+          <a:p>
+            <a:pPr>
+              <a:spcBef>
+                <a:spcPts val="300"/>
+              </a:spcBef>
+            </a:pPr>
+            <a:r>
+              <a:rPr sz="1600">
+                <a:solidFill>
+                  <a:srgbClr val="2C3E50"/>
+                </a:solidFill>
+              </a:rPr>
+              <a:t>1.  Novel Argo usage data (org-wide GenAI deployment)</a:t>
+            </a:r>
+          </a:p>
+          <a:p>
+            <a:pPr>
+              <a:spcBef>
+                <a:spcPts val="300"/>
+              </a:spcBef>
+            </a:pPr>
+            <a:r>
+              <a:rPr sz="1600">
+                <a:solidFill>
+                  <a:srgbClr val="2C3E50"/>
+                </a:solidFill>
+              </a:rPr>
+              <a:t>2.  Copilot vs. workflow agent use-case taxonomy</a:t>
+            </a:r>
+          </a:p>
+          <a:p>
+            <a:pPr>
+              <a:spcBef>
+                <a:spcPts val="300"/>
+              </a:spcBef>
+            </a:pPr>
+            <a:r>
+              <a:rPr sz="1600">
+                <a:solidFill>
+                  <a:srgbClr val="2C3E50"/>
+                </a:solidFill>
+              </a:rPr>
+              <a:t>3.  Risk perspectives from Science &amp; Operations</a:t>
+            </a:r>
+          </a:p>
+          <a:p>
+            <a:pPr>
+              <a:spcBef>
+                <a:spcPts val="300"/>
+              </a:spcBef>
+            </a:pPr>
+            <a:r>
+              <a:rPr sz="1600">
+                <a:solidFill>
+                  <a:srgbClr val="2C3E50"/>
+                </a:solidFill>
+              </a:rPr>
+              <a:t>4.  Design recommendations for organizations</a:t>
+            </a:r>
+          </a:p>
+          <a:p>
+            <a:pPr>
+              <a:spcBef>
+                <a:spcPts val="300"/>
+              </a:spcBef>
+            </a:pPr>
+            <a:r>
+              <a:rPr sz="1600">
+                <a:solidFill>
+                  <a:srgbClr val="2C3E50"/>
+                </a:solidFill>
+              </a:rPr>
+              <a:t>5.  Future HCI research directions</a:t>
+            </a:r>
+          </a:p>
+        </p:txBody>
+      </p:sp>
+      <p:sp>
+        <p:nvSpPr>
+          <p:cNvPr id="19" name="TextBox 18"/>
+          <p:cNvSpPr txBox="1"/>
+          <p:nvPr/>
+        </p:nvSpPr>
+        <p:spPr>
+          <a:xfrm>
+            <a:off x="11704320" y="6537960"/>
+            <a:ext cx="365760" cy="274320"/>
+          </a:xfrm>
+          <a:prstGeom prst="rect">
+            <a:avLst/>
+          </a:prstGeom>
+          <a:noFill/>
+        </p:spPr>
+        <p:txBody>
+          <a:bodyPr wrap="square">
+            <a:spAutoFit/>
+          </a:bodyPr>
+          <a:lstStyle/>
+          <a:p>
+            <a:pPr algn="r"/>
+            <a:r>
+              <a:rPr sz="1200" b="0" i="0">
+                <a:solidFill>
+                  <a:srgbClr val="7F8C8D"/>
+                </a:solidFill>
+              </a:rPr>
+              <a:t>2</a:t>
+            </a:r>
+          </a:p>
+        </p:txBody>
+      </p:sp>
+    </p:spTree>
+  </p:cSld>
+  <p:clrMapOvr>
+    <a:masterClrMapping/>
+  </p:clrMapOvr>
+</p:sld>
+</file>
+
+<file path=ppt/slides/slide3.xml><?xml version="1.0" encoding="utf-8"?>
+<p:sld xmlns:a="http://schemas.openxmlformats.org/drawingml/2006/main" xmlns:p="http://schemas.openxmlformats.org/presentationml/2006/main" xmlns:r="http://schemas.openxmlformats.org/officeDocument/2006/relationships">
+  <p:cSld>
+    <p:spTree>
+      <p:nvGrpSpPr>
+        <p:cNvPr id="1" name=""/>
+        <p:cNvGrpSpPr/>
+        <p:nvPr/>
+      </p:nvGrpSpPr>
+      <p:grpSpPr/>
+      <p:sp>
+        <p:nvSpPr>
+          <p:cNvPr id="2" name="Rectangle 1"/>
+          <p:cNvSpPr/>
+          <p:nvPr/>
+        </p:nvSpPr>
+        <p:spPr>
+          <a:xfrm>
+            <a:off x="0" y="0"/>
+            <a:ext cx="12188952" cy="1097280"/>
+          </a:xfrm>
+          <a:prstGeom prst="rect">
+            <a:avLst/>
+          </a:prstGeom>
+          <a:solidFill>
+            <a:srgbClr val="1A2F5E"/>
+          </a:solidFill>
+          <a:ln>
+            <a:noFill/>
+          </a:ln>
+        </p:spPr>
+        <p:style>
+          <a:lnRef idx="1">
+            <a:schemeClr val="accent1"/>
+          </a:lnRef>
+          <a:fillRef idx="3">
+            <a:schemeClr val="accent1"/>
+          </a:fillRef>
+          <a:effectRef idx="2">
+            <a:schemeClr val="accent1"/>
+          </a:effectRef>
+          <a:fontRef idx="minor">
+            <a:schemeClr val="lt1"/>
+          </a:fontRef>
+        </p:style>
+        <p:txBody>
+          <a:bodyPr rtlCol="0" anchor="ctr"/>
+          <a:lstStyle/>
+          <a:p>
+            <a:pPr algn="ctr"/>
+          </a:p>
+        </p:txBody>
+      </p:sp>
+      <p:sp>
+        <p:nvSpPr>
+          <p:cNvPr id="3" name="TextBox 2"/>
+          <p:cNvSpPr txBox="1"/>
+          <p:nvPr/>
+        </p:nvSpPr>
+        <p:spPr>
+          <a:xfrm>
+            <a:off x="365760" y="91440"/>
+            <a:ext cx="11430000" cy="640080"/>
+          </a:xfrm>
+          <a:prstGeom prst="rect">
+            <a:avLst/>
+          </a:prstGeom>
+          <a:noFill/>
+        </p:spPr>
+        <p:txBody>
+          <a:bodyPr wrap="square">
+            <a:spAutoFit/>
+          </a:bodyPr>
+          <a:lstStyle/>
+          <a:p>
+            <a:pPr algn="l"/>
+            <a:r>
+              <a:rPr sz="2800" b="1" i="0">
+                <a:solidFill>
+                  <a:srgbClr val="FFFFFF"/>
+                </a:solidFill>
+              </a:rPr>
+              <a:t>Methodology</a:t>
+            </a:r>
+          </a:p>
+        </p:txBody>
+      </p:sp>
+      <p:sp>
+        <p:nvSpPr>
+          <p:cNvPr id="4" name="TextBox 3"/>
+          <p:cNvSpPr txBox="1"/>
+          <p:nvPr/>
+        </p:nvSpPr>
+        <p:spPr>
+          <a:xfrm>
+            <a:off x="365760" y="713232"/>
+            <a:ext cx="11430000" cy="347472"/>
+          </a:xfrm>
+          <a:prstGeom prst="rect">
+            <a:avLst/>
+          </a:prstGeom>
+          <a:noFill/>
+        </p:spPr>
+        <p:txBody>
+          <a:bodyPr wrap="square">
+            <a:spAutoFit/>
+          </a:bodyPr>
+          <a:lstStyle/>
+          <a:p>
+            <a:pPr algn="l"/>
+            <a:r>
               <a:rPr sz="1500" b="0" i="1">
                 <a:solidFill>
-                  <a:srgbClr val="7F8C8D"/>
+                  <a:srgbClr val="ECF0F1"/>
                 </a:solidFill>
               </a:rPr>
-              <a:t>Figure 3 — Wagman et al. (2025)</a:t>
+              <a:t>Argonne National Lab  ·  Jan–Aug 2024  ·  Survey + Interviews + Usage Data</a:t>
+            </a:r>
+          </a:p>
+        </p:txBody>
+      </p:sp>
+      <p:sp>
+        <p:nvSpPr>
+          <p:cNvPr id="5" name="TextBox 4"/>
+          <p:cNvSpPr txBox="1"/>
+          <p:nvPr/>
+        </p:nvSpPr>
+        <p:spPr>
+          <a:xfrm>
+            <a:off x="365760" y="1234440"/>
+            <a:ext cx="6858000" cy="320040"/>
+          </a:xfrm>
+          <a:prstGeom prst="rect">
+            <a:avLst/>
+          </a:prstGeom>
+          <a:noFill/>
+        </p:spPr>
+        <p:txBody>
+          <a:bodyPr wrap="square">
+            <a:spAutoFit/>
+          </a:bodyPr>
+          <a:lstStyle/>
+          <a:p>
+            <a:pPr algn="l"/>
+            <a:r>
+              <a:rPr sz="1800" b="1" i="0">
+                <a:solidFill>
+                  <a:srgbClr val="1A2F5E"/>
+                </a:solidFill>
+              </a:rPr>
+              <a:t>Three data sources:</a:t>
             </a:r>
           </a:p>
         </p:txBody>
@@ -4042,8 +4386,8 @@
           <p:nvPr/>
         </p:nvGraphicFramePr>
         <p:xfrm>
-          <a:off x="8046720" y="1645920"/>
-          <a:ext cx="3931920" cy="1828800"/>
+          <a:off x="365760" y="1581912"/>
+          <a:ext cx="6766560" cy="1554480"/>
         </p:xfrm>
         <a:graphic>
           <a:graphicData uri="http://schemas.openxmlformats.org/drawingml/2006/table">
@@ -4052,10 +4396,11 @@
                 <a:tableStyleId>{5C22544A-7EE6-4342-B048-85BDC9FD1C3A}</a:tableStyleId>
               </a:tblPr>
               <a:tblGrid>
-                <a:gridCol w="1965960"/>
-                <a:gridCol w="1965960"/>
+                <a:gridCol w="2255520"/>
+                <a:gridCol w="2255520"/>
+                <a:gridCol w="2255520"/>
               </a:tblGrid>
-              <a:tr h="304800">
+              <a:tr h="388620">
                 <a:tc>
                   <a:txBody>
                     <a:bodyPr/>
@@ -4068,7 +4413,7 @@
                             <a:srgbClr val="FFFFFF"/>
                           </a:solidFill>
                         </a:rPr>
-                        <a:t>Response</a:t>
+                        <a:t>Source</a:t>
                       </a:r>
                     </a:p>
                   </a:txBody>
@@ -4090,7 +4435,29 @@
                             <a:srgbClr val="FFFFFF"/>
                           </a:solidFill>
                         </a:rPr>
-                        <a:t>%</a:t>
+                        <a:t>N</a:t>
+                      </a:r>
+                    </a:p>
+                  </a:txBody>
+                  <a:tcPr>
+                    <a:solidFill>
+                      <a:srgbClr val="1A2F5E"/>
+                    </a:solidFill>
+                  </a:tcPr>
+                </a:tc>
+                <a:tc>
+                  <a:txBody>
+                    <a:bodyPr/>
+                    <a:lstStyle/>
+                    <a:p>
+                      <a:pPr algn="ctr"/>
+                      <a:r>
+                        <a:rPr b="1" sz="1600">
+                          <a:solidFill>
+                            <a:srgbClr val="FFFFFF"/>
+                          </a:solidFill>
+                        </a:rPr>
+                        <a:t>Period</a:t>
                       </a:r>
                     </a:p>
                   </a:txBody>
@@ -4101,7 +4468,7 @@
                   </a:tcPr>
                 </a:tc>
               </a:tr>
-              <a:tr h="304800">
+              <a:tr h="388620">
                 <a:tc>
                   <a:txBody>
                     <a:bodyPr/>
@@ -4113,7 +4480,7 @@
                             <a:srgbClr val="2C3E50"/>
                           </a:solidFill>
                         </a:rPr>
-                        <a:t>Strongly agree</a:t>
+                        <a:t>Argo telemetry (metadata only — no query content)</a:t>
                       </a:r>
                     </a:p>
                   </a:txBody>
@@ -4134,7 +4501,7 @@
                             <a:srgbClr val="2C3E50"/>
                           </a:solidFill>
                         </a:rPr>
-                        <a:t>7.6%</a:t>
+                        <a:t>All users</a:t>
                       </a:r>
                     </a:p>
                   </a:txBody>
@@ -4144,8 +4511,6 @@
                     </a:solidFill>
                   </a:tcPr>
                 </a:tc>
-              </a:tr>
-              <a:tr h="304800">
                 <a:tc>
                   <a:txBody>
                     <a:bodyPr/>
@@ -4157,7 +4522,30 @@
                             <a:srgbClr val="2C3E50"/>
                           </a:solidFill>
                         </a:rPr>
-                        <a:t>Agree</a:t>
+                        <a:t>Jan–Aug 2024</a:t>
+                      </a:r>
+                    </a:p>
+                  </a:txBody>
+                  <a:tcPr>
+                    <a:solidFill>
+                      <a:srgbClr val="ECF0F1"/>
+                    </a:solidFill>
+                  </a:tcPr>
+                </a:tc>
+              </a:tr>
+              <a:tr h="388620">
+                <a:tc>
+                  <a:txBody>
+                    <a:bodyPr/>
+                    <a:lstStyle/>
+                    <a:p>
+                      <a:r>
+                        <a:rPr sz="1600">
+                          <a:solidFill>
+                            <a:srgbClr val="2C3E50"/>
+                          </a:solidFill>
+                        </a:rPr>
+                        <a:t>Survey (Qualtrics, 15 task items + open-ended)</a:t>
                       </a:r>
                     </a:p>
                   </a:txBody>
@@ -4178,7 +4566,7 @@
                             <a:srgbClr val="2C3E50"/>
                           </a:solidFill>
                         </a:rPr>
-                        <a:t>21.2%</a:t>
+                        <a:t>N = 66</a:t>
                       </a:r>
                     </a:p>
                   </a:txBody>
@@ -4188,8 +4576,6 @@
                     </a:solidFill>
                   </a:tcPr>
                 </a:tc>
-              </a:tr>
-              <a:tr h="304800">
                 <a:tc>
                   <a:txBody>
                     <a:bodyPr/>
@@ -4201,7 +4587,30 @@
                             <a:srgbClr val="2C3E50"/>
                           </a:solidFill>
                         </a:rPr>
-                        <a:t>Neither / nor</a:t>
+                        <a:t>Apr–Jun 2024</a:t>
+                      </a:r>
+                    </a:p>
+                  </a:txBody>
+                  <a:tcPr>
+                    <a:solidFill>
+                      <a:srgbClr val="FFFFFF"/>
+                    </a:solidFill>
+                  </a:tcPr>
+                </a:tc>
+              </a:tr>
+              <a:tr h="388620">
+                <a:tc>
+                  <a:txBody>
+                    <a:bodyPr/>
+                    <a:lstStyle/>
+                    <a:p>
+                      <a:r>
+                        <a:rPr sz="1600">
+                          <a:solidFill>
+                            <a:srgbClr val="2C3E50"/>
+                          </a:solidFill>
+                        </a:rPr>
+                        <a:t>Semi-structured interviews (30 min, Zoom)</a:t>
                       </a:r>
                     </a:p>
                   </a:txBody>
@@ -4222,74 +4631,7 @@
                             <a:srgbClr val="2C3E50"/>
                           </a:solidFill>
                         </a:rPr>
-                        <a:t>21.2%</a:t>
-                      </a:r>
-                    </a:p>
-                  </a:txBody>
-                  <a:tcPr>
-                    <a:solidFill>
-                      <a:srgbClr val="ECF0F1"/>
-                    </a:solidFill>
-                  </a:tcPr>
-                </a:tc>
-              </a:tr>
-              <a:tr h="304800">
-                <a:tc>
-                  <a:txBody>
-                    <a:bodyPr/>
-                    <a:lstStyle/>
-                    <a:p>
-                      <a:r>
-                        <a:rPr sz="1600">
-                          <a:solidFill>
-                            <a:srgbClr val="2C3E50"/>
-                          </a:solidFill>
-                        </a:rPr>
-                        <a:t>Disagree</a:t>
-                      </a:r>
-                    </a:p>
-                  </a:txBody>
-                  <a:tcPr>
-                    <a:solidFill>
-                      <a:srgbClr val="FFFFFF"/>
-                    </a:solidFill>
-                  </a:tcPr>
-                </a:tc>
-                <a:tc>
-                  <a:txBody>
-                    <a:bodyPr/>
-                    <a:lstStyle/>
-                    <a:p>
-                      <a:r>
-                        <a:rPr sz="1600">
-                          <a:solidFill>
-                            <a:srgbClr val="2C3E50"/>
-                          </a:solidFill>
-                        </a:rPr>
-                        <a:t>34.8%</a:t>
-                      </a:r>
-                    </a:p>
-                  </a:txBody>
-                  <a:tcPr>
-                    <a:solidFill>
-                      <a:srgbClr val="FFFFFF"/>
-                    </a:solidFill>
-                  </a:tcPr>
-                </a:tc>
-              </a:tr>
-              <a:tr h="304800">
-                <a:tc>
-                  <a:txBody>
-                    <a:bodyPr/>
-                    <a:lstStyle/>
-                    <a:p>
-                      <a:r>
-                        <a:rPr sz="1600">
-                          <a:solidFill>
-                            <a:srgbClr val="2C3E50"/>
-                          </a:solidFill>
-                        </a:rPr>
-                        <a:t>Strongly disagree</a:t>
+                        <a:t>N = 22</a:t>
                       </a:r>
                     </a:p>
                   </a:txBody>
@@ -4310,7 +4652,7 @@
                             <a:srgbClr val="2C3E50"/>
                           </a:solidFill>
                         </a:rPr>
-                        <a:t>15.2%</a:t>
+                        <a:t>Apr–Jul 2024</a:t>
                       </a:r>
                     </a:p>
                   </a:txBody>
@@ -4333,8 +4675,8 @@
         </p:nvSpPr>
         <p:spPr>
           <a:xfrm>
-            <a:off x="8046720" y="3611880"/>
-            <a:ext cx="3931920" cy="548640"/>
+            <a:off x="365760" y="3291840"/>
+            <a:ext cx="6766560" cy="320040"/>
           </a:xfrm>
           <a:prstGeom prst="rect">
             <a:avLst/>
@@ -4349,276 +4691,32 @@
           <a:p>
             <a:pPr algn="l"/>
             <a:r>
-              <a:rPr sz="1500" b="1" i="0">
-                <a:solidFill>
-                  <a:srgbClr val="E74C3C"/>
+              <a:rPr sz="1800" b="1" i="0">
+                <a:solidFill>
+                  <a:srgbClr val="1A2F5E"/>
                 </a:solidFill>
               </a:rPr>
-              <a:t>Only 28.8% say LLMs are essential — yet 94% are familiar and 82% used ChatGPT.</a:t>
-            </a:r>
-          </a:p>
-        </p:txBody>
-      </p:sp>
-      <p:sp>
-        <p:nvSpPr>
-          <p:cNvPr id="8" name="TextBox 7"/>
-          <p:cNvSpPr txBox="1"/>
-          <p:nvPr/>
-        </p:nvSpPr>
-        <p:spPr>
-          <a:xfrm>
-            <a:off x="8046720" y="4206240"/>
-            <a:ext cx="3931920" cy="365760"/>
-          </a:xfrm>
-          <a:prstGeom prst="rect">
-            <a:avLst/>
-          </a:prstGeom>
-          <a:noFill/>
-        </p:spPr>
-        <p:txBody>
-          <a:bodyPr wrap="square">
-            <a:spAutoFit/>
-          </a:bodyPr>
-          <a:lstStyle/>
-          <a:p>
-            <a:pPr algn="l"/>
-            <a:r>
-              <a:rPr sz="1400" b="0" i="1">
-                <a:solidFill>
-                  <a:srgbClr val="7F8C8D"/>
-                </a:solidFill>
-              </a:rPr>
-              <a:t>"LLMs have become an essential part of my workflow"</a:t>
-            </a:r>
-          </a:p>
-        </p:txBody>
-      </p:sp>
-      <p:sp>
-        <p:nvSpPr>
-          <p:cNvPr id="9" name="TextBox 8"/>
-          <p:cNvSpPr txBox="1"/>
-          <p:nvPr/>
-        </p:nvSpPr>
-        <p:spPr>
-          <a:xfrm>
-            <a:off x="320040" y="1280160"/>
-            <a:ext cx="7498079" cy="3657600"/>
-          </a:xfrm>
-          <a:prstGeom prst="rect">
-            <a:avLst/>
-          </a:prstGeom>
-          <a:noFill/>
-        </p:spPr>
-        <p:txBody>
-          <a:bodyPr wrap="square">
-            <a:spAutoFit/>
-          </a:bodyPr>
-          <a:lstStyle/>
-          <a:p>
-            <a:pPr>
-              <a:spcBef>
-                <a:spcPts val="400"/>
-              </a:spcBef>
-            </a:pPr>
-            <a:r>
-              <a:rPr sz="1700">
-                <a:solidFill>
-                  <a:srgbClr val="2C3E50"/>
-                </a:solidFill>
-              </a:rPr>
-              <a:t>1.  Early-adopter bias — self-selected participants; non-adopters' views absent</a:t>
-            </a:r>
-          </a:p>
-          <a:p>
-            <a:pPr>
-              <a:spcBef>
-                <a:spcPts val="400"/>
-              </a:spcBef>
-            </a:pPr>
-            <a:r>
-              <a:rPr sz="1700">
-                <a:solidFill>
-                  <a:srgbClr val="2C3E50"/>
-                </a:solidFill>
-              </a:rPr>
-              <a:t/>
-            </a:r>
-          </a:p>
-          <a:p>
-            <a:pPr>
-              <a:spcBef>
-                <a:spcPts val="400"/>
-              </a:spcBef>
-            </a:pPr>
-            <a:r>
-              <a:rPr sz="1700">
-                <a:solidFill>
-                  <a:srgbClr val="2C3E50"/>
-                </a:solidFill>
-              </a:rPr>
-              <a:t>2.  Single org — Argonne's classified-data concerns are atypically high</a:t>
-            </a:r>
-          </a:p>
-          <a:p>
-            <a:pPr>
-              <a:spcBef>
-                <a:spcPts val="400"/>
-              </a:spcBef>
-            </a:pPr>
-            <a:r>
-              <a:rPr sz="1700">
-                <a:solidFill>
-                  <a:srgbClr val="2C3E50"/>
-                </a:solidFill>
-              </a:rPr>
-              <a:t>     May not transfer to universities or private labs</a:t>
-            </a:r>
-          </a:p>
-          <a:p>
-            <a:pPr>
-              <a:spcBef>
-                <a:spcPts val="400"/>
-              </a:spcBef>
-            </a:pPr>
-            <a:r>
-              <a:rPr sz="1700">
-                <a:solidFill>
-                  <a:srgbClr val="2C3E50"/>
-                </a:solidFill>
-              </a:rPr>
-              <a:t/>
-            </a:r>
-          </a:p>
-          <a:p>
-            <a:pPr>
-              <a:spcBef>
-                <a:spcPts val="400"/>
-              </a:spcBef>
-            </a:pPr>
-            <a:r>
-              <a:rPr sz="1700">
-                <a:solidFill>
-                  <a:srgbClr val="2C3E50"/>
-                </a:solidFill>
-              </a:rPr>
-              <a:t>3.  Science / Operations binary is too coarse — a software engineer and a</a:t>
-            </a:r>
-          </a:p>
-          <a:p>
-            <a:pPr>
-              <a:spcBef>
-                <a:spcPts val="400"/>
-              </a:spcBef>
-            </a:pPr>
-            <a:r>
-              <a:rPr sz="1700">
-                <a:solidFill>
-                  <a:srgbClr val="2C3E50"/>
-                </a:solidFill>
-              </a:rPr>
-              <a:t>     climate scientist have very different needs; within-group variation unexplored</a:t>
-            </a:r>
-          </a:p>
-          <a:p>
-            <a:pPr>
-              <a:spcBef>
-                <a:spcPts val="400"/>
-              </a:spcBef>
-            </a:pPr>
-            <a:r>
-              <a:rPr sz="1700">
-                <a:solidFill>
-                  <a:srgbClr val="2C3E50"/>
-                </a:solidFill>
-              </a:rPr>
-              <a:t/>
-            </a:r>
-          </a:p>
-          <a:p>
-            <a:pPr>
-              <a:spcBef>
-                <a:spcPts val="400"/>
-              </a:spcBef>
-            </a:pPr>
-            <a:r>
-              <a:rPr sz="1700">
-                <a:solidFill>
-                  <a:srgbClr val="2C3E50"/>
-                </a:solidFill>
-              </a:rPr>
-              <a:t>4.  Argo undercounts total GenAI use — telemetry misses ChatGPT/Claude/Gemini</a:t>
-            </a:r>
-          </a:p>
-        </p:txBody>
-      </p:sp>
-      <p:sp>
-        <p:nvSpPr>
-          <p:cNvPr id="10" name="TextBox 9"/>
-          <p:cNvSpPr txBox="1"/>
-          <p:nvPr/>
-        </p:nvSpPr>
-        <p:spPr>
-          <a:xfrm>
-            <a:off x="11704320" y="6492240"/>
-            <a:ext cx="365760" cy="274320"/>
-          </a:xfrm>
-          <a:prstGeom prst="rect">
-            <a:avLst/>
-          </a:prstGeom>
-          <a:noFill/>
-        </p:spPr>
-        <p:txBody>
-          <a:bodyPr wrap="square">
-            <a:spAutoFit/>
-          </a:bodyPr>
-          <a:lstStyle/>
-          <a:p>
-            <a:pPr algn="r"/>
-            <a:r>
-              <a:rPr sz="1200" b="0" i="0">
-                <a:solidFill>
-                  <a:srgbClr val="7F8C8D"/>
-                </a:solidFill>
-              </a:rPr>
-              <a:t>11</a:t>
-            </a:r>
-          </a:p>
-        </p:txBody>
-      </p:sp>
-    </p:spTree>
-  </p:cSld>
-  <p:clrMapOvr>
-    <a:masterClrMapping/>
-  </p:clrMapOvr>
-</p:sld>
-</file>
-
-<file path=ppt/slides/slide12.xml><?xml version="1.0" encoding="utf-8"?>
-<p:sld xmlns:a="http://schemas.openxmlformats.org/drawingml/2006/main" xmlns:p="http://schemas.openxmlformats.org/presentationml/2006/main" xmlns:r="http://schemas.openxmlformats.org/officeDocument/2006/relationships">
-  <p:cSld>
-    <p:spTree>
-      <p:nvGrpSpPr>
-        <p:cNvPr id="1" name=""/>
-        <p:cNvGrpSpPr/>
-        <p:nvPr/>
-      </p:nvGrpSpPr>
-      <p:grpSpPr/>
-      <p:sp>
-        <p:nvSpPr>
-          <p:cNvPr id="2" name="Rectangle 1"/>
+              <a:t>Two interaction modes — the paper's central framework:</a:t>
+            </a:r>
+          </a:p>
+        </p:txBody>
+      </p:sp>
+      <p:sp>
+        <p:nvSpPr>
+          <p:cNvPr id="8" name="Rectangle 7"/>
           <p:cNvSpPr/>
           <p:nvPr/>
         </p:nvSpPr>
         <p:spPr>
           <a:xfrm>
-            <a:off x="0" y="0"/>
-            <a:ext cx="12188952" cy="1143000"/>
+            <a:off x="365760" y="3657600"/>
+            <a:ext cx="3246120" cy="1600200"/>
           </a:xfrm>
           <a:prstGeom prst="rect">
             <a:avLst/>
           </a:prstGeom>
           <a:solidFill>
-            <a:srgbClr val="1A2F5E"/>
+            <a:srgbClr val="D6EAFF"/>
           </a:solidFill>
           <a:ln>
             <a:noFill/>
@@ -4648,14 +4746,14 @@
       </p:sp>
       <p:sp>
         <p:nvSpPr>
-          <p:cNvPr id="3" name="TextBox 2"/>
+          <p:cNvPr id="9" name="TextBox 8"/>
           <p:cNvSpPr txBox="1"/>
           <p:nvPr/>
         </p:nvSpPr>
         <p:spPr>
           <a:xfrm>
-            <a:off x="320040" y="137160"/>
-            <a:ext cx="11430000" cy="685800"/>
+            <a:off x="457200" y="3721608"/>
+            <a:ext cx="3063240" cy="365760"/>
           </a:xfrm>
           <a:prstGeom prst="rect">
             <a:avLst/>
@@ -4670,26 +4768,26 @@
           <a:p>
             <a:pPr algn="l"/>
             <a:r>
-              <a:rPr sz="2800" b="1" i="0">
-                <a:solidFill>
-                  <a:srgbClr val="FFFFFF"/>
+              <a:rPr sz="1800" b="1" i="0">
+                <a:solidFill>
+                  <a:srgbClr val="1A2F5E"/>
                 </a:solidFill>
               </a:rPr>
-              <a:t>What Would I Do Next?</a:t>
-            </a:r>
-          </a:p>
-        </p:txBody>
-      </p:sp>
-      <p:sp>
-        <p:nvSpPr>
-          <p:cNvPr id="4" name="TextBox 3"/>
+              <a:t>Copilot</a:t>
+            </a:r>
+          </a:p>
+        </p:txBody>
+      </p:sp>
+      <p:sp>
+        <p:nvSpPr>
+          <p:cNvPr id="10" name="TextBox 9"/>
           <p:cNvSpPr txBox="1"/>
           <p:nvPr/>
         </p:nvSpPr>
         <p:spPr>
           <a:xfrm>
-            <a:off x="320040" y="749808"/>
-            <a:ext cx="11430000" cy="365760"/>
+            <a:off x="457200" y="4069080"/>
+            <a:ext cx="3063240" cy="1097280"/>
           </a:xfrm>
           <a:prstGeom prst="rect">
             <a:avLst/>
@@ -4706,354 +4804,31 @@
             <a:r>
               <a:rPr sz="1600" b="0" i="0">
                 <a:solidFill>
-                  <a:srgbClr val="ECF0F1"/>
+                  <a:srgbClr val="2C3E50"/>
                 </a:solidFill>
               </a:rPr>
-              <a:t>Presenter's perspective</a:t>
-            </a:r>
-          </a:p>
-        </p:txBody>
-      </p:sp>
-      <p:sp>
-        <p:nvSpPr>
-          <p:cNvPr id="5" name="TextBox 4"/>
-          <p:cNvSpPr txBox="1"/>
-          <p:nvPr/>
-        </p:nvSpPr>
-        <p:spPr>
-          <a:xfrm>
-            <a:off x="320040" y="1280160"/>
-            <a:ext cx="11521440" cy="320040"/>
-          </a:xfrm>
-          <a:prstGeom prst="rect">
-            <a:avLst/>
-          </a:prstGeom>
-          <a:noFill/>
-        </p:spPr>
-        <p:txBody>
-          <a:bodyPr wrap="square">
-            <a:spAutoFit/>
-          </a:bodyPr>
-          <a:lstStyle/>
-          <a:p>
-            <a:pPr algn="l"/>
-            <a:r>
-              <a:rPr sz="1800" b="1" i="0">
-                <a:solidFill>
-                  <a:srgbClr val="1A2F5E"/>
-                </a:solidFill>
-              </a:rPr>
-              <a:t>1.  Longitudinal follow-up at the same lab</a:t>
-            </a:r>
-          </a:p>
-        </p:txBody>
-      </p:sp>
-      <p:sp>
-        <p:nvSpPr>
-          <p:cNvPr id="6" name="TextBox 5"/>
-          <p:cNvSpPr txBox="1"/>
-          <p:nvPr/>
-        </p:nvSpPr>
-        <p:spPr>
-          <a:xfrm>
-            <a:off x="320040" y="1600200"/>
-            <a:ext cx="11521440" cy="457200"/>
-          </a:xfrm>
-          <a:prstGeom prst="rect">
-            <a:avLst/>
-          </a:prstGeom>
-          <a:noFill/>
-        </p:spPr>
-        <p:txBody>
-          <a:bodyPr wrap="square">
-            <a:spAutoFit/>
-          </a:bodyPr>
-          <a:lstStyle/>
-          <a:p>
-            <a:pPr algn="l"/>
-            <a:r>
-              <a:rPr sz="1700" b="0" i="0">
-                <a:solidFill>
-                  <a:srgbClr val="2C3E50"/>
-                </a:solidFill>
-              </a:rPr>
-              <a:t>Argo was upgraded to GPT-4 after data collection. Would reliability concerns drop? Would the 28.8% 'essential workflow' figure grow?</a:t>
-            </a:r>
-          </a:p>
-        </p:txBody>
-      </p:sp>
-      <p:sp>
-        <p:nvSpPr>
-          <p:cNvPr id="7" name="TextBox 6"/>
-          <p:cNvSpPr txBox="1"/>
-          <p:nvPr/>
-        </p:nvSpPr>
-        <p:spPr>
-          <a:xfrm>
-            <a:off x="320040" y="2240280"/>
-            <a:ext cx="11521440" cy="320040"/>
-          </a:xfrm>
-          <a:prstGeom prst="rect">
-            <a:avLst/>
-          </a:prstGeom>
-          <a:noFill/>
-        </p:spPr>
-        <p:txBody>
-          <a:bodyPr wrap="square">
-            <a:spAutoFit/>
-          </a:bodyPr>
-          <a:lstStyle/>
-          <a:p>
-            <a:pPr algn="l"/>
-            <a:r>
-              <a:rPr sz="1800" b="1" i="0">
-                <a:solidFill>
-                  <a:srgbClr val="1A2F5E"/>
-                </a:solidFill>
-              </a:rPr>
-              <a:t>2.  Multi-organization comparison</a:t>
-            </a:r>
-          </a:p>
-        </p:txBody>
-      </p:sp>
-      <p:sp>
-        <p:nvSpPr>
-          <p:cNvPr id="8" name="TextBox 7"/>
-          <p:cNvSpPr txBox="1"/>
-          <p:nvPr/>
-        </p:nvSpPr>
-        <p:spPr>
-          <a:xfrm>
-            <a:off x="320040" y="2560320"/>
-            <a:ext cx="11521440" cy="457200"/>
-          </a:xfrm>
-          <a:prstGeom prst="rect">
-            <a:avLst/>
-          </a:prstGeom>
-          <a:noFill/>
-        </p:spPr>
-        <p:txBody>
-          <a:bodyPr wrap="square">
-            <a:spAutoFit/>
-          </a:bodyPr>
-          <a:lstStyle/>
-          <a:p>
-            <a:pPr algn="l"/>
-            <a:r>
-              <a:rPr sz="1700" b="0" i="0">
-                <a:solidFill>
-                  <a:srgbClr val="2C3E50"/>
-                </a:solidFill>
-              </a:rPr>
-              <a:t>University lab vs. national lab vs. private biotech — what's generalizable vs. context-specific across different data-sensitivity regimes?</a:t>
-            </a:r>
-          </a:p>
-        </p:txBody>
-      </p:sp>
-      <p:sp>
-        <p:nvSpPr>
-          <p:cNvPr id="9" name="TextBox 8"/>
-          <p:cNvSpPr txBox="1"/>
-          <p:nvPr/>
-        </p:nvSpPr>
-        <p:spPr>
-          <a:xfrm>
-            <a:off x="320040" y="3200400"/>
-            <a:ext cx="11521440" cy="320040"/>
-          </a:xfrm>
-          <a:prstGeom prst="rect">
-            <a:avLst/>
-          </a:prstGeom>
-          <a:noFill/>
-        </p:spPr>
-        <p:txBody>
-          <a:bodyPr wrap="square">
-            <a:spAutoFit/>
-          </a:bodyPr>
-          <a:lstStyle/>
-          <a:p>
-            <a:pPr algn="l"/>
-            <a:r>
-              <a:rPr sz="1800" b="1" i="0">
-                <a:solidFill>
-                  <a:srgbClr val="1A2F5E"/>
-                </a:solidFill>
-              </a:rPr>
-              <a:t>3.  Study the non-adopters</a:t>
-            </a:r>
-          </a:p>
-        </p:txBody>
-      </p:sp>
-      <p:sp>
-        <p:nvSpPr>
-          <p:cNvPr id="10" name="TextBox 9"/>
-          <p:cNvSpPr txBox="1"/>
-          <p:nvPr/>
-        </p:nvSpPr>
-        <p:spPr>
-          <a:xfrm>
-            <a:off x="320040" y="3520440"/>
-            <a:ext cx="11521440" cy="457200"/>
-          </a:xfrm>
-          <a:prstGeom prst="rect">
-            <a:avLst/>
-          </a:prstGeom>
-          <a:noFill/>
-        </p:spPr>
-        <p:txBody>
-          <a:bodyPr wrap="square">
-            <a:spAutoFit/>
-          </a:bodyPr>
-          <a:lstStyle/>
-          <a:p>
-            <a:pPr algn="l"/>
-            <a:r>
-              <a:rPr sz="1700" b="0" i="0">
-                <a:solidFill>
-                  <a:srgbClr val="2C3E50"/>
-                </a:solidFill>
-              </a:rPr>
-              <a:t>The 70%+ of employees who did not use Argo are invisible. Are they unaware? Skeptical? Blocked? These users matter most for policy.</a:t>
-            </a:r>
-          </a:p>
-        </p:txBody>
-      </p:sp>
-      <p:sp>
-        <p:nvSpPr>
-          <p:cNvPr id="11" name="TextBox 10"/>
-          <p:cNvSpPr txBox="1"/>
-          <p:nvPr/>
-        </p:nvSpPr>
-        <p:spPr>
-          <a:xfrm>
-            <a:off x="320040" y="4160520"/>
-            <a:ext cx="11521440" cy="320040"/>
-          </a:xfrm>
-          <a:prstGeom prst="rect">
-            <a:avLst/>
-          </a:prstGeom>
-          <a:noFill/>
-        </p:spPr>
-        <p:txBody>
-          <a:bodyPr wrap="square">
-            <a:spAutoFit/>
-          </a:bodyPr>
-          <a:lstStyle/>
-          <a:p>
-            <a:pPr algn="l"/>
-            <a:r>
-              <a:rPr sz="1800" b="1" i="0">
-                <a:solidFill>
-                  <a:srgbClr val="1A2F5E"/>
-                </a:solidFill>
-              </a:rPr>
-              <a:t>4.  Audit actual output quality</a:t>
-            </a:r>
-          </a:p>
-        </p:txBody>
-      </p:sp>
-      <p:sp>
-        <p:nvSpPr>
-          <p:cNvPr id="12" name="TextBox 11"/>
-          <p:cNvSpPr txBox="1"/>
-          <p:nvPr/>
-        </p:nvSpPr>
-        <p:spPr>
-          <a:xfrm>
-            <a:off x="320040" y="4480560"/>
-            <a:ext cx="11521440" cy="457200"/>
-          </a:xfrm>
-          <a:prstGeom prst="rect">
-            <a:avLst/>
-          </a:prstGeom>
-          <a:noFill/>
-        </p:spPr>
-        <p:txBody>
-          <a:bodyPr wrap="square">
-            <a:spAutoFit/>
-          </a:bodyPr>
-          <a:lstStyle/>
-          <a:p>
-            <a:pPr algn="l"/>
-            <a:r>
-              <a:rPr sz="1700" b="0" i="0">
-                <a:solidFill>
-                  <a:srgbClr val="2C3E50"/>
-                </a:solidFill>
-              </a:rPr>
-              <a:t>Participants reported productivity gains. Do AI-assisted emails, reports, and code hold up under expert review? Self-report and quality can diverge.</a:t>
-            </a:r>
-          </a:p>
-        </p:txBody>
-      </p:sp>
-      <p:sp>
-        <p:nvSpPr>
-          <p:cNvPr id="13" name="TextBox 12"/>
-          <p:cNvSpPr txBox="1"/>
-          <p:nvPr/>
-        </p:nvSpPr>
-        <p:spPr>
-          <a:xfrm>
-            <a:off x="11704320" y="6492240"/>
-            <a:ext cx="365760" cy="274320"/>
-          </a:xfrm>
-          <a:prstGeom prst="rect">
-            <a:avLst/>
-          </a:prstGeom>
-          <a:noFill/>
-        </p:spPr>
-        <p:txBody>
-          <a:bodyPr wrap="square">
-            <a:spAutoFit/>
-          </a:bodyPr>
-          <a:lstStyle/>
-          <a:p>
-            <a:pPr algn="r"/>
-            <a:r>
-              <a:rPr sz="1200" b="0" i="0">
-                <a:solidFill>
-                  <a:srgbClr val="7F8C8D"/>
-                </a:solidFill>
-              </a:rPr>
-              <a:t>12</a:t>
-            </a:r>
-          </a:p>
-        </p:txBody>
-      </p:sp>
-    </p:spTree>
-  </p:cSld>
-  <p:clrMapOvr>
-    <a:masterClrMapping/>
-  </p:clrMapOvr>
-</p:sld>
-</file>
-
-<file path=ppt/slides/slide13.xml><?xml version="1.0" encoding="utf-8"?>
-<p:sld xmlns:a="http://schemas.openxmlformats.org/drawingml/2006/main" xmlns:p="http://schemas.openxmlformats.org/presentationml/2006/main" xmlns:r="http://schemas.openxmlformats.org/officeDocument/2006/relationships">
-  <p:cSld>
-    <p:spTree>
-      <p:nvGrpSpPr>
-        <p:cNvPr id="1" name=""/>
-        <p:cNvGrpSpPr/>
-        <p:nvPr/>
-      </p:nvGrpSpPr>
-      <p:grpSpPr/>
-      <p:sp>
-        <p:nvSpPr>
-          <p:cNvPr id="2" name="Rectangle 1"/>
+              <a:t>Conversational, back-and-forth with the user. AI responds in real time.
+Example: asking ChatGPT to rewrite an email or explain a piece of code.</a:t>
+            </a:r>
+          </a:p>
+        </p:txBody>
+      </p:sp>
+      <p:sp>
+        <p:nvSpPr>
+          <p:cNvPr id="11" name="Rectangle 10"/>
           <p:cNvSpPr/>
           <p:nvPr/>
         </p:nvSpPr>
         <p:spPr>
           <a:xfrm>
-            <a:off x="0" y="0"/>
-            <a:ext cx="12188952" cy="6858000"/>
+            <a:off x="3794760" y="3657600"/>
+            <a:ext cx="3337560" cy="1600200"/>
           </a:xfrm>
           <a:prstGeom prst="rect">
             <a:avLst/>
           </a:prstGeom>
           <a:solidFill>
-            <a:srgbClr val="1A2F5E"/>
+            <a:srgbClr val="D5F5E3"/>
           </a:solidFill>
           <a:ln>
             <a:noFill/>
@@ -5083,14 +4858,14 @@
       </p:sp>
       <p:sp>
         <p:nvSpPr>
-          <p:cNvPr id="3" name="TextBox 2"/>
+          <p:cNvPr id="12" name="TextBox 11"/>
           <p:cNvSpPr txBox="1"/>
           <p:nvPr/>
         </p:nvSpPr>
         <p:spPr>
           <a:xfrm>
-            <a:off x="457200" y="365760"/>
-            <a:ext cx="11247120" cy="640080"/>
+            <a:off x="3886200" y="3721608"/>
+            <a:ext cx="3154680" cy="365760"/>
           </a:xfrm>
           <a:prstGeom prst="rect">
             <a:avLst/>
@@ -5105,32 +4880,67 @@
           <a:p>
             <a:pPr algn="l"/>
             <a:r>
-              <a:rPr sz="3400" b="1" i="0">
-                <a:solidFill>
-                  <a:srgbClr val="FFFFFF"/>
+              <a:rPr sz="1800" b="1" i="0">
+                <a:solidFill>
+                  <a:srgbClr val="1E8B4C"/>
                 </a:solidFill>
               </a:rPr>
-              <a:t>Let's Talk About It</a:t>
-            </a:r>
-          </a:p>
-        </p:txBody>
-      </p:sp>
-      <p:sp>
-        <p:nvSpPr>
-          <p:cNvPr id="4" name="Rectangle 3"/>
+              <a:t>Workflow Agent</a:t>
+            </a:r>
+          </a:p>
+        </p:txBody>
+      </p:sp>
+      <p:sp>
+        <p:nvSpPr>
+          <p:cNvPr id="13" name="TextBox 12"/>
+          <p:cNvSpPr txBox="1"/>
+          <p:nvPr/>
+        </p:nvSpPr>
+        <p:spPr>
+          <a:xfrm>
+            <a:off x="3886200" y="4069080"/>
+            <a:ext cx="3154680" cy="1097280"/>
+          </a:xfrm>
+          <a:prstGeom prst="rect">
+            <a:avLst/>
+          </a:prstGeom>
+          <a:noFill/>
+        </p:spPr>
+        <p:txBody>
+          <a:bodyPr wrap="square">
+            <a:spAutoFit/>
+          </a:bodyPr>
+          <a:lstStyle/>
+          <a:p>
+            <a:pPr algn="l"/>
+            <a:r>
+              <a:rPr sz="1600" b="0" i="0">
+                <a:solidFill>
+                  <a:srgbClr val="2C3E50"/>
+                </a:solidFill>
+              </a:rPr>
+              <a:t>Autonomous or semi-autonomous. AI performs a complex task on its own.
+Example: an agent that downloads instrument data, runs analysis, and produces a graph.</a:t>
+            </a:r>
+          </a:p>
+        </p:txBody>
+      </p:sp>
+      <p:sp>
+        <p:nvSpPr>
+          <p:cNvPr id="14" name="Rectangle 13"/>
           <p:cNvSpPr/>
           <p:nvPr/>
         </p:nvSpPr>
         <p:spPr>
           <a:xfrm>
-            <a:off x="365760" y="1188720"/>
-            <a:ext cx="11430000" cy="2286000"/>
+            <a:off x="7315200" y="1234440"/>
+            <a:ext cx="4389120" cy="4069080"/>
           </a:xfrm>
           <a:prstGeom prst="rect">
             <a:avLst/>
           </a:prstGeom>
           <a:solidFill>
-            <a:srgbClr val="FFFFFF"/>
+            <a:srgbClr val="F4F6F9"/>
           </a:solidFill>
           <a:ln>
             <a:noFill/>
@@ -5160,14 +4970,14 @@
       </p:sp>
       <p:sp>
         <p:nvSpPr>
-          <p:cNvPr id="5" name="TextBox 4"/>
+          <p:cNvPr id="15" name="TextBox 14"/>
           <p:cNvSpPr txBox="1"/>
           <p:nvPr/>
         </p:nvSpPr>
         <p:spPr>
           <a:xfrm>
-            <a:off x="640080" y="1371600"/>
-            <a:ext cx="10972800" cy="1920240"/>
+            <a:off x="7452360" y="1307592"/>
+            <a:ext cx="4114800" cy="365760"/>
           </a:xfrm>
           <a:prstGeom prst="rect">
             <a:avLst/>
@@ -5182,28 +4992,26 @@
           <a:p>
             <a:pPr algn="l"/>
             <a:r>
-              <a:rPr sz="2200" b="0" i="0">
+              <a:rPr sz="1700" b="1" i="0">
                 <a:solidFill>
                   <a:srgbClr val="1A2F5E"/>
                 </a:solidFill>
               </a:rPr>
-              <a:t>If your department deployed its own private GenAI tool tomorrow — same interface as ChatGPT, but your data never leaves the organization —
-what's the first task you'd hand off to it,
-and what's one thing you'd never let it touch?</a:t>
-            </a:r>
-          </a:p>
-        </p:txBody>
-      </p:sp>
-      <p:sp>
-        <p:nvSpPr>
-          <p:cNvPr id="6" name="TextBox 5"/>
+              <a:t>About Argo (the lab's private GenAI tool):</a:t>
+            </a:r>
+          </a:p>
+        </p:txBody>
+      </p:sp>
+      <p:sp>
+        <p:nvSpPr>
+          <p:cNvPr id="16" name="TextBox 15"/>
           <p:cNvSpPr txBox="1"/>
           <p:nvPr/>
         </p:nvSpPr>
         <p:spPr>
           <a:xfrm>
-            <a:off x="457200" y="3657600"/>
-            <a:ext cx="11247120" cy="411480"/>
+            <a:off x="7452360" y="1709928"/>
+            <a:ext cx="4114800" cy="3474720"/>
           </a:xfrm>
           <a:prstGeom prst="rect">
             <a:avLst/>
@@ -5216,903 +5024,166 @@
           </a:bodyPr>
           <a:lstStyle/>
           <a:p>
-            <a:pPr algn="l"/>
-            <a:r>
-              <a:rPr sz="1800" b="0" i="1">
-                <a:solidFill>
-                  <a:srgbClr val="ECF0F1"/>
-                </a:solidFill>
-              </a:rPr>
-              <a:t>No right answer — just be honest about where your own line is and why.</a:t>
-            </a:r>
-          </a:p>
-        </p:txBody>
-      </p:sp>
-      <p:sp>
-        <p:nvSpPr>
-          <p:cNvPr id="7" name="TextBox 6"/>
-          <p:cNvSpPr txBox="1"/>
-          <p:nvPr/>
-        </p:nvSpPr>
-        <p:spPr>
-          <a:xfrm>
-            <a:off x="457200" y="4251960"/>
-            <a:ext cx="11247120" cy="320040"/>
-          </a:xfrm>
-          <a:prstGeom prst="rect">
-            <a:avLst/>
-          </a:prstGeom>
-          <a:noFill/>
-        </p:spPr>
-        <p:txBody>
-          <a:bodyPr wrap="square">
-            <a:spAutoFit/>
-          </a:bodyPr>
-          <a:lstStyle/>
-          <a:p>
-            <a:pPr algn="l"/>
-            <a:r>
-              <a:rPr sz="1700" b="1" i="0">
-                <a:solidFill>
-                  <a:srgbClr val="FFFFFF"/>
-                </a:solidFill>
-              </a:rPr>
-              <a:t>Follow-up if the conversation runs:</a:t>
-            </a:r>
-          </a:p>
-        </p:txBody>
-      </p:sp>
-      <p:sp>
-        <p:nvSpPr>
-          <p:cNvPr id="8" name="TextBox 7"/>
-          <p:cNvSpPr txBox="1"/>
-          <p:nvPr/>
-        </p:nvSpPr>
-        <p:spPr>
-          <a:xfrm>
-            <a:off x="457200" y="4617720"/>
-            <a:ext cx="11247120" cy="1005840"/>
-          </a:xfrm>
-          <a:prstGeom prst="rect">
-            <a:avLst/>
-          </a:prstGeom>
-          <a:noFill/>
-        </p:spPr>
-        <p:txBody>
-          <a:bodyPr wrap="square">
-            <a:spAutoFit/>
-          </a:bodyPr>
-          <a:lstStyle/>
-          <a:p>
-            <a:pPr algn="l"/>
-            <a:r>
-              <a:rPr sz="1700" b="0" i="1">
-                <a:solidFill>
-                  <a:srgbClr val="ECF0F1"/>
-                </a:solidFill>
-              </a:rPr>
-              <a:t>The scientists in this study were writing paper introductions with ChatGPT but hesitant to let it touch their actual data.
-Does that match how you think about it — or do you draw the line somewhere different?</a:t>
-            </a:r>
-          </a:p>
-        </p:txBody>
-      </p:sp>
-      <p:sp>
-        <p:nvSpPr>
-          <p:cNvPr id="9" name="TextBox 8"/>
-          <p:cNvSpPr txBox="1"/>
-          <p:nvPr/>
-        </p:nvSpPr>
-        <p:spPr>
-          <a:xfrm>
-            <a:off x="11704320" y="6492240"/>
-            <a:ext cx="365760" cy="274320"/>
-          </a:xfrm>
-          <a:prstGeom prst="rect">
-            <a:avLst/>
-          </a:prstGeom>
-          <a:noFill/>
-        </p:spPr>
-        <p:txBody>
-          <a:bodyPr wrap="square">
-            <a:spAutoFit/>
-          </a:bodyPr>
-          <a:lstStyle/>
-          <a:p>
-            <a:pPr algn="r"/>
-            <a:r>
-              <a:rPr sz="1200" b="0" i="0">
-                <a:solidFill>
-                  <a:srgbClr val="7F8C8D"/>
-                </a:solidFill>
-              </a:rPr>
-              <a:t>13</a:t>
-            </a:r>
-          </a:p>
-        </p:txBody>
-      </p:sp>
-    </p:spTree>
-  </p:cSld>
-  <p:clrMapOvr>
-    <a:masterClrMapping/>
-  </p:clrMapOvr>
-</p:sld>
-</file>
-
-<file path=ppt/slides/slide2.xml><?xml version="1.0" encoding="utf-8"?>
-<p:sld xmlns:a="http://schemas.openxmlformats.org/drawingml/2006/main" xmlns:p="http://schemas.openxmlformats.org/presentationml/2006/main" xmlns:r="http://schemas.openxmlformats.org/officeDocument/2006/relationships">
-  <p:cSld>
-    <p:spTree>
-      <p:nvGrpSpPr>
-        <p:cNvPr id="1" name=""/>
-        <p:cNvGrpSpPr/>
-        <p:nvPr/>
-      </p:nvGrpSpPr>
-      <p:grpSpPr/>
-      <p:sp>
-        <p:nvSpPr>
-          <p:cNvPr id="2" name="Rectangle 1"/>
-          <p:cNvSpPr/>
-          <p:nvPr/>
-        </p:nvSpPr>
-        <p:spPr>
-          <a:xfrm>
-            <a:off x="0" y="0"/>
-            <a:ext cx="12188952" cy="1143000"/>
-          </a:xfrm>
-          <a:prstGeom prst="rect">
-            <a:avLst/>
-          </a:prstGeom>
-          <a:solidFill>
-            <a:srgbClr val="1A2F5E"/>
-          </a:solidFill>
-          <a:ln>
-            <a:noFill/>
-          </a:ln>
-        </p:spPr>
-        <p:style>
-          <a:lnRef idx="1">
-            <a:schemeClr val="accent1"/>
-          </a:lnRef>
-          <a:fillRef idx="3">
-            <a:schemeClr val="accent1"/>
-          </a:fillRef>
-          <a:effectRef idx="2">
-            <a:schemeClr val="accent1"/>
-          </a:effectRef>
-          <a:fontRef idx="minor">
-            <a:schemeClr val="lt1"/>
-          </a:fontRef>
-        </p:style>
-        <p:txBody>
-          <a:bodyPr rtlCol="0" anchor="ctr"/>
-          <a:lstStyle/>
-          <a:p>
-            <a:pPr algn="ctr"/>
-          </a:p>
-        </p:txBody>
-      </p:sp>
-      <p:sp>
-        <p:nvSpPr>
-          <p:cNvPr id="3" name="TextBox 2"/>
-          <p:cNvSpPr txBox="1"/>
-          <p:nvPr/>
-        </p:nvSpPr>
-        <p:spPr>
-          <a:xfrm>
-            <a:off x="320040" y="137160"/>
-            <a:ext cx="11430000" cy="685800"/>
-          </a:xfrm>
-          <a:prstGeom prst="rect">
-            <a:avLst/>
-          </a:prstGeom>
-          <a:noFill/>
-        </p:spPr>
-        <p:txBody>
-          <a:bodyPr wrap="square">
-            <a:spAutoFit/>
-          </a:bodyPr>
-          <a:lstStyle/>
-          <a:p>
-            <a:pPr algn="l"/>
-            <a:r>
-              <a:rPr sz="2800" b="1" i="0">
-                <a:solidFill>
-                  <a:srgbClr val="FFFFFF"/>
-                </a:solidFill>
-              </a:rPr>
-              <a:t>Why This Paper?</a:t>
-            </a:r>
-          </a:p>
-        </p:txBody>
-      </p:sp>
-      <p:sp>
-        <p:nvSpPr>
-          <p:cNvPr id="4" name="TextBox 3"/>
-          <p:cNvSpPr txBox="1"/>
-          <p:nvPr/>
-        </p:nvSpPr>
-        <p:spPr>
-          <a:xfrm>
-            <a:off x="320040" y="1280160"/>
-            <a:ext cx="11521440" cy="320040"/>
-          </a:xfrm>
-          <a:prstGeom prst="rect">
-            <a:avLst/>
-          </a:prstGeom>
-          <a:noFill/>
-        </p:spPr>
-        <p:txBody>
-          <a:bodyPr wrap="square">
-            <a:spAutoFit/>
-          </a:bodyPr>
-          <a:lstStyle/>
-          <a:p>
-            <a:pPr algn="l"/>
-            <a:r>
-              <a:rPr sz="2000" b="1" i="0">
-                <a:solidFill>
-                  <a:srgbClr val="1A2F5E"/>
-                </a:solidFill>
-              </a:rPr>
-              <a:t>The gap:</a:t>
-            </a:r>
-          </a:p>
-        </p:txBody>
-      </p:sp>
-      <p:sp>
-        <p:nvSpPr>
-          <p:cNvPr id="5" name="TextBox 4"/>
-          <p:cNvSpPr txBox="1"/>
-          <p:nvPr/>
-        </p:nvSpPr>
-        <p:spPr>
-          <a:xfrm>
-            <a:off x="320040" y="1600200"/>
-            <a:ext cx="11521440" cy="548640"/>
-          </a:xfrm>
-          <a:prstGeom prst="rect">
-            <a:avLst/>
-          </a:prstGeom>
-          <a:noFill/>
-        </p:spPr>
-        <p:txBody>
-          <a:bodyPr wrap="square">
-            <a:spAutoFit/>
-          </a:bodyPr>
-          <a:lstStyle/>
-          <a:p>
-            <a:pPr algn="l"/>
-            <a:r>
-              <a:rPr sz="1900" b="0" i="0">
-                <a:solidFill>
-                  <a:srgbClr val="2C3E50"/>
-                </a:solidFill>
-              </a:rPr>
-              <a:t>Prior work studied GenAI in science OR in professional knowledge work — never both, and never with real adoption data from a single organization.</a:t>
-            </a:r>
-          </a:p>
-        </p:txBody>
-      </p:sp>
-      <p:sp>
-        <p:nvSpPr>
-          <p:cNvPr id="6" name="TextBox 5"/>
-          <p:cNvSpPr txBox="1"/>
-          <p:nvPr/>
-        </p:nvSpPr>
-        <p:spPr>
-          <a:xfrm>
-            <a:off x="320040" y="2286000"/>
-            <a:ext cx="11521440" cy="320040"/>
-          </a:xfrm>
-          <a:prstGeom prst="rect">
-            <a:avLst/>
-          </a:prstGeom>
-          <a:noFill/>
-        </p:spPr>
-        <p:txBody>
-          <a:bodyPr wrap="square">
-            <a:spAutoFit/>
-          </a:bodyPr>
-          <a:lstStyle/>
-          <a:p>
-            <a:pPr algn="l"/>
-            <a:r>
-              <a:rPr sz="2000" b="1" i="0">
-                <a:solidFill>
-                  <a:srgbClr val="1A2F5E"/>
-                </a:solidFill>
-              </a:rPr>
-              <a:t>What makes science organizations unique:</a:t>
-            </a:r>
-          </a:p>
-        </p:txBody>
-      </p:sp>
-      <p:sp>
-        <p:nvSpPr>
-          <p:cNvPr id="7" name="TextBox 6"/>
-          <p:cNvSpPr txBox="1"/>
-          <p:nvPr/>
-        </p:nvSpPr>
-        <p:spPr>
-          <a:xfrm>
-            <a:off x="320040" y="2606040"/>
-            <a:ext cx="11521440" cy="1280160"/>
-          </a:xfrm>
-          <a:prstGeom prst="rect">
-            <a:avLst/>
-          </a:prstGeom>
-          <a:noFill/>
-        </p:spPr>
-        <p:txBody>
-          <a:bodyPr wrap="square">
-            <a:spAutoFit/>
-          </a:bodyPr>
-          <a:lstStyle/>
-          <a:p>
             <a:pPr>
               <a:spcBef>
-                <a:spcPts val="400"/>
+                <a:spcPts val="300"/>
               </a:spcBef>
             </a:pPr>
             <a:r>
-              <a:rPr sz="1900">
+              <a:rPr sz="1600">
                 <a:solidFill>
                   <a:srgbClr val="2C3E50"/>
                 </a:solidFill>
               </a:rPr>
-              <a:t>•  Knowledge specialists (scientists) and operations workers (IT, HR, safety) share the same org</a:t>
+              <a:t>•  Private GPT-3.5 Turbo instance</a:t>
             </a:r>
           </a:p>
           <a:p>
             <a:pPr>
               <a:spcBef>
-                <a:spcPts val="400"/>
+                <a:spcPts val="300"/>
               </a:spcBef>
             </a:pPr>
             <a:r>
-              <a:rPr sz="1900">
+              <a:rPr sz="1600">
                 <a:solidFill>
                   <a:srgbClr val="2C3E50"/>
                 </a:solidFill>
               </a:rPr>
-              <a:t>•  Sensitive data: classified, pre-publication research, PII</a:t>
+              <a:t>•  VPN-only; no data shared with OpenAI</a:t>
             </a:r>
           </a:p>
           <a:p>
             <a:pPr>
               <a:spcBef>
-                <a:spcPts val="400"/>
+                <a:spcPts val="300"/>
               </a:spcBef>
             </a:pPr>
             <a:r>
-              <a:rPr sz="1900">
+              <a:rPr sz="1600">
                 <a:solidFill>
                   <a:srgbClr val="2C3E50"/>
                 </a:solidFill>
               </a:rPr>
-              <a:t>•  Academic publishing norms create distinct ethical stakes</a:t>
-            </a:r>
-          </a:p>
-        </p:txBody>
-      </p:sp>
-      <p:sp>
-        <p:nvSpPr>
-          <p:cNvPr id="8" name="TextBox 7"/>
-          <p:cNvSpPr txBox="1"/>
-          <p:nvPr/>
-        </p:nvSpPr>
-        <p:spPr>
-          <a:xfrm>
-            <a:off x="320040" y="3977640"/>
-            <a:ext cx="11521440" cy="320040"/>
-          </a:xfrm>
-          <a:prstGeom prst="rect">
-            <a:avLst/>
-          </a:prstGeom>
-          <a:noFill/>
-        </p:spPr>
-        <p:txBody>
-          <a:bodyPr wrap="square">
-            <a:spAutoFit/>
-          </a:bodyPr>
-          <a:lstStyle/>
-          <a:p>
-            <a:pPr algn="l"/>
-            <a:r>
-              <a:rPr sz="2000" b="1" i="0">
-                <a:solidFill>
-                  <a:srgbClr val="1A2F5E"/>
-                </a:solidFill>
-              </a:rPr>
-              <a:t>The question:</a:t>
-            </a:r>
-          </a:p>
-        </p:txBody>
-      </p:sp>
-      <p:sp>
-        <p:nvSpPr>
-          <p:cNvPr id="9" name="Rectangle 8"/>
-          <p:cNvSpPr/>
-          <p:nvPr/>
-        </p:nvSpPr>
-        <p:spPr>
-          <a:xfrm>
-            <a:off x="320040" y="4297680"/>
-            <a:ext cx="11521440" cy="822960"/>
-          </a:xfrm>
-          <a:prstGeom prst="rect">
-            <a:avLst/>
-          </a:prstGeom>
-          <a:solidFill>
-            <a:srgbClr val="ECF0F1"/>
-          </a:solidFill>
-          <a:ln>
-            <a:noFill/>
-          </a:ln>
-        </p:spPr>
-        <p:style>
-          <a:lnRef idx="1">
-            <a:schemeClr val="accent1"/>
-          </a:lnRef>
-          <a:fillRef idx="3">
-            <a:schemeClr val="accent1"/>
-          </a:fillRef>
-          <a:effectRef idx="2">
-            <a:schemeClr val="accent1"/>
-          </a:effectRef>
-          <a:fontRef idx="minor">
-            <a:schemeClr val="lt1"/>
-          </a:fontRef>
-        </p:style>
-        <p:txBody>
-          <a:bodyPr rtlCol="0" anchor="ctr"/>
-          <a:lstStyle/>
-          <a:p>
-            <a:pPr algn="ctr"/>
-          </a:p>
-        </p:txBody>
-      </p:sp>
-      <p:sp>
-        <p:nvSpPr>
-          <p:cNvPr id="10" name="TextBox 9"/>
-          <p:cNvSpPr txBox="1"/>
-          <p:nvPr/>
-        </p:nvSpPr>
-        <p:spPr>
-          <a:xfrm>
-            <a:off x="457200" y="4389120"/>
-            <a:ext cx="11247120" cy="640080"/>
-          </a:xfrm>
-          <a:prstGeom prst="rect">
-            <a:avLst/>
-          </a:prstGeom>
-          <a:noFill/>
-        </p:spPr>
-        <p:txBody>
-          <a:bodyPr wrap="square">
-            <a:spAutoFit/>
-          </a:bodyPr>
-          <a:lstStyle/>
-          <a:p>
-            <a:pPr algn="l"/>
-            <a:r>
-              <a:rPr sz="1900" b="0" i="1">
-                <a:solidFill>
-                  <a:srgbClr val="1A2F5E"/>
-                </a:solidFill>
-              </a:rPr>
-              <a:t>Can a science organization safely and effectively adopt generative AI across all its workers — not just researchers?</a:t>
-            </a:r>
-          </a:p>
-        </p:txBody>
-      </p:sp>
-      <p:sp>
-        <p:nvSpPr>
-          <p:cNvPr id="11" name="TextBox 10"/>
-          <p:cNvSpPr txBox="1"/>
-          <p:nvPr/>
-        </p:nvSpPr>
-        <p:spPr>
-          <a:xfrm>
-            <a:off x="11704320" y="6492240"/>
-            <a:ext cx="365760" cy="274320"/>
-          </a:xfrm>
-          <a:prstGeom prst="rect">
-            <a:avLst/>
-          </a:prstGeom>
-          <a:noFill/>
-        </p:spPr>
-        <p:txBody>
-          <a:bodyPr wrap="square">
-            <a:spAutoFit/>
-          </a:bodyPr>
-          <a:lstStyle/>
-          <a:p>
-            <a:pPr algn="r"/>
-            <a:r>
-              <a:rPr sz="1200" b="0" i="0">
-                <a:solidFill>
-                  <a:srgbClr val="7F8C8D"/>
-                </a:solidFill>
-              </a:rPr>
-              <a:t>2</a:t>
-            </a:r>
-          </a:p>
-        </p:txBody>
-      </p:sp>
-    </p:spTree>
-  </p:cSld>
-  <p:clrMapOvr>
-    <a:masterClrMapping/>
-  </p:clrMapOvr>
-</p:sld>
-</file>
-
-<file path=ppt/slides/slide3.xml><?xml version="1.0" encoding="utf-8"?>
-<p:sld xmlns:a="http://schemas.openxmlformats.org/drawingml/2006/main" xmlns:p="http://schemas.openxmlformats.org/presentationml/2006/main" xmlns:r="http://schemas.openxmlformats.org/officeDocument/2006/relationships">
-  <p:cSld>
-    <p:spTree>
-      <p:nvGrpSpPr>
-        <p:cNvPr id="1" name=""/>
-        <p:cNvGrpSpPr/>
-        <p:nvPr/>
-      </p:nvGrpSpPr>
-      <p:grpSpPr/>
-      <p:sp>
-        <p:nvSpPr>
-          <p:cNvPr id="2" name="Rectangle 1"/>
-          <p:cNvSpPr/>
-          <p:nvPr/>
-        </p:nvSpPr>
-        <p:spPr>
-          <a:xfrm>
-            <a:off x="0" y="0"/>
-            <a:ext cx="12188952" cy="1143000"/>
-          </a:xfrm>
-          <a:prstGeom prst="rect">
-            <a:avLst/>
-          </a:prstGeom>
-          <a:solidFill>
-            <a:srgbClr val="1A2F5E"/>
-          </a:solidFill>
-          <a:ln>
-            <a:noFill/>
-          </a:ln>
-        </p:spPr>
-        <p:style>
-          <a:lnRef idx="1">
-            <a:schemeClr val="accent1"/>
-          </a:lnRef>
-          <a:fillRef idx="3">
-            <a:schemeClr val="accent1"/>
-          </a:fillRef>
-          <a:effectRef idx="2">
-            <a:schemeClr val="accent1"/>
-          </a:effectRef>
-          <a:fontRef idx="minor">
-            <a:schemeClr val="lt1"/>
-          </a:fontRef>
-        </p:style>
-        <p:txBody>
-          <a:bodyPr rtlCol="0" anchor="ctr"/>
-          <a:lstStyle/>
-          <a:p>
-            <a:pPr algn="ctr"/>
-          </a:p>
-        </p:txBody>
-      </p:sp>
-      <p:sp>
-        <p:nvSpPr>
-          <p:cNvPr id="3" name="TextBox 2"/>
-          <p:cNvSpPr txBox="1"/>
-          <p:nvPr/>
-        </p:nvSpPr>
-        <p:spPr>
-          <a:xfrm>
-            <a:off x="320040" y="137160"/>
-            <a:ext cx="11430000" cy="685800"/>
-          </a:xfrm>
-          <a:prstGeom prst="rect">
-            <a:avLst/>
-          </a:prstGeom>
-          <a:noFill/>
-        </p:spPr>
-        <p:txBody>
-          <a:bodyPr wrap="square">
-            <a:spAutoFit/>
-          </a:bodyPr>
-          <a:lstStyle/>
-          <a:p>
-            <a:pPr algn="l"/>
-            <a:r>
-              <a:rPr sz="2800" b="1" i="0">
-                <a:solidFill>
-                  <a:srgbClr val="FFFFFF"/>
-                </a:solidFill>
-              </a:rPr>
-              <a:t>What They Set Out to Do</a:t>
-            </a:r>
-          </a:p>
-        </p:txBody>
-      </p:sp>
-      <p:sp>
-        <p:nvSpPr>
-          <p:cNvPr id="4" name="TextBox 3"/>
-          <p:cNvSpPr txBox="1"/>
-          <p:nvPr/>
-        </p:nvSpPr>
-        <p:spPr>
-          <a:xfrm>
-            <a:off x="320040" y="1280160"/>
-            <a:ext cx="640080" cy="320040"/>
-          </a:xfrm>
-          <a:prstGeom prst="rect">
-            <a:avLst/>
-          </a:prstGeom>
-          <a:noFill/>
-        </p:spPr>
-        <p:txBody>
-          <a:bodyPr wrap="square">
-            <a:spAutoFit/>
-          </a:bodyPr>
-          <a:lstStyle/>
-          <a:p>
-            <a:pPr algn="l"/>
-            <a:r>
-              <a:rPr sz="1900" b="1" i="0">
-                <a:solidFill>
-                  <a:srgbClr val="1A2F5E"/>
-                </a:solidFill>
-              </a:rPr>
-              <a:t>RQ1:</a:t>
-            </a:r>
-          </a:p>
-        </p:txBody>
-      </p:sp>
-      <p:sp>
-        <p:nvSpPr>
-          <p:cNvPr id="5" name="TextBox 4"/>
-          <p:cNvSpPr txBox="1"/>
-          <p:nvPr/>
-        </p:nvSpPr>
-        <p:spPr>
-          <a:xfrm>
-            <a:off x="1005840" y="1280160"/>
-            <a:ext cx="10835640" cy="502920"/>
-          </a:xfrm>
-          <a:prstGeom prst="rect">
-            <a:avLst/>
-          </a:prstGeom>
-          <a:noFill/>
-        </p:spPr>
-        <p:txBody>
-          <a:bodyPr wrap="square">
-            <a:spAutoFit/>
-          </a:bodyPr>
-          <a:lstStyle/>
-          <a:p>
-            <a:pPr algn="l"/>
-            <a:r>
-              <a:rPr sz="1900" b="0" i="0">
-                <a:solidFill>
-                  <a:srgbClr val="2C3E50"/>
-                </a:solidFill>
-              </a:rPr>
-              <a:t>How are Science and Operations workers using — and envisioning — generative AI to support their work?</a:t>
-            </a:r>
-          </a:p>
-        </p:txBody>
-      </p:sp>
-      <p:sp>
-        <p:nvSpPr>
-          <p:cNvPr id="6" name="TextBox 5"/>
-          <p:cNvSpPr txBox="1"/>
-          <p:nvPr/>
-        </p:nvSpPr>
-        <p:spPr>
-          <a:xfrm>
-            <a:off x="320040" y="1874520"/>
-            <a:ext cx="640080" cy="320040"/>
-          </a:xfrm>
-          <a:prstGeom prst="rect">
-            <a:avLst/>
-          </a:prstGeom>
-          <a:noFill/>
-        </p:spPr>
-        <p:txBody>
-          <a:bodyPr wrap="square">
-            <a:spAutoFit/>
-          </a:bodyPr>
-          <a:lstStyle/>
-          <a:p>
-            <a:pPr algn="l"/>
-            <a:r>
-              <a:rPr sz="1900" b="1" i="0">
-                <a:solidFill>
-                  <a:srgbClr val="1A2F5E"/>
-                </a:solidFill>
-              </a:rPr>
-              <a:t>RQ2:</a:t>
-            </a:r>
-          </a:p>
-        </p:txBody>
-      </p:sp>
-      <p:sp>
-        <p:nvSpPr>
-          <p:cNvPr id="7" name="TextBox 6"/>
-          <p:cNvSpPr txBox="1"/>
-          <p:nvPr/>
-        </p:nvSpPr>
-        <p:spPr>
-          <a:xfrm>
-            <a:off x="1005840" y="1874520"/>
-            <a:ext cx="10835640" cy="365760"/>
-          </a:xfrm>
-          <a:prstGeom prst="rect">
-            <a:avLst/>
-          </a:prstGeom>
-          <a:noFill/>
-        </p:spPr>
-        <p:txBody>
-          <a:bodyPr wrap="square">
-            <a:spAutoFit/>
-          </a:bodyPr>
-          <a:lstStyle/>
-          <a:p>
-            <a:pPr algn="l"/>
-            <a:r>
-              <a:rPr sz="1900" b="0" i="0">
-                <a:solidFill>
-                  <a:srgbClr val="2C3E50"/>
-                </a:solidFill>
-              </a:rPr>
-              <a:t>What risks (privacy, security, ethics) exist for GenAI at a national lab?</a:t>
-            </a:r>
-          </a:p>
-        </p:txBody>
-      </p:sp>
-      <p:sp>
-        <p:nvSpPr>
-          <p:cNvPr id="8" name="TextBox 7"/>
-          <p:cNvSpPr txBox="1"/>
-          <p:nvPr/>
-        </p:nvSpPr>
-        <p:spPr>
-          <a:xfrm>
-            <a:off x="320040" y="2468880"/>
-            <a:ext cx="11521440" cy="320040"/>
-          </a:xfrm>
-          <a:prstGeom prst="rect">
-            <a:avLst/>
-          </a:prstGeom>
-          <a:noFill/>
-        </p:spPr>
-        <p:txBody>
-          <a:bodyPr wrap="square">
-            <a:spAutoFit/>
-          </a:bodyPr>
-          <a:lstStyle/>
-          <a:p>
-            <a:pPr algn="l"/>
-            <a:r>
-              <a:rPr sz="2000" b="1" i="0">
-                <a:solidFill>
-                  <a:srgbClr val="1A2F5E"/>
-                </a:solidFill>
-              </a:rPr>
-              <a:t>Five contributions:</a:t>
-            </a:r>
-          </a:p>
-        </p:txBody>
-      </p:sp>
-      <p:sp>
-        <p:nvSpPr>
-          <p:cNvPr id="9" name="TextBox 8"/>
-          <p:cNvSpPr txBox="1"/>
-          <p:nvPr/>
-        </p:nvSpPr>
-        <p:spPr>
-          <a:xfrm>
-            <a:off x="320040" y="2788920"/>
-            <a:ext cx="11521440" cy="2286000"/>
-          </a:xfrm>
-          <a:prstGeom prst="rect">
-            <a:avLst/>
-          </a:prstGeom>
-          <a:noFill/>
-        </p:spPr>
-        <p:txBody>
-          <a:bodyPr wrap="square">
-            <a:spAutoFit/>
-          </a:bodyPr>
-          <a:lstStyle/>
+              <a:t>•  No chat history stored</a:t>
+            </a:r>
+          </a:p>
           <a:p>
             <a:pPr>
               <a:spcBef>
-                <a:spcPts val="400"/>
+                <a:spcPts val="300"/>
               </a:spcBef>
             </a:pPr>
             <a:r>
-              <a:rPr sz="1900">
+              <a:rPr sz="1600">
                 <a:solidFill>
                   <a:srgbClr val="2C3E50"/>
                 </a:solidFill>
               </a:rPr>
-              <a:t>1.  Novel Argo usage data from an org-wide GenAI deployment</a:t>
+              <a:t>•  Browser interface — like internal ChatGPT</a:t>
             </a:r>
           </a:p>
           <a:p>
             <a:pPr>
               <a:spcBef>
-                <a:spcPts val="400"/>
+                <a:spcPts val="300"/>
               </a:spcBef>
             </a:pPr>
             <a:r>
-              <a:rPr sz="1900">
+              <a:rPr sz="1600">
                 <a:solidFill>
                   <a:srgbClr val="2C3E50"/>
                 </a:solidFill>
               </a:rPr>
-              <a:t>2.  Use case taxonomy: copilot vs. workflow agent</a:t>
+              <a:t>•  Upgraded to GPT-4 Turbo after study ended</a:t>
             </a:r>
           </a:p>
           <a:p>
             <a:pPr>
               <a:spcBef>
-                <a:spcPts val="400"/>
+                <a:spcPts val="300"/>
               </a:spcBef>
             </a:pPr>
             <a:r>
-              <a:rPr sz="1900">
+              <a:rPr sz="1600">
                 <a:solidFill>
                   <a:srgbClr val="2C3E50"/>
                 </a:solidFill>
               </a:rPr>
-              <a:t>3.  Risk perspectives from both Science and Operations roles</a:t>
+              <a:t/>
             </a:r>
           </a:p>
           <a:p>
             <a:pPr>
               <a:spcBef>
-                <a:spcPts val="400"/>
+                <a:spcPts val="300"/>
               </a:spcBef>
             </a:pPr>
             <a:r>
-              <a:rPr sz="1900">
+              <a:rPr sz="1600">
                 <a:solidFill>
                   <a:srgbClr val="2C3E50"/>
                 </a:solidFill>
               </a:rPr>
-              <a:t>4.  Design recommendations for organizational copilots and agents</a:t>
+              <a:t>Participants (survey &amp; interviews):</a:t>
             </a:r>
           </a:p>
           <a:p>
             <a:pPr>
               <a:spcBef>
-                <a:spcPts val="400"/>
+                <a:spcPts val="300"/>
               </a:spcBef>
             </a:pPr>
             <a:r>
-              <a:rPr sz="1900">
+              <a:rPr sz="1600">
                 <a:solidFill>
                   <a:srgbClr val="2C3E50"/>
                 </a:solidFill>
               </a:rPr>
-              <a:t>5.  Future HCI research directions for science organizations</a:t>
-            </a:r>
-          </a:p>
-        </p:txBody>
-      </p:sp>
-      <p:sp>
-        <p:nvSpPr>
-          <p:cNvPr id="10" name="TextBox 9"/>
+              <a:t>•  ~48% Science  ·  ~47% Operations</a:t>
+            </a:r>
+          </a:p>
+          <a:p>
+            <a:pPr>
+              <a:spcBef>
+                <a:spcPts val="300"/>
+              </a:spcBef>
+            </a:pPr>
+            <a:r>
+              <a:rPr sz="1600">
+                <a:solidFill>
+                  <a:srgbClr val="2C3E50"/>
+                </a:solidFill>
+              </a:rPr>
+              <a:t>•  Early adopters — already familiar with GenAI</a:t>
+            </a:r>
+          </a:p>
+          <a:p>
+            <a:pPr>
+              <a:spcBef>
+                <a:spcPts val="300"/>
+              </a:spcBef>
+            </a:pPr>
+            <a:r>
+              <a:rPr sz="1600">
+                <a:solidFill>
+                  <a:srgbClr val="2C3E50"/>
+                </a:solidFill>
+              </a:rPr>
+              <a:t>•  67% male, 70% white (reflects lab population)</a:t>
+            </a:r>
+          </a:p>
+        </p:txBody>
+      </p:sp>
+      <p:sp>
+        <p:nvSpPr>
+          <p:cNvPr id="17" name="TextBox 16"/>
           <p:cNvSpPr txBox="1"/>
           <p:nvPr/>
         </p:nvSpPr>
         <p:spPr>
           <a:xfrm>
-            <a:off x="11704320" y="6492240"/>
+            <a:off x="11704320" y="6537960"/>
             <a:ext cx="365760" cy="274320"/>
           </a:xfrm>
           <a:prstGeom prst="rect">
@@ -6165,7 +5236,7 @@
         <p:spPr>
           <a:xfrm>
             <a:off x="0" y="0"/>
-            <a:ext cx="12188952" cy="1143000"/>
+            <a:ext cx="12188952" cy="1097280"/>
           </a:xfrm>
           <a:prstGeom prst="rect">
             <a:avLst/>
@@ -6207,8 +5278,8 @@
         </p:nvSpPr>
         <p:spPr>
           <a:xfrm>
-            <a:off x="320040" y="137160"/>
-            <a:ext cx="11430000" cy="685800"/>
+            <a:off x="365760" y="91440"/>
+            <a:ext cx="11430000" cy="640080"/>
           </a:xfrm>
           <a:prstGeom prst="rect">
             <a:avLst/>
@@ -6228,7 +5299,7 @@
                   <a:srgbClr val="FFFFFF"/>
                 </a:solidFill>
               </a:rPr>
-              <a:t>How They Studied It</a:t>
+              <a:t>Key Results (1): Adoption &amp; Copilot Use Cases</a:t>
             </a:r>
           </a:p>
         </p:txBody>
@@ -6241,8 +5312,8 @@
         </p:nvSpPr>
         <p:spPr>
           <a:xfrm>
-            <a:off x="320040" y="749808"/>
-            <a:ext cx="11430000" cy="365760"/>
+            <a:off x="365760" y="713232"/>
+            <a:ext cx="11430000" cy="347472"/>
           </a:xfrm>
           <a:prstGeom prst="rect">
             <a:avLst/>
@@ -6257,27 +5328,61 @@
           <a:p>
             <a:pPr algn="l"/>
             <a:r>
-              <a:rPr sz="1600" b="0" i="0">
+              <a:rPr sz="1500" b="0" i="1">
                 <a:solidFill>
                   <a:srgbClr val="ECF0F1"/>
                 </a:solidFill>
               </a:rPr>
-              <a:t>Argonne National Laboratory  ·  Jan–Aug 2024</a:t>
+              <a:t>Figure 1 + Table 5 (copilot section) — Wagman et al. (2025)</a:t>
+            </a:r>
+          </a:p>
+        </p:txBody>
+      </p:sp>
+      <p:sp>
+        <p:nvSpPr>
+          <p:cNvPr id="5" name="TextBox 4"/>
+          <p:cNvSpPr txBox="1"/>
+          <p:nvPr/>
+        </p:nvSpPr>
+        <p:spPr>
+          <a:xfrm>
+            <a:off x="365760" y="1234440"/>
+            <a:ext cx="5303520" cy="320040"/>
+          </a:xfrm>
+          <a:prstGeom prst="rect">
+            <a:avLst/>
+          </a:prstGeom>
+          <a:noFill/>
+        </p:spPr>
+        <p:txBody>
+          <a:bodyPr wrap="square">
+            <a:spAutoFit/>
+          </a:bodyPr>
+          <a:lstStyle/>
+          <a:p>
+            <a:pPr algn="l"/>
+            <a:r>
+              <a:rPr sz="1700" b="1" i="0">
+                <a:solidFill>
+                  <a:srgbClr val="1A2F5E"/>
+                </a:solidFill>
+              </a:rPr>
+              <a:t>Argo adoption — growing but limited (Figure 1):</a:t>
             </a:r>
           </a:p>
         </p:txBody>
       </p:sp>
       <p:graphicFrame>
         <p:nvGraphicFramePr>
-          <p:cNvPr id="5" name="Table 4"/>
+          <p:cNvPr id="6" name="Table 5"/>
           <p:cNvGraphicFramePr>
             <a:graphicFrameLocks noGrp="1"/>
           </p:cNvGraphicFramePr>
           <p:nvPr/>
         </p:nvGraphicFramePr>
         <p:xfrm>
-          <a:off x="320040" y="1280160"/>
-          <a:ext cx="11521440" cy="1920240"/>
+          <a:off x="365760" y="1581912"/>
+          <a:ext cx="5303520" cy="3017520"/>
         </p:xfrm>
         <a:graphic>
           <a:graphicData uri="http://schemas.openxmlformats.org/drawingml/2006/table">
@@ -6286,11 +5391,11 @@
                 <a:tableStyleId>{5C22544A-7EE6-4342-B048-85BDC9FD1C3A}</a:tableStyleId>
               </a:tblPr>
               <a:tblGrid>
-                <a:gridCol w="3840480"/>
-                <a:gridCol w="3840480"/>
-                <a:gridCol w="3840480"/>
+                <a:gridCol w="1767840"/>
+                <a:gridCol w="1767840"/>
+                <a:gridCol w="1767840"/>
               </a:tblGrid>
-              <a:tr h="480060">
+              <a:tr h="335280">
                 <a:tc>
                   <a:txBody>
                     <a:bodyPr/>
@@ -6298,12 +5403,12 @@
                     <a:p>
                       <a:pPr algn="ctr"/>
                       <a:r>
-                        <a:rPr b="1" sz="1800">
+                        <a:rPr b="1" sz="1500">
                           <a:solidFill>
                             <a:srgbClr val="FFFFFF"/>
                           </a:solidFill>
                         </a:rPr>
-                        <a:t>Source</a:t>
+                        <a:t>Month</a:t>
                       </a:r>
                     </a:p>
                   </a:txBody>
@@ -6320,12 +5425,12 @@
                     <a:p>
                       <a:pPr algn="ctr"/>
                       <a:r>
-                        <a:rPr b="1" sz="1800">
+                        <a:rPr b="1" sz="1500">
                           <a:solidFill>
                             <a:srgbClr val="FFFFFF"/>
                           </a:solidFill>
                         </a:rPr>
-                        <a:t>What</a:t>
+                        <a:t>Science</a:t>
                       </a:r>
                     </a:p>
                   </a:txBody>
@@ -6342,12 +5447,12 @@
                     <a:p>
                       <a:pPr algn="ctr"/>
                       <a:r>
-                        <a:rPr b="1" sz="1800">
+                        <a:rPr b="1" sz="1500">
                           <a:solidFill>
                             <a:srgbClr val="FFFFFF"/>
                           </a:solidFill>
                         </a:rPr>
-                        <a:t>When</a:t>
+                        <a:t>Operations</a:t>
                       </a:r>
                     </a:p>
                   </a:txBody>
@@ -6358,19 +5463,19 @@
                   </a:tcPr>
                 </a:tc>
               </a:tr>
-              <a:tr h="480060">
+              <a:tr h="335280">
                 <a:tc>
                   <a:txBody>
                     <a:bodyPr/>
                     <a:lstStyle/>
                     <a:p>
                       <a:r>
-                        <a:rPr sz="1800">
+                        <a:rPr sz="1500">
                           <a:solidFill>
                             <a:srgbClr val="2C3E50"/>
                           </a:solidFill>
                         </a:rPr>
-                        <a:t>Argo telemetry</a:t>
+                        <a:t>Jan</a:t>
                       </a:r>
                     </a:p>
                   </a:txBody>
@@ -6386,1203 +5491,7 @@
                     <a:lstStyle/>
                     <a:p>
                       <a:r>
-                        <a:rPr sz="1800">
-                          <a:solidFill>
-                            <a:srgbClr val="2C3E50"/>
-                          </a:solidFill>
-                        </a:rPr>
-                        <a:t>Monthly unique users, token counts — no query content stored</a:t>
-                      </a:r>
-                    </a:p>
-                  </a:txBody>
-                  <a:tcPr>
-                    <a:solidFill>
-                      <a:srgbClr val="ECF0F1"/>
-                    </a:solidFill>
-                  </a:tcPr>
-                </a:tc>
-                <a:tc>
-                  <a:txBody>
-                    <a:bodyPr/>
-                    <a:lstStyle/>
-                    <a:p>
-                      <a:r>
-                        <a:rPr sz="1800">
-                          <a:solidFill>
-                            <a:srgbClr val="2C3E50"/>
-                          </a:solidFill>
-                        </a:rPr>
-                        <a:t>Jan–Aug 2024</a:t>
-                      </a:r>
-                    </a:p>
-                  </a:txBody>
-                  <a:tcPr>
-                    <a:solidFill>
-                      <a:srgbClr val="ECF0F1"/>
-                    </a:solidFill>
-                  </a:tcPr>
-                </a:tc>
-              </a:tr>
-              <a:tr h="480060">
-                <a:tc>
-                  <a:txBody>
-                    <a:bodyPr/>
-                    <a:lstStyle/>
-                    <a:p>
-                      <a:r>
-                        <a:rPr sz="1800">
-                          <a:solidFill>
-                            <a:srgbClr val="2C3E50"/>
-                          </a:solidFill>
-                        </a:rPr>
-                        <a:t>Survey (N=66)</a:t>
-                      </a:r>
-                    </a:p>
-                  </a:txBody>
-                  <a:tcPr>
-                    <a:solidFill>
-                      <a:srgbClr val="FFFFFF"/>
-                    </a:solidFill>
-                  </a:tcPr>
-                </a:tc>
-                <a:tc>
-                  <a:txBody>
-                    <a:bodyPr/>
-                    <a:lstStyle/>
-                    <a:p>
-                      <a:r>
-                        <a:rPr sz="1800">
-                          <a:solidFill>
-                            <a:srgbClr val="2C3E50"/>
-                          </a:solidFill>
-                        </a:rPr>
-                        <a:t>Qualtrics; 15 task-frequency items + open-ended responses</a:t>
-                      </a:r>
-                    </a:p>
-                  </a:txBody>
-                  <a:tcPr>
-                    <a:solidFill>
-                      <a:srgbClr val="FFFFFF"/>
-                    </a:solidFill>
-                  </a:tcPr>
-                </a:tc>
-                <a:tc>
-                  <a:txBody>
-                    <a:bodyPr/>
-                    <a:lstStyle/>
-                    <a:p>
-                      <a:r>
-                        <a:rPr sz="1800">
-                          <a:solidFill>
-                            <a:srgbClr val="2C3E50"/>
-                          </a:solidFill>
-                        </a:rPr>
-                        <a:t>Apr–Jun 2024</a:t>
-                      </a:r>
-                    </a:p>
-                  </a:txBody>
-                  <a:tcPr>
-                    <a:solidFill>
-                      <a:srgbClr val="FFFFFF"/>
-                    </a:solidFill>
-                  </a:tcPr>
-                </a:tc>
-              </a:tr>
-              <a:tr h="480060">
-                <a:tc>
-                  <a:txBody>
-                    <a:bodyPr/>
-                    <a:lstStyle/>
-                    <a:p>
-                      <a:r>
-                        <a:rPr sz="1800">
-                          <a:solidFill>
-                            <a:srgbClr val="2C3E50"/>
-                          </a:solidFill>
-                        </a:rPr>
-                        <a:t>Interviews (N=22)</a:t>
-                      </a:r>
-                    </a:p>
-                  </a:txBody>
-                  <a:tcPr>
-                    <a:solidFill>
-                      <a:srgbClr val="ECF0F1"/>
-                    </a:solidFill>
-                  </a:tcPr>
-                </a:tc>
-                <a:tc>
-                  <a:txBody>
-                    <a:bodyPr/>
-                    <a:lstStyle/>
-                    <a:p>
-                      <a:r>
-                        <a:rPr sz="1800">
-                          <a:solidFill>
-                            <a:srgbClr val="2C3E50"/>
-                          </a:solidFill>
-                        </a:rPr>
-                        <a:t>Semi-structured; 30 min; Zoom; thematic analysis (MAXQDA)</a:t>
-                      </a:r>
-                    </a:p>
-                  </a:txBody>
-                  <a:tcPr>
-                    <a:solidFill>
-                      <a:srgbClr val="ECF0F1"/>
-                    </a:solidFill>
-                  </a:tcPr>
-                </a:tc>
-                <a:tc>
-                  <a:txBody>
-                    <a:bodyPr/>
-                    <a:lstStyle/>
-                    <a:p>
-                      <a:r>
-                        <a:rPr sz="1800">
-                          <a:solidFill>
-                            <a:srgbClr val="2C3E50"/>
-                          </a:solidFill>
-                        </a:rPr>
-                        <a:t>Apr–Jul 2024</a:t>
-                      </a:r>
-                    </a:p>
-                  </a:txBody>
-                  <a:tcPr>
-                    <a:solidFill>
-                      <a:srgbClr val="ECF0F1"/>
-                    </a:solidFill>
-                  </a:tcPr>
-                </a:tc>
-              </a:tr>
-            </a:tbl>
-          </a:graphicData>
-        </a:graphic>
-      </p:graphicFrame>
-      <p:sp>
-        <p:nvSpPr>
-          <p:cNvPr id="6" name="TextBox 5"/>
-          <p:cNvSpPr txBox="1"/>
-          <p:nvPr/>
-        </p:nvSpPr>
-        <p:spPr>
-          <a:xfrm>
-            <a:off x="320040" y="3383280"/>
-            <a:ext cx="11521440" cy="320040"/>
-          </a:xfrm>
-          <a:prstGeom prst="rect">
-            <a:avLst/>
-          </a:prstGeom>
-          <a:noFill/>
-        </p:spPr>
-        <p:txBody>
-          <a:bodyPr wrap="square">
-            <a:spAutoFit/>
-          </a:bodyPr>
-          <a:lstStyle/>
-          <a:p>
-            <a:pPr algn="l"/>
-            <a:r>
-              <a:rPr sz="1900" b="1" i="0">
-                <a:solidFill>
-                  <a:srgbClr val="1A2F5E"/>
-                </a:solidFill>
-              </a:rPr>
-              <a:t>About Argo:</a:t>
-            </a:r>
-          </a:p>
-        </p:txBody>
-      </p:sp>
-      <p:sp>
-        <p:nvSpPr>
-          <p:cNvPr id="7" name="TextBox 6"/>
-          <p:cNvSpPr txBox="1"/>
-          <p:nvPr/>
-        </p:nvSpPr>
-        <p:spPr>
-          <a:xfrm>
-            <a:off x="320040" y="3703320"/>
-            <a:ext cx="11521440" cy="1463040"/>
-          </a:xfrm>
-          <a:prstGeom prst="rect">
-            <a:avLst/>
-          </a:prstGeom>
-          <a:noFill/>
-        </p:spPr>
-        <p:txBody>
-          <a:bodyPr wrap="square">
-            <a:spAutoFit/>
-          </a:bodyPr>
-          <a:lstStyle/>
-          <a:p>
-            <a:pPr>
-              <a:spcBef>
-                <a:spcPts val="400"/>
-              </a:spcBef>
-            </a:pPr>
-            <a:r>
-              <a:rPr sz="1900">
-                <a:solidFill>
-                  <a:srgbClr val="2C3E50"/>
-                </a:solidFill>
-              </a:rPr>
-              <a:t>•  Private GPT-3.5 Turbo instance — VPN-only access</a:t>
-            </a:r>
-          </a:p>
-          <a:p>
-            <a:pPr>
-              <a:spcBef>
-                <a:spcPts val="400"/>
-              </a:spcBef>
-            </a:pPr>
-            <a:r>
-              <a:rPr sz="1900">
-                <a:solidFill>
-                  <a:srgbClr val="2C3E50"/>
-                </a:solidFill>
-              </a:rPr>
-              <a:t>•  No query content shared with OpenAI</a:t>
-            </a:r>
-          </a:p>
-          <a:p>
-            <a:pPr>
-              <a:spcBef>
-                <a:spcPts val="400"/>
-              </a:spcBef>
-            </a:pPr>
-            <a:r>
-              <a:rPr sz="1900">
-                <a:solidFill>
-                  <a:srgbClr val="2C3E50"/>
-                </a:solidFill>
-              </a:rPr>
-              <a:t>•  No chat history stored between sessions</a:t>
-            </a:r>
-          </a:p>
-          <a:p>
-            <a:pPr>
-              <a:spcBef>
-                <a:spcPts val="400"/>
-              </a:spcBef>
-            </a:pPr>
-            <a:r>
-              <a:rPr sz="1900">
-                <a:solidFill>
-                  <a:srgbClr val="2C3E50"/>
-                </a:solidFill>
-              </a:rPr>
-              <a:t>•  Upgraded to GPT-4 Turbo after data collection completed</a:t>
-            </a:r>
-          </a:p>
-        </p:txBody>
-      </p:sp>
-      <p:sp>
-        <p:nvSpPr>
-          <p:cNvPr id="8" name="TextBox 7"/>
-          <p:cNvSpPr txBox="1"/>
-          <p:nvPr/>
-        </p:nvSpPr>
-        <p:spPr>
-          <a:xfrm>
-            <a:off x="11704320" y="6492240"/>
-            <a:ext cx="365760" cy="274320"/>
-          </a:xfrm>
-          <a:prstGeom prst="rect">
-            <a:avLst/>
-          </a:prstGeom>
-          <a:noFill/>
-        </p:spPr>
-        <p:txBody>
-          <a:bodyPr wrap="square">
-            <a:spAutoFit/>
-          </a:bodyPr>
-          <a:lstStyle/>
-          <a:p>
-            <a:pPr algn="r"/>
-            <a:r>
-              <a:rPr sz="1200" b="0" i="0">
-                <a:solidFill>
-                  <a:srgbClr val="7F8C8D"/>
-                </a:solidFill>
-              </a:rPr>
-              <a:t>4</a:t>
-            </a:r>
-          </a:p>
-        </p:txBody>
-      </p:sp>
-    </p:spTree>
-  </p:cSld>
-  <p:clrMapOvr>
-    <a:masterClrMapping/>
-  </p:clrMapOvr>
-</p:sld>
-</file>
-
-<file path=ppt/slides/slide5.xml><?xml version="1.0" encoding="utf-8"?>
-<p:sld xmlns:a="http://schemas.openxmlformats.org/drawingml/2006/main" xmlns:p="http://schemas.openxmlformats.org/presentationml/2006/main" xmlns:r="http://schemas.openxmlformats.org/officeDocument/2006/relationships">
-  <p:cSld>
-    <p:spTree>
-      <p:nvGrpSpPr>
-        <p:cNvPr id="1" name=""/>
-        <p:cNvGrpSpPr/>
-        <p:nvPr/>
-      </p:nvGrpSpPr>
-      <p:grpSpPr/>
-      <p:sp>
-        <p:nvSpPr>
-          <p:cNvPr id="2" name="Rectangle 1"/>
-          <p:cNvSpPr/>
-          <p:nvPr/>
-        </p:nvSpPr>
-        <p:spPr>
-          <a:xfrm>
-            <a:off x="0" y="0"/>
-            <a:ext cx="12188952" cy="1143000"/>
-          </a:xfrm>
-          <a:prstGeom prst="rect">
-            <a:avLst/>
-          </a:prstGeom>
-          <a:solidFill>
-            <a:srgbClr val="1A2F5E"/>
-          </a:solidFill>
-          <a:ln>
-            <a:noFill/>
-          </a:ln>
-        </p:spPr>
-        <p:style>
-          <a:lnRef idx="1">
-            <a:schemeClr val="accent1"/>
-          </a:lnRef>
-          <a:fillRef idx="3">
-            <a:schemeClr val="accent1"/>
-          </a:fillRef>
-          <a:effectRef idx="2">
-            <a:schemeClr val="accent1"/>
-          </a:effectRef>
-          <a:fontRef idx="minor">
-            <a:schemeClr val="lt1"/>
-          </a:fontRef>
-        </p:style>
-        <p:txBody>
-          <a:bodyPr rtlCol="0" anchor="ctr"/>
-          <a:lstStyle/>
-          <a:p>
-            <a:pPr algn="ctr"/>
-          </a:p>
-        </p:txBody>
-      </p:sp>
-      <p:sp>
-        <p:nvSpPr>
-          <p:cNvPr id="3" name="TextBox 2"/>
-          <p:cNvSpPr txBox="1"/>
-          <p:nvPr/>
-        </p:nvSpPr>
-        <p:spPr>
-          <a:xfrm>
-            <a:off x="320040" y="137160"/>
-            <a:ext cx="11430000" cy="685800"/>
-          </a:xfrm>
-          <a:prstGeom prst="rect">
-            <a:avLst/>
-          </a:prstGeom>
-          <a:noFill/>
-        </p:spPr>
-        <p:txBody>
-          <a:bodyPr wrap="square">
-            <a:spAutoFit/>
-          </a:bodyPr>
-          <a:lstStyle/>
-          <a:p>
-            <a:pPr algn="l"/>
-            <a:r>
-              <a:rPr sz="2800" b="1" i="0">
-                <a:solidFill>
-                  <a:srgbClr val="FFFFFF"/>
-                </a:solidFill>
-              </a:rPr>
-              <a:t>Who Was Studied</a:t>
-            </a:r>
-          </a:p>
-        </p:txBody>
-      </p:sp>
-      <p:graphicFrame>
-        <p:nvGraphicFramePr>
-          <p:cNvPr id="4" name="Table 3"/>
-          <p:cNvGraphicFramePr>
-            <a:graphicFrameLocks noGrp="1"/>
-          </p:cNvGraphicFramePr>
-          <p:nvPr/>
-        </p:nvGraphicFramePr>
-        <p:xfrm>
-          <a:off x="320040" y="1280160"/>
-          <a:ext cx="11521440" cy="2377440"/>
-        </p:xfrm>
-        <a:graphic>
-          <a:graphicData uri="http://schemas.openxmlformats.org/drawingml/2006/table">
-            <a:tbl>
-              <a:tblPr firstRow="1" bandRow="1">
-                <a:tableStyleId>{5C22544A-7EE6-4342-B048-85BDC9FD1C3A}</a:tableStyleId>
-              </a:tblPr>
-              <a:tblGrid>
-                <a:gridCol w="3840480"/>
-                <a:gridCol w="3840480"/>
-                <a:gridCol w="3840480"/>
-              </a:tblGrid>
-              <a:tr h="396240">
-                <a:tc>
-                  <a:txBody>
-                    <a:bodyPr/>
-                    <a:lstStyle/>
-                    <a:p>
-                      <a:pPr algn="ctr"/>
-                      <a:r>
-                        <a:rPr b="1" sz="1700">
-                          <a:solidFill>
-                            <a:srgbClr val="FFFFFF"/>
-                          </a:solidFill>
-                        </a:rPr>
-                        <a:t/>
-                      </a:r>
-                    </a:p>
-                  </a:txBody>
-                  <a:tcPr>
-                    <a:solidFill>
-                      <a:srgbClr val="1A2F5E"/>
-                    </a:solidFill>
-                  </a:tcPr>
-                </a:tc>
-                <a:tc>
-                  <a:txBody>
-                    <a:bodyPr/>
-                    <a:lstStyle/>
-                    <a:p>
-                      <a:pPr algn="ctr"/>
-                      <a:r>
-                        <a:rPr b="1" sz="1700">
-                          <a:solidFill>
-                            <a:srgbClr val="FFFFFF"/>
-                          </a:solidFill>
-                        </a:rPr>
-                        <a:t>Survey (N=66)</a:t>
-                      </a:r>
-                    </a:p>
-                  </a:txBody>
-                  <a:tcPr>
-                    <a:solidFill>
-                      <a:srgbClr val="1A2F5E"/>
-                    </a:solidFill>
-                  </a:tcPr>
-                </a:tc>
-                <a:tc>
-                  <a:txBody>
-                    <a:bodyPr/>
-                    <a:lstStyle/>
-                    <a:p>
-                      <a:pPr algn="ctr"/>
-                      <a:r>
-                        <a:rPr b="1" sz="1700">
-                          <a:solidFill>
-                            <a:srgbClr val="FFFFFF"/>
-                          </a:solidFill>
-                        </a:rPr>
-                        <a:t>Interviews (N=22)</a:t>
-                      </a:r>
-                    </a:p>
-                  </a:txBody>
-                  <a:tcPr>
-                    <a:solidFill>
-                      <a:srgbClr val="1A2F5E"/>
-                    </a:solidFill>
-                  </a:tcPr>
-                </a:tc>
-              </a:tr>
-              <a:tr h="396240">
-                <a:tc>
-                  <a:txBody>
-                    <a:bodyPr/>
-                    <a:lstStyle/>
-                    <a:p>
-                      <a:r>
-                        <a:rPr sz="1700">
-                          <a:solidFill>
-                            <a:srgbClr val="2C3E50"/>
-                          </a:solidFill>
-                        </a:rPr>
-                        <a:t>Science / Operations</a:t>
-                      </a:r>
-                    </a:p>
-                  </a:txBody>
-                  <a:tcPr>
-                    <a:solidFill>
-                      <a:srgbClr val="ECF0F1"/>
-                    </a:solidFill>
-                  </a:tcPr>
-                </a:tc>
-                <a:tc>
-                  <a:txBody>
-                    <a:bodyPr/>
-                    <a:lstStyle/>
-                    <a:p>
-                      <a:r>
-                        <a:rPr sz="1700">
-                          <a:solidFill>
-                            <a:srgbClr val="2C3E50"/>
-                          </a:solidFill>
-                        </a:rPr>
-                        <a:t>48% Science · 47% Ops</a:t>
-                      </a:r>
-                    </a:p>
-                  </a:txBody>
-                  <a:tcPr>
-                    <a:solidFill>
-                      <a:srgbClr val="ECF0F1"/>
-                    </a:solidFill>
-                  </a:tcPr>
-                </a:tc>
-                <a:tc>
-                  <a:txBody>
-                    <a:bodyPr/>
-                    <a:lstStyle/>
-                    <a:p>
-                      <a:r>
-                        <a:rPr sz="1700">
-                          <a:solidFill>
-                            <a:srgbClr val="2C3E50"/>
-                          </a:solidFill>
-                        </a:rPr>
-                        <a:t>55% Science · 45% Ops</a:t>
-                      </a:r>
-                    </a:p>
-                  </a:txBody>
-                  <a:tcPr>
-                    <a:solidFill>
-                      <a:srgbClr val="ECF0F1"/>
-                    </a:solidFill>
-                  </a:tcPr>
-                </a:tc>
-              </a:tr>
-              <a:tr h="396240">
-                <a:tc>
-                  <a:txBody>
-                    <a:bodyPr/>
-                    <a:lstStyle/>
-                    <a:p>
-                      <a:r>
-                        <a:rPr sz="1700">
-                          <a:solidFill>
-                            <a:srgbClr val="2C3E50"/>
-                          </a:solidFill>
-                        </a:rPr>
-                        <a:t>Top roles</a:t>
-                      </a:r>
-                    </a:p>
-                  </a:txBody>
-                  <a:tcPr>
-                    <a:solidFill>
-                      <a:srgbClr val="FFFFFF"/>
-                    </a:solidFill>
-                  </a:tcPr>
-                </a:tc>
-                <a:tc>
-                  <a:txBody>
-                    <a:bodyPr/>
-                    <a:lstStyle/>
-                    <a:p>
-                      <a:r>
-                        <a:rPr sz="1700">
-                          <a:solidFill>
-                            <a:srgbClr val="2C3E50"/>
-                          </a:solidFill>
-                        </a:rPr>
-                        <a:t>Scientists, SW Engineers, IT, Ops Managers</a:t>
-                      </a:r>
-                    </a:p>
-                  </a:txBody>
-                  <a:tcPr>
-                    <a:solidFill>
-                      <a:srgbClr val="FFFFFF"/>
-                    </a:solidFill>
-                  </a:tcPr>
-                </a:tc>
-                <a:tc>
-                  <a:txBody>
-                    <a:bodyPr/>
-                    <a:lstStyle/>
-                    <a:p>
-                      <a:r>
-                        <a:rPr sz="1700">
-                          <a:solidFill>
-                            <a:srgbClr val="2C3E50"/>
-                          </a:solidFill>
-                        </a:rPr>
-                        <a:t>Scientists, Cybersecurity, IT, Ops Managers</a:t>
-                      </a:r>
-                    </a:p>
-                  </a:txBody>
-                  <a:tcPr>
-                    <a:solidFill>
-                      <a:srgbClr val="FFFFFF"/>
-                    </a:solidFill>
-                  </a:tcPr>
-                </a:tc>
-              </a:tr>
-              <a:tr h="396240">
-                <a:tc>
-                  <a:txBody>
-                    <a:bodyPr/>
-                    <a:lstStyle/>
-                    <a:p>
-                      <a:r>
-                        <a:rPr sz="1700">
-                          <a:solidFill>
-                            <a:srgbClr val="2C3E50"/>
-                          </a:solidFill>
-                        </a:rPr>
-                        <a:t>Gender</a:t>
-                      </a:r>
-                    </a:p>
-                  </a:txBody>
-                  <a:tcPr>
-                    <a:solidFill>
-                      <a:srgbClr val="ECF0F1"/>
-                    </a:solidFill>
-                  </a:tcPr>
-                </a:tc>
-                <a:tc>
-                  <a:txBody>
-                    <a:bodyPr/>
-                    <a:lstStyle/>
-                    <a:p>
-                      <a:r>
-                        <a:rPr sz="1700">
-                          <a:solidFill>
-                            <a:srgbClr val="2C3E50"/>
-                          </a:solidFill>
-                        </a:rPr>
-                        <a:t>67% male · 18% female</a:t>
-                      </a:r>
-                    </a:p>
-                  </a:txBody>
-                  <a:tcPr>
-                    <a:solidFill>
-                      <a:srgbClr val="ECF0F1"/>
-                    </a:solidFill>
-                  </a:tcPr>
-                </a:tc>
-                <a:tc>
-                  <a:txBody>
-                    <a:bodyPr/>
-                    <a:lstStyle/>
-                    <a:p>
-                      <a:r>
-                        <a:rPr sz="1700">
-                          <a:solidFill>
-                            <a:srgbClr val="2C3E50"/>
-                          </a:solidFill>
-                        </a:rPr>
-                        <a:t>Skewed male</a:t>
-                      </a:r>
-                    </a:p>
-                  </a:txBody>
-                  <a:tcPr>
-                    <a:solidFill>
-                      <a:srgbClr val="ECF0F1"/>
-                    </a:solidFill>
-                  </a:tcPr>
-                </a:tc>
-              </a:tr>
-              <a:tr h="396240">
-                <a:tc>
-                  <a:txBody>
-                    <a:bodyPr/>
-                    <a:lstStyle/>
-                    <a:p>
-                      <a:r>
-                        <a:rPr sz="1700">
-                          <a:solidFill>
-                            <a:srgbClr val="2C3E50"/>
-                          </a:solidFill>
-                        </a:rPr>
-                        <a:t>Race / Ethnicity</a:t>
-                      </a:r>
-                    </a:p>
-                  </a:txBody>
-                  <a:tcPr>
-                    <a:solidFill>
-                      <a:srgbClr val="FFFFFF"/>
-                    </a:solidFill>
-                  </a:tcPr>
-                </a:tc>
-                <a:tc>
-                  <a:txBody>
-                    <a:bodyPr/>
-                    <a:lstStyle/>
-                    <a:p>
-                      <a:r>
-                        <a:rPr sz="1700">
-                          <a:solidFill>
-                            <a:srgbClr val="2C3E50"/>
-                          </a:solidFill>
-                        </a:rPr>
-                        <a:t>70% white</a:t>
-                      </a:r>
-                    </a:p>
-                  </a:txBody>
-                  <a:tcPr>
-                    <a:solidFill>
-                      <a:srgbClr val="FFFFFF"/>
-                    </a:solidFill>
-                  </a:tcPr>
-                </a:tc>
-                <a:tc>
-                  <a:txBody>
-                    <a:bodyPr/>
-                    <a:lstStyle/>
-                    <a:p>
-                      <a:r>
-                        <a:rPr sz="1700">
-                          <a:solidFill>
-                            <a:srgbClr val="2C3E50"/>
-                          </a:solidFill>
-                        </a:rPr>
-                        <a:t>Skewed white</a:t>
-                      </a:r>
-                    </a:p>
-                  </a:txBody>
-                  <a:tcPr>
-                    <a:solidFill>
-                      <a:srgbClr val="FFFFFF"/>
-                    </a:solidFill>
-                  </a:tcPr>
-                </a:tc>
-              </a:tr>
-              <a:tr h="396240">
-                <a:tc>
-                  <a:txBody>
-                    <a:bodyPr/>
-                    <a:lstStyle/>
-                    <a:p>
-                      <a:r>
-                        <a:rPr sz="1700">
-                          <a:solidFill>
-                            <a:srgbClr val="2C3E50"/>
-                          </a:solidFill>
-                        </a:rPr>
-                        <a:t>Education</a:t>
-                      </a:r>
-                    </a:p>
-                  </a:txBody>
-                  <a:tcPr>
-                    <a:solidFill>
-                      <a:srgbClr val="ECF0F1"/>
-                    </a:solidFill>
-                  </a:tcPr>
-                </a:tc>
-                <a:tc>
-                  <a:txBody>
-                    <a:bodyPr/>
-                    <a:lstStyle/>
-                    <a:p>
-                      <a:r>
-                        <a:rPr sz="1700">
-                          <a:solidFill>
-                            <a:srgbClr val="2C3E50"/>
-                          </a:solidFill>
-                        </a:rPr>
-                        <a:t>32% doctoral · 30% master's</a:t>
-                      </a:r>
-                    </a:p>
-                  </a:txBody>
-                  <a:tcPr>
-                    <a:solidFill>
-                      <a:srgbClr val="ECF0F1"/>
-                    </a:solidFill>
-                  </a:tcPr>
-                </a:tc>
-                <a:tc>
-                  <a:txBody>
-                    <a:bodyPr/>
-                    <a:lstStyle/>
-                    <a:p>
-                      <a:r>
-                        <a:rPr sz="1700">
-                          <a:solidFill>
-                            <a:srgbClr val="2C3E50"/>
-                          </a:solidFill>
-                        </a:rPr>
-                        <a:t>Mostly doctoral (Science)</a:t>
-                      </a:r>
-                    </a:p>
-                  </a:txBody>
-                  <a:tcPr>
-                    <a:solidFill>
-                      <a:srgbClr val="ECF0F1"/>
-                    </a:solidFill>
-                  </a:tcPr>
-                </a:tc>
-              </a:tr>
-            </a:tbl>
-          </a:graphicData>
-        </a:graphic>
-      </p:graphicFrame>
-      <p:sp>
-        <p:nvSpPr>
-          <p:cNvPr id="5" name="Rectangle 4"/>
-          <p:cNvSpPr/>
-          <p:nvPr/>
-        </p:nvSpPr>
-        <p:spPr>
-          <a:xfrm>
-            <a:off x="320040" y="3840480"/>
-            <a:ext cx="11521440" cy="685800"/>
-          </a:xfrm>
-          <a:prstGeom prst="rect">
-            <a:avLst/>
-          </a:prstGeom>
-          <a:solidFill>
-            <a:srgbClr val="FFF3CD"/>
-          </a:solidFill>
-          <a:ln>
-            <a:noFill/>
-          </a:ln>
-        </p:spPr>
-        <p:style>
-          <a:lnRef idx="1">
-            <a:schemeClr val="accent1"/>
-          </a:lnRef>
-          <a:fillRef idx="3">
-            <a:schemeClr val="accent1"/>
-          </a:fillRef>
-          <a:effectRef idx="2">
-            <a:schemeClr val="accent1"/>
-          </a:effectRef>
-          <a:fontRef idx="minor">
-            <a:schemeClr val="lt1"/>
-          </a:fontRef>
-        </p:style>
-        <p:txBody>
-          <a:bodyPr rtlCol="0" anchor="ctr"/>
-          <a:lstStyle/>
-          <a:p>
-            <a:pPr algn="ctr"/>
-          </a:p>
-        </p:txBody>
-      </p:sp>
-      <p:sp>
-        <p:nvSpPr>
-          <p:cNvPr id="6" name="TextBox 5"/>
-          <p:cNvSpPr txBox="1"/>
-          <p:nvPr/>
-        </p:nvSpPr>
-        <p:spPr>
-          <a:xfrm>
-            <a:off x="457200" y="3886200"/>
-            <a:ext cx="11247120" cy="594360"/>
-          </a:xfrm>
-          <a:prstGeom prst="rect">
-            <a:avLst/>
-          </a:prstGeom>
-          <a:noFill/>
-        </p:spPr>
-        <p:txBody>
-          <a:bodyPr wrap="square">
-            <a:spAutoFit/>
-          </a:bodyPr>
-          <a:lstStyle/>
-          <a:p>
-            <a:pPr algn="l"/>
-            <a:r>
-              <a:rPr sz="1700" b="0" i="0">
-                <a:solidFill>
-                  <a:srgbClr val="7D6008"/>
-                </a:solidFill>
-              </a:rPr>
-              <a:t>⚠  Important: Participants self-selected — they are early adopters already familiar with GenAI. Findings may not reflect the majority of employees.</a:t>
-            </a:r>
-          </a:p>
-        </p:txBody>
-      </p:sp>
-      <p:sp>
-        <p:nvSpPr>
-          <p:cNvPr id="7" name="TextBox 6"/>
-          <p:cNvSpPr txBox="1"/>
-          <p:nvPr/>
-        </p:nvSpPr>
-        <p:spPr>
-          <a:xfrm>
-            <a:off x="11704320" y="6492240"/>
-            <a:ext cx="365760" cy="274320"/>
-          </a:xfrm>
-          <a:prstGeom prst="rect">
-            <a:avLst/>
-          </a:prstGeom>
-          <a:noFill/>
-        </p:spPr>
-        <p:txBody>
-          <a:bodyPr wrap="square">
-            <a:spAutoFit/>
-          </a:bodyPr>
-          <a:lstStyle/>
-          <a:p>
-            <a:pPr algn="r"/>
-            <a:r>
-              <a:rPr sz="1200" b="0" i="0">
-                <a:solidFill>
-                  <a:srgbClr val="7F8C8D"/>
-                </a:solidFill>
-              </a:rPr>
-              <a:t>5</a:t>
-            </a:r>
-          </a:p>
-        </p:txBody>
-      </p:sp>
-    </p:spTree>
-  </p:cSld>
-  <p:clrMapOvr>
-    <a:masterClrMapping/>
-  </p:clrMapOvr>
-</p:sld>
-</file>
-
-<file path=ppt/slides/slide6.xml><?xml version="1.0" encoding="utf-8"?>
-<p:sld xmlns:a="http://schemas.openxmlformats.org/drawingml/2006/main" xmlns:p="http://schemas.openxmlformats.org/presentationml/2006/main" xmlns:r="http://schemas.openxmlformats.org/officeDocument/2006/relationships">
-  <p:cSld>
-    <p:spTree>
-      <p:nvGrpSpPr>
-        <p:cNvPr id="1" name=""/>
-        <p:cNvGrpSpPr/>
-        <p:nvPr/>
-      </p:nvGrpSpPr>
-      <p:grpSpPr/>
-      <p:sp>
-        <p:nvSpPr>
-          <p:cNvPr id="2" name="Rectangle 1"/>
-          <p:cNvSpPr/>
-          <p:nvPr/>
-        </p:nvSpPr>
-        <p:spPr>
-          <a:xfrm>
-            <a:off x="0" y="0"/>
-            <a:ext cx="12188952" cy="1143000"/>
-          </a:xfrm>
-          <a:prstGeom prst="rect">
-            <a:avLst/>
-          </a:prstGeom>
-          <a:solidFill>
-            <a:srgbClr val="1A2F5E"/>
-          </a:solidFill>
-          <a:ln>
-            <a:noFill/>
-          </a:ln>
-        </p:spPr>
-        <p:style>
-          <a:lnRef idx="1">
-            <a:schemeClr val="accent1"/>
-          </a:lnRef>
-          <a:fillRef idx="3">
-            <a:schemeClr val="accent1"/>
-          </a:fillRef>
-          <a:effectRef idx="2">
-            <a:schemeClr val="accent1"/>
-          </a:effectRef>
-          <a:fontRef idx="minor">
-            <a:schemeClr val="lt1"/>
-          </a:fontRef>
-        </p:style>
-        <p:txBody>
-          <a:bodyPr rtlCol="0" anchor="ctr"/>
-          <a:lstStyle/>
-          <a:p>
-            <a:pPr algn="ctr"/>
-          </a:p>
-        </p:txBody>
-      </p:sp>
-      <p:sp>
-        <p:nvSpPr>
-          <p:cNvPr id="3" name="TextBox 2"/>
-          <p:cNvSpPr txBox="1"/>
-          <p:nvPr/>
-        </p:nvSpPr>
-        <p:spPr>
-          <a:xfrm>
-            <a:off x="320040" y="137160"/>
-            <a:ext cx="11430000" cy="685800"/>
-          </a:xfrm>
-          <a:prstGeom prst="rect">
-            <a:avLst/>
-          </a:prstGeom>
-          <a:noFill/>
-        </p:spPr>
-        <p:txBody>
-          <a:bodyPr wrap="square">
-            <a:spAutoFit/>
-          </a:bodyPr>
-          <a:lstStyle/>
-          <a:p>
-            <a:pPr algn="l"/>
-            <a:r>
-              <a:rPr sz="2800" b="1" i="0">
-                <a:solidFill>
-                  <a:srgbClr val="FFFFFF"/>
-                </a:solidFill>
-              </a:rPr>
-              <a:t>Key Figure 1: Argo Adoption — Growing but Still Small</a:t>
-            </a:r>
-          </a:p>
-        </p:txBody>
-      </p:sp>
-      <p:sp>
-        <p:nvSpPr>
-          <p:cNvPr id="4" name="TextBox 3"/>
-          <p:cNvSpPr txBox="1"/>
-          <p:nvPr/>
-        </p:nvSpPr>
-        <p:spPr>
-          <a:xfrm>
-            <a:off x="320040" y="749808"/>
-            <a:ext cx="11430000" cy="365760"/>
-          </a:xfrm>
-          <a:prstGeom prst="rect">
-            <a:avLst/>
-          </a:prstGeom>
-          <a:noFill/>
-        </p:spPr>
-        <p:txBody>
-          <a:bodyPr wrap="square">
-            <a:spAutoFit/>
-          </a:bodyPr>
-          <a:lstStyle/>
-          <a:p>
-            <a:pPr algn="l"/>
-            <a:r>
-              <a:rPr sz="1600" b="0" i="0">
-                <a:solidFill>
-                  <a:srgbClr val="ECF0F1"/>
-                </a:solidFill>
-              </a:rPr>
-              <a:t>Reproduced from Figure 1, Wagman et al. (2025)</a:t>
-            </a:r>
-          </a:p>
-        </p:txBody>
-      </p:sp>
-      <p:graphicFrame>
-        <p:nvGraphicFramePr>
-          <p:cNvPr id="5" name="Table 4"/>
-          <p:cNvGraphicFramePr>
-            <a:graphicFrameLocks noGrp="1"/>
-          </p:cNvGraphicFramePr>
-          <p:nvPr/>
-        </p:nvGraphicFramePr>
-        <p:xfrm>
-          <a:off x="320040" y="1280160"/>
-          <a:ext cx="6400800" cy="3200400"/>
-        </p:xfrm>
-        <a:graphic>
-          <a:graphicData uri="http://schemas.openxmlformats.org/drawingml/2006/table">
-            <a:tbl>
-              <a:tblPr firstRow="1" bandRow="1">
-                <a:tableStyleId>{5C22544A-7EE6-4342-B048-85BDC9FD1C3A}</a:tableStyleId>
-              </a:tblPr>
-              <a:tblGrid>
-                <a:gridCol w="2133600"/>
-                <a:gridCol w="2133600"/>
-                <a:gridCol w="2133600"/>
-              </a:tblGrid>
-              <a:tr h="355600">
-                <a:tc>
-                  <a:txBody>
-                    <a:bodyPr/>
-                    <a:lstStyle/>
-                    <a:p>
-                      <a:pPr algn="ctr"/>
-                      <a:r>
-                        <a:rPr b="1" sz="1800">
-                          <a:solidFill>
-                            <a:srgbClr val="FFFFFF"/>
-                          </a:solidFill>
-                        </a:rPr>
-                        <a:t>Month (2024)</a:t>
-                      </a:r>
-                    </a:p>
-                  </a:txBody>
-                  <a:tcPr>
-                    <a:solidFill>
-                      <a:srgbClr val="1A2F5E"/>
-                    </a:solidFill>
-                  </a:tcPr>
-                </a:tc>
-                <a:tc>
-                  <a:txBody>
-                    <a:bodyPr/>
-                    <a:lstStyle/>
-                    <a:p>
-                      <a:pPr algn="ctr"/>
-                      <a:r>
-                        <a:rPr b="1" sz="1800">
-                          <a:solidFill>
-                            <a:srgbClr val="FFFFFF"/>
-                          </a:solidFill>
-                        </a:rPr>
-                        <a:t>Science Users</a:t>
-                      </a:r>
-                    </a:p>
-                  </a:txBody>
-                  <a:tcPr>
-                    <a:solidFill>
-                      <a:srgbClr val="1A2F5E"/>
-                    </a:solidFill>
-                  </a:tcPr>
-                </a:tc>
-                <a:tc>
-                  <a:txBody>
-                    <a:bodyPr/>
-                    <a:lstStyle/>
-                    <a:p>
-                      <a:pPr algn="ctr"/>
-                      <a:r>
-                        <a:rPr b="1" sz="1800">
-                          <a:solidFill>
-                            <a:srgbClr val="FFFFFF"/>
-                          </a:solidFill>
-                        </a:rPr>
-                        <a:t>Operations Users</a:t>
-                      </a:r>
-                    </a:p>
-                  </a:txBody>
-                  <a:tcPr>
-                    <a:solidFill>
-                      <a:srgbClr val="1A2F5E"/>
-                    </a:solidFill>
-                  </a:tcPr>
-                </a:tc>
-              </a:tr>
-              <a:tr h="355600">
-                <a:tc>
-                  <a:txBody>
-                    <a:bodyPr/>
-                    <a:lstStyle/>
-                    <a:p>
-                      <a:r>
-                        <a:rPr sz="1800">
-                          <a:solidFill>
-                            <a:srgbClr val="2C3E50"/>
-                          </a:solidFill>
-                        </a:rPr>
-                        <a:t>January</a:t>
-                      </a:r>
-                    </a:p>
-                  </a:txBody>
-                  <a:tcPr>
-                    <a:solidFill>
-                      <a:srgbClr val="ECF0F1"/>
-                    </a:solidFill>
-                  </a:tcPr>
-                </a:tc>
-                <a:tc>
-                  <a:txBody>
-                    <a:bodyPr/>
-                    <a:lstStyle/>
-                    <a:p>
-                      <a:r>
-                        <a:rPr sz="1800">
+                        <a:rPr sz="1500">
                           <a:solidFill>
                             <a:srgbClr val="2C3E50"/>
                           </a:solidFill>
@@ -7603,7 +5512,7 @@
                     <a:lstStyle/>
                     <a:p>
                       <a:r>
-                        <a:rPr sz="1800">
+                        <a:rPr sz="1500">
                           <a:solidFill>
                             <a:srgbClr val="2C3E50"/>
                           </a:solidFill>
@@ -7619,19 +5528,19 @@
                   </a:tcPr>
                 </a:tc>
               </a:tr>
-              <a:tr h="355600">
+              <a:tr h="335280">
                 <a:tc>
                   <a:txBody>
                     <a:bodyPr/>
                     <a:lstStyle/>
                     <a:p>
                       <a:r>
-                        <a:rPr sz="1800">
+                        <a:rPr sz="1500">
                           <a:solidFill>
                             <a:srgbClr val="2C3E50"/>
                           </a:solidFill>
                         </a:rPr>
-                        <a:t>February</a:t>
+                        <a:t>Feb</a:t>
                       </a:r>
                     </a:p>
                   </a:txBody>
@@ -7647,7 +5556,7 @@
                     <a:lstStyle/>
                     <a:p>
                       <a:r>
-                        <a:rPr sz="1800">
+                        <a:rPr sz="1500">
                           <a:solidFill>
                             <a:srgbClr val="2C3E50"/>
                           </a:solidFill>
@@ -7668,7 +5577,7 @@
                     <a:lstStyle/>
                     <a:p>
                       <a:r>
-                        <a:rPr sz="1800">
+                        <a:rPr sz="1500">
                           <a:solidFill>
                             <a:srgbClr val="2C3E50"/>
                           </a:solidFill>
@@ -7684,19 +5593,19 @@
                   </a:tcPr>
                 </a:tc>
               </a:tr>
-              <a:tr h="355600">
+              <a:tr h="335280">
                 <a:tc>
                   <a:txBody>
                     <a:bodyPr/>
                     <a:lstStyle/>
                     <a:p>
                       <a:r>
-                        <a:rPr sz="1800">
+                        <a:rPr sz="1500">
                           <a:solidFill>
                             <a:srgbClr val="2C3E50"/>
                           </a:solidFill>
                         </a:rPr>
-                        <a:t>March</a:t>
+                        <a:t>Mar</a:t>
                       </a:r>
                     </a:p>
                   </a:txBody>
@@ -7712,7 +5621,7 @@
                     <a:lstStyle/>
                     <a:p>
                       <a:r>
-                        <a:rPr sz="1800">
+                        <a:rPr sz="1500">
                           <a:solidFill>
                             <a:srgbClr val="2C3E50"/>
                           </a:solidFill>
@@ -7733,7 +5642,7 @@
                     <a:lstStyle/>
                     <a:p>
                       <a:r>
-                        <a:rPr sz="1800">
+                        <a:rPr sz="1500">
                           <a:solidFill>
                             <a:srgbClr val="2C3E50"/>
                           </a:solidFill>
@@ -7749,19 +5658,19 @@
                   </a:tcPr>
                 </a:tc>
               </a:tr>
-              <a:tr h="355600">
+              <a:tr h="335280">
                 <a:tc>
                   <a:txBody>
                     <a:bodyPr/>
                     <a:lstStyle/>
                     <a:p>
                       <a:r>
-                        <a:rPr sz="1800">
+                        <a:rPr sz="1500">
                           <a:solidFill>
                             <a:srgbClr val="2C3E50"/>
                           </a:solidFill>
                         </a:rPr>
-                        <a:t>April</a:t>
+                        <a:t>Apr</a:t>
                       </a:r>
                     </a:p>
                   </a:txBody>
@@ -7777,7 +5686,7 @@
                     <a:lstStyle/>
                     <a:p>
                       <a:r>
-                        <a:rPr sz="1800">
+                        <a:rPr sz="1500">
                           <a:solidFill>
                             <a:srgbClr val="2C3E50"/>
                           </a:solidFill>
@@ -7798,7 +5707,7 @@
                     <a:lstStyle/>
                     <a:p>
                       <a:r>
-                        <a:rPr sz="1800">
+                        <a:rPr sz="1500">
                           <a:solidFill>
                             <a:srgbClr val="2C3E50"/>
                           </a:solidFill>
@@ -7814,14 +5723,14 @@
                   </a:tcPr>
                 </a:tc>
               </a:tr>
-              <a:tr h="355600">
+              <a:tr h="335280">
                 <a:tc>
                   <a:txBody>
                     <a:bodyPr/>
                     <a:lstStyle/>
                     <a:p>
                       <a:r>
-                        <a:rPr sz="1800">
+                        <a:rPr sz="1500">
                           <a:solidFill>
                             <a:srgbClr val="2C3E50"/>
                           </a:solidFill>
@@ -7842,7 +5751,7 @@
                     <a:lstStyle/>
                     <a:p>
                       <a:r>
-                        <a:rPr sz="1800">
+                        <a:rPr sz="1500">
                           <a:solidFill>
                             <a:srgbClr val="2C3E50"/>
                           </a:solidFill>
@@ -7863,7 +5772,7 @@
                     <a:lstStyle/>
                     <a:p>
                       <a:r>
-                        <a:rPr sz="1800">
+                        <a:rPr sz="1500">
                           <a:solidFill>
                             <a:srgbClr val="2C3E50"/>
                           </a:solidFill>
@@ -7879,19 +5788,19 @@
                   </a:tcPr>
                 </a:tc>
               </a:tr>
-              <a:tr h="355600">
+              <a:tr h="335280">
                 <a:tc>
                   <a:txBody>
                     <a:bodyPr/>
                     <a:lstStyle/>
                     <a:p>
                       <a:r>
-                        <a:rPr sz="1800">
+                        <a:rPr sz="1500">
                           <a:solidFill>
                             <a:srgbClr val="2C3E50"/>
                           </a:solidFill>
                         </a:rPr>
-                        <a:t>June</a:t>
+                        <a:t>Jun</a:t>
                       </a:r>
                     </a:p>
                   </a:txBody>
@@ -7907,7 +5816,7 @@
                     <a:lstStyle/>
                     <a:p>
                       <a:r>
-                        <a:rPr sz="1800">
+                        <a:rPr sz="1500">
                           <a:solidFill>
                             <a:srgbClr val="2C3E50"/>
                           </a:solidFill>
@@ -7928,7 +5837,7 @@
                     <a:lstStyle/>
                     <a:p>
                       <a:r>
-                        <a:rPr sz="1800">
+                        <a:rPr sz="1500">
                           <a:solidFill>
                             <a:srgbClr val="2C3E50"/>
                           </a:solidFill>
@@ -7944,19 +5853,19 @@
                   </a:tcPr>
                 </a:tc>
               </a:tr>
-              <a:tr h="355600">
+              <a:tr h="335280">
                 <a:tc>
                   <a:txBody>
                     <a:bodyPr/>
                     <a:lstStyle/>
                     <a:p>
                       <a:r>
-                        <a:rPr sz="1800">
+                        <a:rPr sz="1500">
                           <a:solidFill>
                             <a:srgbClr val="2C3E50"/>
                           </a:solidFill>
                         </a:rPr>
-                        <a:t>July</a:t>
+                        <a:t>Jul</a:t>
                       </a:r>
                     </a:p>
                   </a:txBody>
@@ -7972,7 +5881,7 @@
                     <a:lstStyle/>
                     <a:p>
                       <a:r>
-                        <a:rPr sz="1800">
+                        <a:rPr sz="1500">
                           <a:solidFill>
                             <a:srgbClr val="2C3E50"/>
                           </a:solidFill>
@@ -7993,7 +5902,7 @@
                     <a:lstStyle/>
                     <a:p>
                       <a:r>
-                        <a:rPr sz="1800">
+                        <a:rPr sz="1500">
                           <a:solidFill>
                             <a:srgbClr val="2C3E50"/>
                           </a:solidFill>
@@ -8009,19 +5918,19 @@
                   </a:tcPr>
                 </a:tc>
               </a:tr>
-              <a:tr h="355600">
+              <a:tr h="335280">
                 <a:tc>
                   <a:txBody>
                     <a:bodyPr/>
                     <a:lstStyle/>
                     <a:p>
                       <a:r>
-                        <a:rPr sz="1800">
+                        <a:rPr sz="1500">
                           <a:solidFill>
                             <a:srgbClr val="2C3E50"/>
                           </a:solidFill>
                         </a:rPr>
-                        <a:t>August</a:t>
+                        <a:t>Aug</a:t>
                       </a:r>
                     </a:p>
                   </a:txBody>
@@ -8037,7 +5946,7 @@
                     <a:lstStyle/>
                     <a:p>
                       <a:r>
-                        <a:rPr sz="1800">
+                        <a:rPr sz="1500">
                           <a:solidFill>
                             <a:srgbClr val="2C3E50"/>
                           </a:solidFill>
@@ -8058,7 +5967,7 @@
                     <a:lstStyle/>
                     <a:p>
                       <a:r>
-                        <a:rPr sz="1800">
+                        <a:rPr sz="1500">
                           <a:solidFill>
                             <a:srgbClr val="2C3E50"/>
                           </a:solidFill>
@@ -8080,189 +5989,20 @@
       </p:graphicFrame>
       <p:sp>
         <p:nvSpPr>
-          <p:cNvPr id="6" name="TextBox 5"/>
-          <p:cNvSpPr txBox="1"/>
-          <p:nvPr/>
-        </p:nvSpPr>
-        <p:spPr>
-          <a:xfrm>
-            <a:off x="6995160" y="1280160"/>
-            <a:ext cx="4663440" cy="365760"/>
-          </a:xfrm>
-          <a:prstGeom prst="rect">
-            <a:avLst/>
-          </a:prstGeom>
-          <a:noFill/>
-        </p:spPr>
-        <p:txBody>
-          <a:bodyPr wrap="square">
-            <a:spAutoFit/>
-          </a:bodyPr>
-          <a:lstStyle/>
-          <a:p>
-            <a:pPr algn="l"/>
-            <a:r>
-              <a:rPr sz="1900" b="1" i="0">
-                <a:solidFill>
-                  <a:srgbClr val="1A2F5E"/>
-                </a:solidFill>
-              </a:rPr>
-              <a:t>Two things are both true:</a:t>
-            </a:r>
-          </a:p>
-        </p:txBody>
-      </p:sp>
-      <p:sp>
-        <p:nvSpPr>
-          <p:cNvPr id="7" name="TextBox 6"/>
-          <p:cNvSpPr txBox="1"/>
-          <p:nvPr/>
-        </p:nvSpPr>
-        <p:spPr>
-          <a:xfrm>
-            <a:off x="6995160" y="1645920"/>
-            <a:ext cx="4663440" cy="2286000"/>
-          </a:xfrm>
-          <a:prstGeom prst="rect">
-            <a:avLst/>
-          </a:prstGeom>
-          <a:noFill/>
-        </p:spPr>
-        <p:txBody>
-          <a:bodyPr wrap="square">
-            <a:spAutoFit/>
-          </a:bodyPr>
-          <a:lstStyle/>
-          <a:p>
-            <a:pPr>
-              <a:spcBef>
-                <a:spcPts val="400"/>
-              </a:spcBef>
-            </a:pPr>
-            <a:r>
-              <a:rPr sz="1800">
-                <a:solidFill>
-                  <a:srgbClr val="2C3E50"/>
-                </a:solidFill>
-              </a:rPr>
-              <a:t>✓  Clear upward trend: ~19.2% average monthly growth in unique users</a:t>
-            </a:r>
-          </a:p>
-          <a:p>
-            <a:pPr>
-              <a:spcBef>
-                <a:spcPts val="400"/>
-              </a:spcBef>
-            </a:pPr>
-            <a:r>
-              <a:rPr sz="1800">
-                <a:solidFill>
-                  <a:srgbClr val="2C3E50"/>
-                </a:solidFill>
-              </a:rPr>
-              <a:t/>
-            </a:r>
-          </a:p>
-          <a:p>
-            <a:pPr>
-              <a:spcBef>
-                <a:spcPts val="400"/>
-              </a:spcBef>
-            </a:pPr>
-            <a:r>
-              <a:rPr sz="1800">
-                <a:solidFill>
-                  <a:srgbClr val="2C3E50"/>
-                </a:solidFill>
-              </a:rPr>
-              <a:t>✗  Monthly users never exceeded 10% of all lab employees</a:t>
-            </a:r>
-          </a:p>
-          <a:p>
-            <a:pPr>
-              <a:spcBef>
-                <a:spcPts val="400"/>
-              </a:spcBef>
-            </a:pPr>
-            <a:r>
-              <a:rPr sz="1800">
-                <a:solidFill>
-                  <a:srgbClr val="2C3E50"/>
-                </a:solidFill>
-              </a:rPr>
-              <a:t>    → Use is still largely experimental</a:t>
-            </a:r>
-          </a:p>
-        </p:txBody>
-      </p:sp>
-      <p:sp>
-        <p:nvSpPr>
-          <p:cNvPr id="8" name="TextBox 7"/>
-          <p:cNvSpPr txBox="1"/>
-          <p:nvPr/>
-        </p:nvSpPr>
-        <p:spPr>
-          <a:xfrm>
-            <a:off x="11704320" y="6492240"/>
-            <a:ext cx="365760" cy="274320"/>
-          </a:xfrm>
-          <a:prstGeom prst="rect">
-            <a:avLst/>
-          </a:prstGeom>
-          <a:noFill/>
-        </p:spPr>
-        <p:txBody>
-          <a:bodyPr wrap="square">
-            <a:spAutoFit/>
-          </a:bodyPr>
-          <a:lstStyle/>
-          <a:p>
-            <a:pPr algn="r"/>
-            <a:r>
-              <a:rPr sz="1200" b="0" i="0">
-                <a:solidFill>
-                  <a:srgbClr val="7F8C8D"/>
-                </a:solidFill>
-              </a:rPr>
-              <a:t>6</a:t>
-            </a:r>
-          </a:p>
-        </p:txBody>
-      </p:sp>
-    </p:spTree>
-  </p:cSld>
-  <p:clrMapOvr>
-    <a:masterClrMapping/>
-  </p:clrMapOvr>
-</p:sld>
-</file>
-
-<file path=ppt/slides/slide7.xml><?xml version="1.0" encoding="utf-8"?>
-<p:sld xmlns:a="http://schemas.openxmlformats.org/drawingml/2006/main" xmlns:p="http://schemas.openxmlformats.org/presentationml/2006/main" xmlns:r="http://schemas.openxmlformats.org/officeDocument/2006/relationships">
-  <p:cSld>
-    <p:spTree>
-      <p:nvGrpSpPr>
-        <p:cNvPr id="1" name=""/>
-        <p:cNvGrpSpPr/>
-        <p:nvPr/>
-      </p:nvGrpSpPr>
-      <p:grpSpPr/>
-      <p:sp>
-        <p:nvSpPr>
-          <p:cNvPr id="2" name="Rectangle 1"/>
+          <p:cNvPr id="7" name="Rectangle 6"/>
           <p:cNvSpPr/>
           <p:nvPr/>
         </p:nvSpPr>
         <p:spPr>
           <a:xfrm>
-            <a:off x="0" y="0"/>
-            <a:ext cx="12188952" cy="1143000"/>
+            <a:off x="365760" y="4709160"/>
+            <a:ext cx="5303520" cy="594360"/>
           </a:xfrm>
           <a:prstGeom prst="rect">
             <a:avLst/>
           </a:prstGeom>
           <a:solidFill>
-            <a:srgbClr val="1A2F5E"/>
+            <a:srgbClr val="FFF3CD"/>
           </a:solidFill>
           <a:ln>
             <a:noFill/>
@@ -8292,14 +6032,14 @@
       </p:sp>
       <p:sp>
         <p:nvSpPr>
-          <p:cNvPr id="3" name="TextBox 2"/>
+          <p:cNvPr id="8" name="TextBox 7"/>
           <p:cNvSpPr txBox="1"/>
           <p:nvPr/>
         </p:nvSpPr>
         <p:spPr>
           <a:xfrm>
-            <a:off x="320040" y="137160"/>
-            <a:ext cx="11430000" cy="685800"/>
+            <a:off x="457200" y="4754880"/>
+            <a:ext cx="5120640" cy="502920"/>
           </a:xfrm>
           <a:prstGeom prst="rect">
             <a:avLst/>
@@ -8314,26 +6054,26 @@
           <a:p>
             <a:pPr algn="l"/>
             <a:r>
-              <a:rPr sz="2800" b="1" i="0">
-                <a:solidFill>
-                  <a:srgbClr val="FFFFFF"/>
+              <a:rPr sz="1500" b="0" i="0">
+                <a:solidFill>
+                  <a:srgbClr val="7D6008"/>
                 </a:solidFill>
               </a:rPr>
-              <a:t>Finding 1: Copilot Use Cases</a:t>
-            </a:r>
-          </a:p>
-        </p:txBody>
-      </p:sp>
-      <p:sp>
-        <p:nvSpPr>
-          <p:cNvPr id="4" name="TextBox 3"/>
+              <a:t>⚠  Monthly users never exceeded 10% of all lab employees → use is still experimental</a:t>
+            </a:r>
+          </a:p>
+        </p:txBody>
+      </p:sp>
+      <p:sp>
+        <p:nvSpPr>
+          <p:cNvPr id="9" name="TextBox 8"/>
           <p:cNvSpPr txBox="1"/>
           <p:nvPr/>
         </p:nvSpPr>
         <p:spPr>
           <a:xfrm>
-            <a:off x="320040" y="749808"/>
-            <a:ext cx="11430000" cy="365760"/>
+            <a:off x="5943600" y="1234440"/>
+            <a:ext cx="5852160" cy="320040"/>
           </a:xfrm>
           <a:prstGeom prst="rect">
             <a:avLst/>
@@ -8348,27 +6088,27 @@
           <a:p>
             <a:pPr algn="l"/>
             <a:r>
-              <a:rPr sz="1600" b="0" i="0">
-                <a:solidFill>
-                  <a:srgbClr val="ECF0F1"/>
+              <a:rPr sz="1700" b="1" i="0">
+                <a:solidFill>
+                  <a:srgbClr val="1A2F5E"/>
                 </a:solidFill>
               </a:rPr>
-              <a:t>From Table 5 (Employee Copilot section) — Wagman et al. (2025)</a:t>
+              <a:t>Copilot use cases (Table 5 — top half):</a:t>
             </a:r>
           </a:p>
         </p:txBody>
       </p:sp>
       <p:graphicFrame>
         <p:nvGraphicFramePr>
-          <p:cNvPr id="5" name="Table 4"/>
+          <p:cNvPr id="10" name="Table 9"/>
           <p:cNvGraphicFramePr>
             <a:graphicFrameLocks noGrp="1"/>
           </p:cNvGraphicFramePr>
           <p:nvPr/>
         </p:nvGraphicFramePr>
         <p:xfrm>
-          <a:off x="320040" y="1280160"/>
-          <a:ext cx="11521440" cy="2011680"/>
+          <a:off x="5943600" y="1581912"/>
+          <a:ext cx="5852160" cy="1828800"/>
         </p:xfrm>
         <a:graphic>
           <a:graphicData uri="http://schemas.openxmlformats.org/drawingml/2006/table">
@@ -8377,11 +6117,546 @@
                 <a:tableStyleId>{5C22544A-7EE6-4342-B048-85BDC9FD1C3A}</a:tableStyleId>
               </a:tblPr>
               <a:tblGrid>
-                <a:gridCol w="3840480"/>
-                <a:gridCol w="3840480"/>
-                <a:gridCol w="3840480"/>
+                <a:gridCol w="1950720"/>
+                <a:gridCol w="1950720"/>
+                <a:gridCol w="1950720"/>
               </a:tblGrid>
-              <a:tr h="670560">
+              <a:tr h="609600">
+                <a:tc>
+                  <a:txBody>
+                    <a:bodyPr/>
+                    <a:lstStyle/>
+                    <a:p>
+                      <a:pPr algn="ctr"/>
+                      <a:r>
+                        <a:rPr b="1" sz="1500">
+                          <a:solidFill>
+                            <a:srgbClr val="FFFFFF"/>
+                          </a:solidFill>
+                        </a:rPr>
+                        <a:t>Use Case</a:t>
+                      </a:r>
+                    </a:p>
+                  </a:txBody>
+                  <a:tcPr>
+                    <a:solidFill>
+                      <a:srgbClr val="1A2F5E"/>
+                    </a:solidFill>
+                  </a:tcPr>
+                </a:tc>
+                <a:tc>
+                  <a:txBody>
+                    <a:bodyPr/>
+                    <a:lstStyle/>
+                    <a:p>
+                      <a:pPr algn="ctr"/>
+                      <a:r>
+                        <a:rPr b="1" sz="1500">
+                          <a:solidFill>
+                            <a:srgbClr val="FFFFFF"/>
+                          </a:solidFill>
+                        </a:rPr>
+                        <a:t>Science</a:t>
+                      </a:r>
+                    </a:p>
+                  </a:txBody>
+                  <a:tcPr>
+                    <a:solidFill>
+                      <a:srgbClr val="1A2F5E"/>
+                    </a:solidFill>
+                  </a:tcPr>
+                </a:tc>
+                <a:tc>
+                  <a:txBody>
+                    <a:bodyPr/>
+                    <a:lstStyle/>
+                    <a:p>
+                      <a:pPr algn="ctr"/>
+                      <a:r>
+                        <a:rPr b="1" sz="1500">
+                          <a:solidFill>
+                            <a:srgbClr val="FFFFFF"/>
+                          </a:solidFill>
+                        </a:rPr>
+                        <a:t>Operations</a:t>
+                      </a:r>
+                    </a:p>
+                  </a:txBody>
+                  <a:tcPr>
+                    <a:solidFill>
+                      <a:srgbClr val="1A2F5E"/>
+                    </a:solidFill>
+                  </a:tcPr>
+                </a:tc>
+              </a:tr>
+              <a:tr h="609600">
+                <a:tc>
+                  <a:txBody>
+                    <a:bodyPr/>
+                    <a:lstStyle/>
+                    <a:p>
+                      <a:r>
+                        <a:rPr sz="1500">
+                          <a:solidFill>
+                            <a:srgbClr val="2C3E50"/>
+                          </a:solidFill>
+                        </a:rPr>
+                        <a:t>Writing structured
+text / code</a:t>
+                      </a:r>
+                    </a:p>
+                  </a:txBody>
+                  <a:tcPr>
+                    <a:solidFill>
+                      <a:srgbClr val="ECF0F1"/>
+                    </a:solidFill>
+                  </a:tcPr>
+                </a:tc>
+                <a:tc>
+                  <a:txBody>
+                    <a:bodyPr/>
+                    <a:lstStyle/>
+                    <a:p>
+                      <a:r>
+                        <a:rPr sz="1500">
+                          <a:solidFill>
+                            <a:srgbClr val="2C3E50"/>
+                          </a:solidFill>
+                        </a:rPr>
+                        <a:t>Paper intros, grants, reports, emails, code</a:t>
+                      </a:r>
+                    </a:p>
+                  </a:txBody>
+                  <a:tcPr>
+                    <a:solidFill>
+                      <a:srgbClr val="ECF0F1"/>
+                    </a:solidFill>
+                  </a:tcPr>
+                </a:tc>
+                <a:tc>
+                  <a:txBody>
+                    <a:bodyPr/>
+                    <a:lstStyle/>
+                    <a:p>
+                      <a:r>
+                        <a:rPr sz="1500">
+                          <a:solidFill>
+                            <a:srgbClr val="2C3E50"/>
+                          </a:solidFill>
+                        </a:rPr>
+                        <a:t>Reports, emails, code</a:t>
+                      </a:r>
+                    </a:p>
+                  </a:txBody>
+                  <a:tcPr>
+                    <a:solidFill>
+                      <a:srgbClr val="ECF0F1"/>
+                    </a:solidFill>
+                  </a:tcPr>
+                </a:tc>
+              </a:tr>
+              <a:tr h="609600">
+                <a:tc>
+                  <a:txBody>
+                    <a:bodyPr/>
+                    <a:lstStyle/>
+                    <a:p>
+                      <a:r>
+                        <a:rPr sz="1500">
+                          <a:solidFill>
+                            <a:srgbClr val="2C3E50"/>
+                          </a:solidFill>
+                        </a:rPr>
+                        <a:t>Extracting insights
+from unstructured text</a:t>
+                      </a:r>
+                    </a:p>
+                  </a:txBody>
+                  <a:tcPr>
+                    <a:solidFill>
+                      <a:srgbClr val="FFFFFF"/>
+                    </a:solidFill>
+                  </a:tcPr>
+                </a:tc>
+                <a:tc>
+                  <a:txBody>
+                    <a:bodyPr/>
+                    <a:lstStyle/>
+                    <a:p>
+                      <a:r>
+                        <a:rPr sz="1500">
+                          <a:solidFill>
+                            <a:srgbClr val="2C3E50"/>
+                          </a:solidFill>
+                        </a:rPr>
+                        <a:t>Scientific literature; lab regulations</a:t>
+                      </a:r>
+                    </a:p>
+                  </a:txBody>
+                  <a:tcPr>
+                    <a:solidFill>
+                      <a:srgbClr val="FFFFFF"/>
+                    </a:solidFill>
+                  </a:tcPr>
+                </a:tc>
+                <a:tc>
+                  <a:txBody>
+                    <a:bodyPr/>
+                    <a:lstStyle/>
+                    <a:p>
+                      <a:r>
+                        <a:rPr sz="1500">
+                          <a:solidFill>
+                            <a:srgbClr val="2C3E50"/>
+                          </a:solidFill>
+                        </a:rPr>
+                        <a:t>Team surveys; meeting transcripts; org policies</a:t>
+                      </a:r>
+                    </a:p>
+                  </a:txBody>
+                  <a:tcPr>
+                    <a:solidFill>
+                      <a:srgbClr val="FFFFFF"/>
+                    </a:solidFill>
+                  </a:tcPr>
+                </a:tc>
+              </a:tr>
+            </a:tbl>
+          </a:graphicData>
+        </a:graphic>
+      </p:graphicFrame>
+      <p:sp>
+        <p:nvSpPr>
+          <p:cNvPr id="11" name="TextBox 10"/>
+          <p:cNvSpPr txBox="1"/>
+          <p:nvPr/>
+        </p:nvSpPr>
+        <p:spPr>
+          <a:xfrm>
+            <a:off x="5943600" y="3566160"/>
+            <a:ext cx="5852160" cy="320040"/>
+          </a:xfrm>
+          <a:prstGeom prst="rect">
+            <a:avLst/>
+          </a:prstGeom>
+          <a:noFill/>
+        </p:spPr>
+        <p:txBody>
+          <a:bodyPr wrap="square">
+            <a:spAutoFit/>
+          </a:bodyPr>
+          <a:lstStyle/>
+          <a:p>
+            <a:pPr algn="l"/>
+            <a:r>
+              <a:rPr sz="1600" b="1" i="0">
+                <a:solidFill>
+                  <a:srgbClr val="1A2F5E"/>
+                </a:solidFill>
+              </a:rPr>
+              <a:t>Key finding:</a:t>
+            </a:r>
+          </a:p>
+        </p:txBody>
+      </p:sp>
+      <p:sp>
+        <p:nvSpPr>
+          <p:cNvPr id="12" name="TextBox 11"/>
+          <p:cNvSpPr txBox="1"/>
+          <p:nvPr/>
+        </p:nvSpPr>
+        <p:spPr>
+          <a:xfrm>
+            <a:off x="5943600" y="3886200"/>
+            <a:ext cx="5852160" cy="502920"/>
+          </a:xfrm>
+          <a:prstGeom prst="rect">
+            <a:avLst/>
+          </a:prstGeom>
+          <a:noFill/>
+        </p:spPr>
+        <p:txBody>
+          <a:bodyPr wrap="square">
+            <a:spAutoFit/>
+          </a:bodyPr>
+          <a:lstStyle/>
+          <a:p>
+            <a:pPr algn="l"/>
+            <a:r>
+              <a:rPr sz="1600" b="0" i="0">
+                <a:solidFill>
+                  <a:srgbClr val="2C3E50"/>
+                </a:solidFill>
+              </a:rPr>
+              <a:t>Science and Operations needs are largely similar for copilot-style tasks — a single shared tool is defensible.</a:t>
+            </a:r>
+          </a:p>
+        </p:txBody>
+      </p:sp>
+      <p:sp>
+        <p:nvSpPr>
+          <p:cNvPr id="13" name="Rectangle 12"/>
+          <p:cNvSpPr/>
+          <p:nvPr/>
+        </p:nvSpPr>
+        <p:spPr>
+          <a:xfrm>
+            <a:off x="5943600" y="4480560"/>
+            <a:ext cx="5852160" cy="822960"/>
+          </a:xfrm>
+          <a:prstGeom prst="rect">
+            <a:avLst/>
+          </a:prstGeom>
+          <a:solidFill>
+            <a:srgbClr val="ECF0F1"/>
+          </a:solidFill>
+          <a:ln>
+            <a:noFill/>
+          </a:ln>
+        </p:spPr>
+        <p:style>
+          <a:lnRef idx="1">
+            <a:schemeClr val="accent1"/>
+          </a:lnRef>
+          <a:fillRef idx="3">
+            <a:schemeClr val="accent1"/>
+          </a:fillRef>
+          <a:effectRef idx="2">
+            <a:schemeClr val="accent1"/>
+          </a:effectRef>
+          <a:fontRef idx="minor">
+            <a:schemeClr val="lt1"/>
+          </a:fontRef>
+        </p:style>
+        <p:txBody>
+          <a:bodyPr rtlCol="0" anchor="ctr"/>
+          <a:lstStyle/>
+          <a:p>
+            <a:pPr algn="ctr"/>
+          </a:p>
+        </p:txBody>
+      </p:sp>
+      <p:sp>
+        <p:nvSpPr>
+          <p:cNvPr id="14" name="TextBox 13"/>
+          <p:cNvSpPr txBox="1"/>
+          <p:nvPr/>
+        </p:nvSpPr>
+        <p:spPr>
+          <a:xfrm>
+            <a:off x="6035040" y="4526280"/>
+            <a:ext cx="5669280" cy="731520"/>
+          </a:xfrm>
+          <a:prstGeom prst="rect">
+            <a:avLst/>
+          </a:prstGeom>
+          <a:noFill/>
+        </p:spPr>
+        <p:txBody>
+          <a:bodyPr wrap="square">
+            <a:spAutoFit/>
+          </a:bodyPr>
+          <a:lstStyle/>
+          <a:p>
+            <a:pPr algn="l"/>
+            <a:r>
+              <a:rPr sz="1500" b="0" i="1">
+                <a:solidFill>
+                  <a:srgbClr val="2C3E50"/>
+                </a:solidFill>
+              </a:rPr>
+              <a:t>"Who wants to write these things? But if you take an incident debriefing and ask the system to write a report... it did a really nice job."  — P2, Operations</a:t>
+            </a:r>
+          </a:p>
+        </p:txBody>
+      </p:sp>
+      <p:sp>
+        <p:nvSpPr>
+          <p:cNvPr id="15" name="TextBox 14"/>
+          <p:cNvSpPr txBox="1"/>
+          <p:nvPr/>
+        </p:nvSpPr>
+        <p:spPr>
+          <a:xfrm>
+            <a:off x="11704320" y="6537960"/>
+            <a:ext cx="365760" cy="274320"/>
+          </a:xfrm>
+          <a:prstGeom prst="rect">
+            <a:avLst/>
+          </a:prstGeom>
+          <a:noFill/>
+        </p:spPr>
+        <p:txBody>
+          <a:bodyPr wrap="square">
+            <a:spAutoFit/>
+          </a:bodyPr>
+          <a:lstStyle/>
+          <a:p>
+            <a:pPr algn="r"/>
+            <a:r>
+              <a:rPr sz="1200" b="0" i="0">
+                <a:solidFill>
+                  <a:srgbClr val="7F8C8D"/>
+                </a:solidFill>
+              </a:rPr>
+              <a:t>4</a:t>
+            </a:r>
+          </a:p>
+        </p:txBody>
+      </p:sp>
+    </p:spTree>
+  </p:cSld>
+  <p:clrMapOvr>
+    <a:masterClrMapping/>
+  </p:clrMapOvr>
+</p:sld>
+</file>
+
+<file path=ppt/slides/slide5.xml><?xml version="1.0" encoding="utf-8"?>
+<p:sld xmlns:a="http://schemas.openxmlformats.org/drawingml/2006/main" xmlns:p="http://schemas.openxmlformats.org/presentationml/2006/main" xmlns:r="http://schemas.openxmlformats.org/officeDocument/2006/relationships">
+  <p:cSld>
+    <p:spTree>
+      <p:nvGrpSpPr>
+        <p:cNvPr id="1" name=""/>
+        <p:cNvGrpSpPr/>
+        <p:nvPr/>
+      </p:nvGrpSpPr>
+      <p:grpSpPr/>
+      <p:sp>
+        <p:nvSpPr>
+          <p:cNvPr id="2" name="Rectangle 1"/>
+          <p:cNvSpPr/>
+          <p:nvPr/>
+        </p:nvSpPr>
+        <p:spPr>
+          <a:xfrm>
+            <a:off x="0" y="0"/>
+            <a:ext cx="12188952" cy="1097280"/>
+          </a:xfrm>
+          <a:prstGeom prst="rect">
+            <a:avLst/>
+          </a:prstGeom>
+          <a:solidFill>
+            <a:srgbClr val="1A2F5E"/>
+          </a:solidFill>
+          <a:ln>
+            <a:noFill/>
+          </a:ln>
+        </p:spPr>
+        <p:style>
+          <a:lnRef idx="1">
+            <a:schemeClr val="accent1"/>
+          </a:lnRef>
+          <a:fillRef idx="3">
+            <a:schemeClr val="accent1"/>
+          </a:fillRef>
+          <a:effectRef idx="2">
+            <a:schemeClr val="accent1"/>
+          </a:effectRef>
+          <a:fontRef idx="minor">
+            <a:schemeClr val="lt1"/>
+          </a:fontRef>
+        </p:style>
+        <p:txBody>
+          <a:bodyPr rtlCol="0" anchor="ctr"/>
+          <a:lstStyle/>
+          <a:p>
+            <a:pPr algn="ctr"/>
+          </a:p>
+        </p:txBody>
+      </p:sp>
+      <p:sp>
+        <p:nvSpPr>
+          <p:cNvPr id="3" name="TextBox 2"/>
+          <p:cNvSpPr txBox="1"/>
+          <p:nvPr/>
+        </p:nvSpPr>
+        <p:spPr>
+          <a:xfrm>
+            <a:off x="365760" y="91440"/>
+            <a:ext cx="11430000" cy="640080"/>
+          </a:xfrm>
+          <a:prstGeom prst="rect">
+            <a:avLst/>
+          </a:prstGeom>
+          <a:noFill/>
+        </p:spPr>
+        <p:txBody>
+          <a:bodyPr wrap="square">
+            <a:spAutoFit/>
+          </a:bodyPr>
+          <a:lstStyle/>
+          <a:p>
+            <a:pPr algn="l"/>
+            <a:r>
+              <a:rPr sz="2800" b="1" i="0">
+                <a:solidFill>
+                  <a:srgbClr val="FFFFFF"/>
+                </a:solidFill>
+              </a:rPr>
+              <a:t>Key Results (2): Workflow Agent Use Cases</a:t>
+            </a:r>
+          </a:p>
+        </p:txBody>
+      </p:sp>
+      <p:sp>
+        <p:nvSpPr>
+          <p:cNvPr id="4" name="TextBox 3"/>
+          <p:cNvSpPr txBox="1"/>
+          <p:nvPr/>
+        </p:nvSpPr>
+        <p:spPr>
+          <a:xfrm>
+            <a:off x="365760" y="713232"/>
+            <a:ext cx="11430000" cy="347472"/>
+          </a:xfrm>
+          <a:prstGeom prst="rect">
+            <a:avLst/>
+          </a:prstGeom>
+          <a:noFill/>
+        </p:spPr>
+        <p:txBody>
+          <a:bodyPr wrap="square">
+            <a:spAutoFit/>
+          </a:bodyPr>
+          <a:lstStyle/>
+          <a:p>
+            <a:pPr algn="l"/>
+            <a:r>
+              <a:rPr sz="1500" b="0" i="1">
+                <a:solidFill>
+                  <a:srgbClr val="ECF0F1"/>
+                </a:solidFill>
+              </a:rPr>
+              <a:t>Table 5 (workflow agent section) — Wagman et al. (2025)</a:t>
+            </a:r>
+          </a:p>
+        </p:txBody>
+      </p:sp>
+      <p:graphicFrame>
+        <p:nvGraphicFramePr>
+          <p:cNvPr id="5" name="Table 4"/>
+          <p:cNvGraphicFramePr>
+            <a:graphicFrameLocks noGrp="1"/>
+          </p:cNvGraphicFramePr>
+          <p:nvPr/>
+        </p:nvGraphicFramePr>
+        <p:xfrm>
+          <a:off x="365760" y="1234440"/>
+          <a:ext cx="11430000" cy="2286000"/>
+        </p:xfrm>
+        <a:graphic>
+          <a:graphicData uri="http://schemas.openxmlformats.org/drawingml/2006/table">
+            <a:tbl>
+              <a:tblPr firstRow="1" bandRow="1">
+                <a:tableStyleId>{5C22544A-7EE6-4342-B048-85BDC9FD1C3A}</a:tableStyleId>
+              </a:tblPr>
+              <a:tblGrid>
+                <a:gridCol w="3810000"/>
+                <a:gridCol w="3810000"/>
+                <a:gridCol w="3810000"/>
+              </a:tblGrid>
+              <a:tr h="762000">
                 <a:tc>
                   <a:txBody>
                     <a:bodyPr/>
@@ -8449,7 +6724,7 @@
                   </a:tcPr>
                 </a:tc>
               </a:tr>
-              <a:tr h="670560">
+              <a:tr h="762000">
                 <a:tc>
                   <a:txBody>
                     <a:bodyPr/>
@@ -8461,8 +6736,8 @@
                             <a:srgbClr val="2C3E50"/>
                           </a:solidFill>
                         </a:rPr>
-                        <a:t>Writing structured
-code / text</a:t>
+                        <a:t>Current: Initial steps
+toward automation</a:t>
                       </a:r>
                     </a:p>
                   </a:txBody>
@@ -8483,7 +6758,8 @@
                             <a:srgbClr val="2C3E50"/>
                           </a:solidFill>
                         </a:rPr>
-                        <a:t>Academic paper intros, grants, reports, emails, code</a:t>
+                        <a:t>Operating scientific instruments;
+automating data analysis pipelines</a:t>
                       </a:r>
                     </a:p>
                   </a:txBody>
@@ -8504,7 +6780,8 @@
                             <a:srgbClr val="2C3E50"/>
                           </a:solidFill>
                         </a:rPr>
-                        <a:t>Reports, emails, code</a:t>
+                        <a:t>Automating instrument safety checks;
+LLM-driven database queries</a:t>
                       </a:r>
                     </a:p>
                   </a:txBody>
@@ -8515,7 +6792,7 @@
                   </a:tcPr>
                 </a:tc>
               </a:tr>
-              <a:tr h="670560">
+              <a:tr h="762000">
                 <a:tc>
                   <a:txBody>
                     <a:bodyPr/>
@@ -8527,8 +6804,8 @@
                             <a:srgbClr val="2C3E50"/>
                           </a:solidFill>
                         </a:rPr>
-                        <a:t>Extracting insights from
-large unstructured text</a:t>
+                        <a:t>Envisioned: Fully
+automated workflows</a:t>
                       </a:r>
                     </a:p>
                   </a:txBody>
@@ -8549,7 +6826,8 @@
                             <a:srgbClr val="2C3E50"/>
                           </a:solidFill>
                         </a:rPr>
-                        <a:t>Scientific literature; lab rules &amp; regulations</a:t>
+                        <a:t>"AI scientist": generate hypotheses →
+run simulations → revise → repeat</a:t>
                       </a:r>
                     </a:p>
                   </a:txBody>
@@ -8570,7 +6848,8 @@
                             <a:srgbClr val="2C3E50"/>
                           </a:solidFill>
                         </a:rPr>
-                        <a:t>Public data sources; team surveys; meeting transcripts; lab regulations</a:t>
+                        <a:t>Auto-generate Gantt charts from meeting
+slides; email organization; task prioritization</a:t>
                       </a:r>
                     </a:p>
                   </a:txBody>
@@ -8593,8 +6872,8 @@
         </p:nvSpPr>
         <p:spPr>
           <a:xfrm>
-            <a:off x="320040" y="3429000"/>
-            <a:ext cx="11521440" cy="365760"/>
+            <a:off x="365760" y="3657600"/>
+            <a:ext cx="11430000" cy="320040"/>
           </a:xfrm>
           <a:prstGeom prst="rect">
             <a:avLst/>
@@ -8614,21 +6893,55 @@
                   <a:srgbClr val="1A2F5E"/>
                 </a:solidFill>
               </a:rPr>
-              <a:t>Key finding: Science and Operations needs are largely similar for copilot-style tasks</a:t>
-            </a:r>
-          </a:p>
-        </p:txBody>
-      </p:sp>
-      <p:sp>
-        <p:nvSpPr>
-          <p:cNvPr id="7" name="Rectangle 6"/>
+              <a:t>Key finding:</a:t>
+            </a:r>
+          </a:p>
+        </p:txBody>
+      </p:sp>
+      <p:sp>
+        <p:nvSpPr>
+          <p:cNvPr id="7" name="TextBox 6"/>
+          <p:cNvSpPr txBox="1"/>
+          <p:nvPr/>
+        </p:nvSpPr>
+        <p:spPr>
+          <a:xfrm>
+            <a:off x="365760" y="3977640"/>
+            <a:ext cx="11430000" cy="502920"/>
+          </a:xfrm>
+          <a:prstGeom prst="rect">
+            <a:avLst/>
+          </a:prstGeom>
+          <a:noFill/>
+        </p:spPr>
+        <p:txBody>
+          <a:bodyPr wrap="square">
+            <a:spAutoFit/>
+          </a:bodyPr>
+          <a:lstStyle/>
+          <a:p>
+            <a:pPr algn="l"/>
+            <a:r>
+              <a:rPr sz="1700" b="0" i="0">
+                <a:solidFill>
+                  <a:srgbClr val="2C3E50"/>
+                </a:solidFill>
+              </a:rPr>
+              <a:t>Unlike copilot tasks, Science and Operations diverge here — workflows are highly domain-specific and cannot be served by a single shared tool.</a:t>
+            </a:r>
+          </a:p>
+        </p:txBody>
+      </p:sp>
+      <p:sp>
+        <p:nvSpPr>
+          <p:cNvPr id="8" name="Rectangle 7"/>
           <p:cNvSpPr/>
           <p:nvPr/>
         </p:nvSpPr>
         <p:spPr>
           <a:xfrm>
-            <a:off x="320040" y="3886200"/>
-            <a:ext cx="11521440" cy="822960"/>
+            <a:off x="365760" y="4617720"/>
+            <a:ext cx="5486400" cy="1463040"/>
           </a:xfrm>
           <a:prstGeom prst="rect">
             <a:avLst/>
@@ -8664,14 +6977,14 @@
       </p:sp>
       <p:sp>
         <p:nvSpPr>
-          <p:cNvPr id="8" name="TextBox 7"/>
+          <p:cNvPr id="9" name="TextBox 8"/>
           <p:cNvSpPr txBox="1"/>
           <p:nvPr/>
         </p:nvSpPr>
         <p:spPr>
           <a:xfrm>
-            <a:off x="457200" y="3931920"/>
-            <a:ext cx="11247120" cy="731520"/>
+            <a:off x="457200" y="4663440"/>
+            <a:ext cx="5303520" cy="1371600"/>
           </a:xfrm>
           <a:prstGeom prst="rect">
             <a:avLst/>
@@ -8686,118 +6999,33 @@
           <a:p>
             <a:pPr algn="l"/>
             <a:r>
-              <a:rPr sz="1700" b="0" i="1">
+              <a:rPr sz="1500" b="0" i="1">
                 <a:solidFill>
                   <a:srgbClr val="2C3E50"/>
                 </a:solidFill>
               </a:rPr>
-              <a:t>"Who wants to write these things? But if you take an incident debriefing and ask the system to write a report based on that... it did a really nice job."  — P2, Operations</a:t>
-            </a:r>
-          </a:p>
-        </p:txBody>
-      </p:sp>
-      <p:sp>
-        <p:nvSpPr>
-          <p:cNvPr id="9" name="TextBox 8"/>
-          <p:cNvSpPr txBox="1"/>
-          <p:nvPr/>
-        </p:nvSpPr>
-        <p:spPr>
-          <a:xfrm>
-            <a:off x="320040" y="4846320"/>
-            <a:ext cx="11521440" cy="365760"/>
-          </a:xfrm>
-          <a:prstGeom prst="rect">
-            <a:avLst/>
-          </a:prstGeom>
-          <a:noFill/>
-        </p:spPr>
-        <p:txBody>
-          <a:bodyPr wrap="square">
-            <a:spAutoFit/>
-          </a:bodyPr>
-          <a:lstStyle/>
-          <a:p>
-            <a:pPr algn="l"/>
-            <a:r>
-              <a:rPr sz="1700" b="0" i="0">
-                <a:solidFill>
-                  <a:srgbClr val="E74C3C"/>
-                </a:solidFill>
-              </a:rPr>
-              <a:t>Blocker for envisioned uses: hallucinations prevent trust in extracting insights from unverified sources</a:t>
-            </a:r>
-          </a:p>
-        </p:txBody>
-      </p:sp>
-      <p:sp>
-        <p:nvSpPr>
-          <p:cNvPr id="10" name="TextBox 9"/>
-          <p:cNvSpPr txBox="1"/>
-          <p:nvPr/>
-        </p:nvSpPr>
-        <p:spPr>
-          <a:xfrm>
-            <a:off x="11704320" y="6492240"/>
-            <a:ext cx="365760" cy="274320"/>
-          </a:xfrm>
-          <a:prstGeom prst="rect">
-            <a:avLst/>
-          </a:prstGeom>
-          <a:noFill/>
-        </p:spPr>
-        <p:txBody>
-          <a:bodyPr wrap="square">
-            <a:spAutoFit/>
-          </a:bodyPr>
-          <a:lstStyle/>
-          <a:p>
-            <a:pPr algn="r"/>
-            <a:r>
-              <a:rPr sz="1200" b="0" i="0">
-                <a:solidFill>
-                  <a:srgbClr val="7F8C8D"/>
-                </a:solidFill>
-              </a:rPr>
-              <a:t>7</a:t>
-            </a:r>
-          </a:p>
-        </p:txBody>
-      </p:sp>
-    </p:spTree>
-  </p:cSld>
-  <p:clrMapOvr>
-    <a:masterClrMapping/>
-  </p:clrMapOvr>
-</p:sld>
-</file>
-
-<file path=ppt/slides/slide8.xml><?xml version="1.0" encoding="utf-8"?>
-<p:sld xmlns:a="http://schemas.openxmlformats.org/drawingml/2006/main" xmlns:p="http://schemas.openxmlformats.org/presentationml/2006/main" xmlns:r="http://schemas.openxmlformats.org/officeDocument/2006/relationships">
-  <p:cSld>
-    <p:spTree>
-      <p:nvGrpSpPr>
-        <p:cNvPr id="1" name=""/>
-        <p:cNvGrpSpPr/>
-        <p:nvPr/>
-      </p:nvGrpSpPr>
-      <p:grpSpPr/>
-      <p:sp>
-        <p:nvSpPr>
-          <p:cNvPr id="2" name="Rectangle 1"/>
+              <a:t>"I would never have been able to write the code without significant time investment, and the fact that I could produce a working app in a couple of days was impressive to me."
+— P1, Operations (no formal SE training)</a:t>
+            </a:r>
+          </a:p>
+        </p:txBody>
+      </p:sp>
+      <p:sp>
+        <p:nvSpPr>
+          <p:cNvPr id="10" name="Rectangle 9"/>
           <p:cNvSpPr/>
           <p:nvPr/>
         </p:nvSpPr>
         <p:spPr>
           <a:xfrm>
-            <a:off x="0" y="0"/>
-            <a:ext cx="12188952" cy="1143000"/>
+            <a:off x="6126480" y="4617720"/>
+            <a:ext cx="5669280" cy="1463040"/>
           </a:xfrm>
           <a:prstGeom prst="rect">
             <a:avLst/>
           </a:prstGeom>
           <a:solidFill>
-            <a:srgbClr val="1A2F5E"/>
+            <a:srgbClr val="ECF0F1"/>
           </a:solidFill>
           <a:ln>
             <a:noFill/>
@@ -8827,14 +7055,14 @@
       </p:sp>
       <p:sp>
         <p:nvSpPr>
-          <p:cNvPr id="3" name="TextBox 2"/>
+          <p:cNvPr id="11" name="TextBox 10"/>
           <p:cNvSpPr txBox="1"/>
           <p:nvPr/>
         </p:nvSpPr>
         <p:spPr>
           <a:xfrm>
-            <a:off x="320040" y="137160"/>
-            <a:ext cx="11430000" cy="685800"/>
+            <a:off x="6217920" y="4663440"/>
+            <a:ext cx="5486400" cy="1371600"/>
           </a:xfrm>
           <a:prstGeom prst="rect">
             <a:avLst/>
@@ -8849,26 +7077,27 @@
           <a:p>
             <a:pPr algn="l"/>
             <a:r>
-              <a:rPr sz="2800" b="1" i="0">
-                <a:solidFill>
-                  <a:srgbClr val="FFFFFF"/>
+              <a:rPr sz="1500" b="0" i="1">
+                <a:solidFill>
+                  <a:srgbClr val="2C3E50"/>
                 </a:solidFill>
               </a:rPr>
-              <a:t>Finding 2: Workflow Agent Use Cases</a:t>
-            </a:r>
-          </a:p>
-        </p:txBody>
-      </p:sp>
-      <p:sp>
-        <p:nvSpPr>
-          <p:cNvPr id="4" name="TextBox 3"/>
+              <a:t>"Think about Photoshop — with these large language models, where you can interact with the chatbot and say: sharpen the image... researchers could ask the same of a scientific image."
+— P21, Scientist</a:t>
+            </a:r>
+          </a:p>
+        </p:txBody>
+      </p:sp>
+      <p:sp>
+        <p:nvSpPr>
+          <p:cNvPr id="12" name="TextBox 11"/>
           <p:cNvSpPr txBox="1"/>
           <p:nvPr/>
         </p:nvSpPr>
         <p:spPr>
           <a:xfrm>
-            <a:off x="320040" y="749808"/>
-            <a:ext cx="11430000" cy="365760"/>
+            <a:off x="11704320" y="6537960"/>
+            <a:ext cx="365760" cy="274320"/>
           </a:xfrm>
           <a:prstGeom prst="rect">
             <a:avLst/>
@@ -8881,295 +7110,52 @@
           </a:bodyPr>
           <a:lstStyle/>
           <a:p>
-            <a:pPr algn="l"/>
-            <a:r>
-              <a:rPr sz="1600" b="0" i="0">
-                <a:solidFill>
-                  <a:srgbClr val="ECF0F1"/>
+            <a:pPr algn="r"/>
+            <a:r>
+              <a:rPr sz="1200" b="0" i="0">
+                <a:solidFill>
+                  <a:srgbClr val="7F8C8D"/>
                 </a:solidFill>
               </a:rPr>
-              <a:t>From Table 5 (Workflow Agent section) — Wagman et al. (2025)</a:t>
-            </a:r>
-          </a:p>
-        </p:txBody>
-      </p:sp>
-      <p:graphicFrame>
-        <p:nvGraphicFramePr>
-          <p:cNvPr id="5" name="Table 4"/>
-          <p:cNvGraphicFramePr>
-            <a:graphicFrameLocks noGrp="1"/>
-          </p:cNvGraphicFramePr>
-          <p:nvPr/>
-        </p:nvGraphicFramePr>
-        <p:xfrm>
-          <a:off x="320040" y="1280160"/>
-          <a:ext cx="11521440" cy="2011680"/>
-        </p:xfrm>
-        <a:graphic>
-          <a:graphicData uri="http://schemas.openxmlformats.org/drawingml/2006/table">
-            <a:tbl>
-              <a:tblPr firstRow="1" bandRow="1">
-                <a:tableStyleId>{5C22544A-7EE6-4342-B048-85BDC9FD1C3A}</a:tableStyleId>
-              </a:tblPr>
-              <a:tblGrid>
-                <a:gridCol w="3840480"/>
-                <a:gridCol w="3840480"/>
-                <a:gridCol w="3840480"/>
-              </a:tblGrid>
-              <a:tr h="670560">
-                <a:tc>
-                  <a:txBody>
-                    <a:bodyPr/>
-                    <a:lstStyle/>
-                    <a:p>
-                      <a:pPr algn="ctr"/>
-                      <a:r>
-                        <a:rPr b="1" sz="1700">
-                          <a:solidFill>
-                            <a:srgbClr val="FFFFFF"/>
-                          </a:solidFill>
-                        </a:rPr>
-                        <a:t>Use Case</a:t>
-                      </a:r>
-                    </a:p>
-                  </a:txBody>
-                  <a:tcPr>
-                    <a:solidFill>
-                      <a:srgbClr val="1A2F5E"/>
-                    </a:solidFill>
-                  </a:tcPr>
-                </a:tc>
-                <a:tc>
-                  <a:txBody>
-                    <a:bodyPr/>
-                    <a:lstStyle/>
-                    <a:p>
-                      <a:pPr algn="ctr"/>
-                      <a:r>
-                        <a:rPr b="1" sz="1700">
-                          <a:solidFill>
-                            <a:srgbClr val="FFFFFF"/>
-                          </a:solidFill>
-                        </a:rPr>
-                        <a:t>Science Examples</a:t>
-                      </a:r>
-                    </a:p>
-                  </a:txBody>
-                  <a:tcPr>
-                    <a:solidFill>
-                      <a:srgbClr val="1A2F5E"/>
-                    </a:solidFill>
-                  </a:tcPr>
-                </a:tc>
-                <a:tc>
-                  <a:txBody>
-                    <a:bodyPr/>
-                    <a:lstStyle/>
-                    <a:p>
-                      <a:pPr algn="ctr"/>
-                      <a:r>
-                        <a:rPr b="1" sz="1700">
-                          <a:solidFill>
-                            <a:srgbClr val="FFFFFF"/>
-                          </a:solidFill>
-                        </a:rPr>
-                        <a:t>Operations Examples</a:t>
-                      </a:r>
-                    </a:p>
-                  </a:txBody>
-                  <a:tcPr>
-                    <a:solidFill>
-                      <a:srgbClr val="1A2F5E"/>
-                    </a:solidFill>
-                  </a:tcPr>
-                </a:tc>
-              </a:tr>
-              <a:tr h="670560">
-                <a:tc>
-                  <a:txBody>
-                    <a:bodyPr/>
-                    <a:lstStyle/>
-                    <a:p>
-                      <a:r>
-                        <a:rPr sz="1700">
-                          <a:solidFill>
-                            <a:srgbClr val="2C3E50"/>
-                          </a:solidFill>
-                        </a:rPr>
-                        <a:t>Initial steps toward
-automation</a:t>
-                      </a:r>
-                    </a:p>
-                  </a:txBody>
-                  <a:tcPr>
-                    <a:solidFill>
-                      <a:srgbClr val="ECF0F1"/>
-                    </a:solidFill>
-                  </a:tcPr>
-                </a:tc>
-                <a:tc>
-                  <a:txBody>
-                    <a:bodyPr/>
-                    <a:lstStyle/>
-                    <a:p>
-                      <a:r>
-                        <a:rPr sz="1700">
-                          <a:solidFill>
-                            <a:srgbClr val="2C3E50"/>
-                          </a:solidFill>
-                        </a:rPr>
-                        <a:t>Operating scientific instruments; automating data analysis pipelines</a:t>
-                      </a:r>
-                    </a:p>
-                  </a:txBody>
-                  <a:tcPr>
-                    <a:solidFill>
-                      <a:srgbClr val="ECF0F1"/>
-                    </a:solidFill>
-                  </a:tcPr>
-                </a:tc>
-                <a:tc>
-                  <a:txBody>
-                    <a:bodyPr/>
-                    <a:lstStyle/>
-                    <a:p>
-                      <a:r>
-                        <a:rPr sz="1700">
-                          <a:solidFill>
-                            <a:srgbClr val="2C3E50"/>
-                          </a:solidFill>
-                        </a:rPr>
-                        <a:t>Automating instrument safety checks</a:t>
-                      </a:r>
-                    </a:p>
-                  </a:txBody>
-                  <a:tcPr>
-                    <a:solidFill>
-                      <a:srgbClr val="ECF0F1"/>
-                    </a:solidFill>
-                  </a:tcPr>
-                </a:tc>
-              </a:tr>
-              <a:tr h="670560">
-                <a:tc>
-                  <a:txBody>
-                    <a:bodyPr/>
-                    <a:lstStyle/>
-                    <a:p>
-                      <a:r>
-                        <a:rPr sz="1700">
-                          <a:solidFill>
-                            <a:srgbClr val="2C3E50"/>
-                          </a:solidFill>
-                        </a:rPr>
-                        <a:t>Fully automated
-workflows</a:t>
-                      </a:r>
-                    </a:p>
-                  </a:txBody>
-                  <a:tcPr>
-                    <a:solidFill>
-                      <a:srgbClr val="FFFFFF"/>
-                    </a:solidFill>
-                  </a:tcPr>
-                </a:tc>
-                <a:tc>
-                  <a:txBody>
-                    <a:bodyPr/>
-                    <a:lstStyle/>
-                    <a:p>
-                      <a:r>
-                        <a:rPr sz="1700">
-                          <a:solidFill>
-                            <a:srgbClr val="2C3E50"/>
-                          </a:solidFill>
-                        </a:rPr>
-                        <a:t>"AI scientist": generate hypotheses → run simulations → revise → repeat</a:t>
-                      </a:r>
-                    </a:p>
-                  </a:txBody>
-                  <a:tcPr>
-                    <a:solidFill>
-                      <a:srgbClr val="FFFFFF"/>
-                    </a:solidFill>
-                  </a:tcPr>
-                </a:tc>
-                <a:tc>
-                  <a:txBody>
-                    <a:bodyPr/>
-                    <a:lstStyle/>
-                    <a:p>
-                      <a:r>
-                        <a:rPr sz="1700">
-                          <a:solidFill>
-                            <a:srgbClr val="2C3E50"/>
-                          </a:solidFill>
-                        </a:rPr>
-                        <a:t>Complex project management: Gantt charts, task prioritization, long-term planning</a:t>
-                      </a:r>
-                    </a:p>
-                  </a:txBody>
-                  <a:tcPr>
-                    <a:solidFill>
-                      <a:srgbClr val="FFFFFF"/>
-                    </a:solidFill>
-                  </a:tcPr>
-                </a:tc>
-              </a:tr>
-            </a:tbl>
-          </a:graphicData>
-        </a:graphic>
-      </p:graphicFrame>
-      <p:sp>
-        <p:nvSpPr>
-          <p:cNvPr id="6" name="TextBox 5"/>
-          <p:cNvSpPr txBox="1"/>
-          <p:nvPr/>
-        </p:nvSpPr>
-        <p:spPr>
-          <a:xfrm>
-            <a:off x="320040" y="3429000"/>
-            <a:ext cx="11521440" cy="365760"/>
-          </a:xfrm>
-          <a:prstGeom prst="rect">
-            <a:avLst/>
-          </a:prstGeom>
-          <a:noFill/>
-        </p:spPr>
-        <p:txBody>
-          <a:bodyPr wrap="square">
-            <a:spAutoFit/>
-          </a:bodyPr>
-          <a:lstStyle/>
-          <a:p>
-            <a:pPr algn="l"/>
-            <a:r>
-              <a:rPr sz="1800" b="1" i="0">
-                <a:solidFill>
-                  <a:srgbClr val="1A2F5E"/>
-                </a:solidFill>
-              </a:rPr>
-              <a:t>Key finding: Science and Operations diverge here — workflows are domain-specific and highly customized</a:t>
-            </a:r>
-          </a:p>
-        </p:txBody>
-      </p:sp>
-      <p:sp>
-        <p:nvSpPr>
-          <p:cNvPr id="7" name="Rectangle 6"/>
+              <a:t>5</a:t>
+            </a:r>
+          </a:p>
+        </p:txBody>
+      </p:sp>
+    </p:spTree>
+  </p:cSld>
+  <p:clrMapOvr>
+    <a:masterClrMapping/>
+  </p:clrMapOvr>
+</p:sld>
+</file>
+
+<file path=ppt/slides/slide6.xml><?xml version="1.0" encoding="utf-8"?>
+<p:sld xmlns:a="http://schemas.openxmlformats.org/drawingml/2006/main" xmlns:p="http://schemas.openxmlformats.org/presentationml/2006/main" xmlns:r="http://schemas.openxmlformats.org/officeDocument/2006/relationships">
+  <p:cSld>
+    <p:spTree>
+      <p:nvGrpSpPr>
+        <p:cNvPr id="1" name=""/>
+        <p:cNvGrpSpPr/>
+        <p:nvPr/>
+      </p:nvGrpSpPr>
+      <p:grpSpPr/>
+      <p:sp>
+        <p:nvSpPr>
+          <p:cNvPr id="2" name="Rectangle 1"/>
           <p:cNvSpPr/>
           <p:nvPr/>
         </p:nvSpPr>
         <p:spPr>
           <a:xfrm>
-            <a:off x="320040" y="3886200"/>
-            <a:ext cx="11521440" cy="822960"/>
+            <a:off x="0" y="0"/>
+            <a:ext cx="12188952" cy="1097280"/>
           </a:xfrm>
           <a:prstGeom prst="rect">
             <a:avLst/>
           </a:prstGeom>
           <a:solidFill>
-            <a:srgbClr val="ECF0F1"/>
+            <a:srgbClr val="1A2F5E"/>
           </a:solidFill>
           <a:ln>
             <a:noFill/>
@@ -9199,14 +7185,14 @@
       </p:sp>
       <p:sp>
         <p:nvSpPr>
-          <p:cNvPr id="8" name="TextBox 7"/>
+          <p:cNvPr id="3" name="TextBox 2"/>
           <p:cNvSpPr txBox="1"/>
           <p:nvPr/>
         </p:nvSpPr>
         <p:spPr>
           <a:xfrm>
-            <a:off x="457200" y="3931920"/>
-            <a:ext cx="11247120" cy="731520"/>
+            <a:off x="365760" y="91440"/>
+            <a:ext cx="11430000" cy="640080"/>
           </a:xfrm>
           <a:prstGeom prst="rect">
             <a:avLst/>
@@ -9221,141 +7207,12 @@
           <a:p>
             <a:pPr algn="l"/>
             <a:r>
-              <a:rPr sz="1700" b="0" i="1">
-                <a:solidFill>
-                  <a:srgbClr val="2C3E50"/>
+              <a:rPr sz="2800" b="1" i="0">
+                <a:solidFill>
+                  <a:srgbClr val="FFFFFF"/>
                 </a:solidFill>
               </a:rPr>
-              <a:t>"I would never have been able to write the code without significant time investment, and the fact that I could produce a working app in a couple of days was impressive to me."  — P1, Operations (no formal SE training)</a:t>
-            </a:r>
-          </a:p>
-        </p:txBody>
-      </p:sp>
-      <p:sp>
-        <p:nvSpPr>
-          <p:cNvPr id="9" name="TextBox 8"/>
-          <p:cNvSpPr txBox="1"/>
-          <p:nvPr/>
-        </p:nvSpPr>
-        <p:spPr>
-          <a:xfrm>
-            <a:off x="11704320" y="6492240"/>
-            <a:ext cx="365760" cy="274320"/>
-          </a:xfrm>
-          <a:prstGeom prst="rect">
-            <a:avLst/>
-          </a:prstGeom>
-          <a:noFill/>
-        </p:spPr>
-        <p:txBody>
-          <a:bodyPr wrap="square">
-            <a:spAutoFit/>
-          </a:bodyPr>
-          <a:lstStyle/>
-          <a:p>
-            <a:pPr algn="r"/>
-            <a:r>
-              <a:rPr sz="1200" b="0" i="0">
-                <a:solidFill>
-                  <a:srgbClr val="7F8C8D"/>
-                </a:solidFill>
-              </a:rPr>
-              <a:t>8</a:t>
-            </a:r>
-          </a:p>
-        </p:txBody>
-      </p:sp>
-    </p:spTree>
-  </p:cSld>
-  <p:clrMapOvr>
-    <a:masterClrMapping/>
-  </p:clrMapOvr>
-</p:sld>
-</file>
-
-<file path=ppt/slides/slide9.xml><?xml version="1.0" encoding="utf-8"?>
-<p:sld xmlns:a="http://schemas.openxmlformats.org/drawingml/2006/main" xmlns:p="http://schemas.openxmlformats.org/presentationml/2006/main" xmlns:r="http://schemas.openxmlformats.org/officeDocument/2006/relationships">
-  <p:cSld>
-    <p:spTree>
-      <p:nvGrpSpPr>
-        <p:cNvPr id="1" name=""/>
-        <p:cNvGrpSpPr/>
-        <p:nvPr/>
-      </p:nvGrpSpPr>
-      <p:grpSpPr/>
-      <p:sp>
-        <p:nvSpPr>
-          <p:cNvPr id="2" name="Rectangle 1"/>
-          <p:cNvSpPr/>
-          <p:nvPr/>
-        </p:nvSpPr>
-        <p:spPr>
-          <a:xfrm>
-            <a:off x="0" y="0"/>
-            <a:ext cx="12188952" cy="1143000"/>
-          </a:xfrm>
-          <a:prstGeom prst="rect">
-            <a:avLst/>
-          </a:prstGeom>
-          <a:solidFill>
-            <a:srgbClr val="1A2F5E"/>
-          </a:solidFill>
-          <a:ln>
-            <a:noFill/>
-          </a:ln>
-        </p:spPr>
-        <p:style>
-          <a:lnRef idx="1">
-            <a:schemeClr val="accent1"/>
-          </a:lnRef>
-          <a:fillRef idx="3">
-            <a:schemeClr val="accent1"/>
-          </a:fillRef>
-          <a:effectRef idx="2">
-            <a:schemeClr val="accent1"/>
-          </a:effectRef>
-          <a:fontRef idx="minor">
-            <a:schemeClr val="lt1"/>
-          </a:fontRef>
-        </p:style>
-        <p:txBody>
-          <a:bodyPr rtlCol="0" anchor="ctr"/>
-          <a:lstStyle/>
-          <a:p>
-            <a:pPr algn="ctr"/>
-          </a:p>
-        </p:txBody>
-      </p:sp>
-      <p:sp>
-        <p:nvSpPr>
-          <p:cNvPr id="3" name="TextBox 2"/>
-          <p:cNvSpPr txBox="1"/>
-          <p:nvPr/>
-        </p:nvSpPr>
-        <p:spPr>
-          <a:xfrm>
-            <a:off x="320040" y="137160"/>
-            <a:ext cx="11430000" cy="685800"/>
-          </a:xfrm>
-          <a:prstGeom prst="rect">
-            <a:avLst/>
-          </a:prstGeom>
-          <a:noFill/>
-        </p:spPr>
-        <p:txBody>
-          <a:bodyPr wrap="square">
-            <a:spAutoFit/>
-          </a:bodyPr>
-          <a:lstStyle/>
-          <a:p>
-            <a:pPr algn="l"/>
-            <a:r>
-              <a:rPr sz="2800" b="1" i="0">
-                <a:solidFill>
-                  <a:srgbClr val="FFFFFF"/>
-                </a:solidFill>
-              </a:rPr>
-              <a:t>Finding 3: Risks and Concerns</a:t>
+              <a:t>Risks and Concerns</a:t>
             </a:r>
           </a:p>
         </p:txBody>
@@ -9369,8 +7226,8 @@
           <p:nvPr/>
         </p:nvGraphicFramePr>
         <p:xfrm>
-          <a:off x="320040" y="1280160"/>
-          <a:ext cx="11521440" cy="2743200"/>
+          <a:off x="365760" y="1234440"/>
+          <a:ext cx="11430000" cy="3063240"/>
         </p:xfrm>
         <a:graphic>
           <a:graphicData uri="http://schemas.openxmlformats.org/drawingml/2006/table">
@@ -9379,11 +7236,11 @@
                 <a:tableStyleId>{5C22544A-7EE6-4342-B048-85BDC9FD1C3A}</a:tableStyleId>
               </a:tblPr>
               <a:tblGrid>
-                <a:gridCol w="3840480"/>
-                <a:gridCol w="3840480"/>
-                <a:gridCol w="3840480"/>
+                <a:gridCol w="3810000"/>
+                <a:gridCol w="3810000"/>
+                <a:gridCol w="3810000"/>
               </a:tblGrid>
-              <a:tr h="457200">
+              <a:tr h="510540">
                 <a:tc>
                   <a:txBody>
                     <a:bodyPr/>
@@ -9440,7 +7297,7 @@
                             <a:srgbClr val="FFFFFF"/>
                           </a:solidFill>
                         </a:rPr>
-                        <a:t>What It Means</a:t>
+                        <a:t>What It Means in Practice</a:t>
                       </a:r>
                     </a:p>
                   </a:txBody>
@@ -9451,7 +7308,7 @@
                   </a:tcPr>
                 </a:tc>
               </a:tr>
-              <a:tr h="457200">
+              <a:tr h="510540">
                 <a:tc>
                   <a:txBody>
                     <a:bodyPr/>
@@ -9505,7 +7362,7 @@
                             <a:srgbClr val="2C3E50"/>
                           </a:solidFill>
                         </a:rPr>
-                        <a:t>LLMs not trustworthy for technical/scientific facts; no citations</a:t>
+                        <a:t>LLMs give confident wrong answers; scientists need citable, verifiable sources</a:t>
                       </a:r>
                     </a:p>
                   </a:txBody>
@@ -9516,7 +7373,7 @@
                   </a:tcPr>
                 </a:tc>
               </a:tr>
-              <a:tr h="457200">
+              <a:tr h="510540">
                 <a:tc>
                   <a:txBody>
                     <a:bodyPr/>
@@ -9570,7 +7427,7 @@
                             <a:srgbClr val="2C3E50"/>
                           </a:solidFill>
                         </a:rPr>
-                        <a:t>Unpublished research, classified data, PII cannot go into commercial LLMs</a:t>
+                        <a:t>Classified data, PII, and pre-publication research cannot go into commercial LLMs</a:t>
                       </a:r>
                     </a:p>
                   </a:txBody>
@@ -9581,7 +7438,7 @@
                   </a:tcPr>
                 </a:tc>
               </a:tr>
-              <a:tr h="457200">
+              <a:tr h="510540">
                 <a:tc>
                   <a:txBody>
                     <a:bodyPr/>
@@ -9635,7 +7492,7 @@
                             <a:srgbClr val="2C3E50"/>
                           </a:solidFill>
                         </a:rPr>
-                        <a:t>Others may trust outputs without checking</a:t>
+                        <a:t>Users — especially non-experts — may accept outputs without checking</a:t>
                       </a:r>
                     </a:p>
                   </a:txBody>
@@ -9646,7 +7503,7 @@
                   </a:tcPr>
                 </a:tc>
               </a:tr>
-              <a:tr h="457200">
+              <a:tr h="510540">
                 <a:tc>
                   <a:txBody>
                     <a:bodyPr/>
@@ -9700,7 +7557,7 @@
                             <a:srgbClr val="2C3E50"/>
                           </a:solidFill>
                         </a:rPr>
-                        <a:t>Unclear where to draw the line on AI-assisted writing; accountability gaps</a:t>
+                        <a:t>Unclear where to draw the line on AI-assisted writing; who is accountable for errors?</a:t>
                       </a:r>
                     </a:p>
                   </a:txBody>
@@ -9711,7 +7568,7 @@
                   </a:tcPr>
                 </a:tc>
               </a:tr>
-              <a:tr h="457200">
+              <a:tr h="510540">
                 <a:tc>
                   <a:txBody>
                     <a:bodyPr/>
@@ -9744,7 +7601,8 @@
                             <a:srgbClr val="2C3E50"/>
                           </a:solidFill>
                         </a:rPr>
-                        <a:t>5% (survey)*</a:t>
+                        <a:t>5% survey
+(higher in interviews)</a:t>
                       </a:r>
                     </a:p>
                   </a:txBody>
@@ -9765,7 +7623,7 @@
                             <a:srgbClr val="2C3E50"/>
                           </a:solidFill>
                         </a:rPr>
-                        <a:t>Concern focused on less-technical roles (Communications, IT)</a:t>
+                        <a:t>Concern concentrated on less-technical roles: Communications, IT</a:t>
                       </a:r>
                     </a:p>
                   </a:txBody>
@@ -9788,8 +7646,8 @@
         </p:nvSpPr>
         <p:spPr>
           <a:xfrm>
-            <a:off x="320040" y="4160520"/>
-            <a:ext cx="11521440" cy="502920"/>
+            <a:off x="365760" y="4434840"/>
+            <a:ext cx="11430000" cy="548640"/>
           </a:xfrm>
           <a:prstGeom prst="rect">
             <a:avLst/>
@@ -9831,8 +7689,8 @@
         </p:nvSpPr>
         <p:spPr>
           <a:xfrm>
-            <a:off x="457200" y="4206240"/>
-            <a:ext cx="11247120" cy="411480"/>
+            <a:off x="502920" y="4480560"/>
+            <a:ext cx="11155680" cy="457200"/>
           </a:xfrm>
           <a:prstGeom prst="rect">
             <a:avLst/>
@@ -9852,7 +7710,7 @@
                   <a:srgbClr val="1E8B4C"/>
                 </a:solidFill>
               </a:rPr>
-              <a:t>✓  Also important: 33% had NO ethics concerns at work — presenting only the concerns would misrepresent the data</a:t>
+              <a:t>✓  Also important: 33% reported NO ethics concerns at work — showing only the concerns would misrepresent the distribution of opinion.</a:t>
             </a:r>
           </a:p>
         </p:txBody>
@@ -9865,8 +7723,8 @@
         </p:nvSpPr>
         <p:spPr>
           <a:xfrm>
-            <a:off x="320040" y="4754880"/>
-            <a:ext cx="11521440" cy="274320"/>
+            <a:off x="365760" y="5120640"/>
+            <a:ext cx="11430000" cy="457200"/>
           </a:xfrm>
           <a:prstGeom prst="rect">
             <a:avLst/>
@@ -9881,12 +7739,12 @@
           <a:p>
             <a:pPr algn="l"/>
             <a:r>
-              <a:rPr sz="1400" b="0" i="1">
+              <a:rPr sz="1500" b="0" i="1">
                 <a:solidFill>
                   <a:srgbClr val="7F8C8D"/>
                 </a:solidFill>
               </a:rPr>
-              <a:t>* Higher prominence in interviews than survey suggests question wording matters</a:t>
+              <a:t>Presenter's note: The privacy/security concern is likely amplified by Argonne's classified-data environment — it may not transfer equally to other science settings.</a:t>
             </a:r>
           </a:p>
         </p:txBody>
@@ -9899,7 +7757,7 @@
         </p:nvSpPr>
         <p:spPr>
           <a:xfrm>
-            <a:off x="11704320" y="6492240"/>
+            <a:off x="11704320" y="6537960"/>
             <a:ext cx="365760" cy="274320"/>
           </a:xfrm>
           <a:prstGeom prst="rect">
@@ -9920,7 +7778,857 @@
                   <a:srgbClr val="7F8C8D"/>
                 </a:solidFill>
               </a:rPr>
-              <a:t>9</a:t>
+              <a:t>6</a:t>
+            </a:r>
+          </a:p>
+        </p:txBody>
+      </p:sp>
+    </p:spTree>
+  </p:cSld>
+  <p:clrMapOvr>
+    <a:masterClrMapping/>
+  </p:clrMapOvr>
+</p:sld>
+</file>
+
+<file path=ppt/slides/slide7.xml><?xml version="1.0" encoding="utf-8"?>
+<p:sld xmlns:a="http://schemas.openxmlformats.org/drawingml/2006/main" xmlns:p="http://schemas.openxmlformats.org/presentationml/2006/main" xmlns:r="http://schemas.openxmlformats.org/officeDocument/2006/relationships">
+  <p:cSld>
+    <p:spTree>
+      <p:nvGrpSpPr>
+        <p:cNvPr id="1" name=""/>
+        <p:cNvGrpSpPr/>
+        <p:nvPr/>
+      </p:nvGrpSpPr>
+      <p:grpSpPr/>
+      <p:sp>
+        <p:nvSpPr>
+          <p:cNvPr id="2" name="Rectangle 1"/>
+          <p:cNvSpPr/>
+          <p:nvPr/>
+        </p:nvSpPr>
+        <p:spPr>
+          <a:xfrm>
+            <a:off x="0" y="0"/>
+            <a:ext cx="12188952" cy="1097280"/>
+          </a:xfrm>
+          <a:prstGeom prst="rect">
+            <a:avLst/>
+          </a:prstGeom>
+          <a:solidFill>
+            <a:srgbClr val="1A2F5E"/>
+          </a:solidFill>
+          <a:ln>
+            <a:noFill/>
+          </a:ln>
+        </p:spPr>
+        <p:style>
+          <a:lnRef idx="1">
+            <a:schemeClr val="accent1"/>
+          </a:lnRef>
+          <a:fillRef idx="3">
+            <a:schemeClr val="accent1"/>
+          </a:fillRef>
+          <a:effectRef idx="2">
+            <a:schemeClr val="accent1"/>
+          </a:effectRef>
+          <a:fontRef idx="minor">
+            <a:schemeClr val="lt1"/>
+          </a:fontRef>
+        </p:style>
+        <p:txBody>
+          <a:bodyPr rtlCol="0" anchor="ctr"/>
+          <a:lstStyle/>
+          <a:p>
+            <a:pPr algn="ctr"/>
+          </a:p>
+        </p:txBody>
+      </p:sp>
+      <p:sp>
+        <p:nvSpPr>
+          <p:cNvPr id="3" name="TextBox 2"/>
+          <p:cNvSpPr txBox="1"/>
+          <p:nvPr/>
+        </p:nvSpPr>
+        <p:spPr>
+          <a:xfrm>
+            <a:off x="365760" y="91440"/>
+            <a:ext cx="11430000" cy="640080"/>
+          </a:xfrm>
+          <a:prstGeom prst="rect">
+            <a:avLst/>
+          </a:prstGeom>
+          <a:noFill/>
+        </p:spPr>
+        <p:txBody>
+          <a:bodyPr wrap="square">
+            <a:spAutoFit/>
+          </a:bodyPr>
+          <a:lstStyle/>
+          <a:p>
+            <a:pPr algn="l"/>
+            <a:r>
+              <a:rPr sz="2800" b="1" i="0">
+                <a:solidFill>
+                  <a:srgbClr val="FFFFFF"/>
+                </a:solidFill>
+              </a:rPr>
+              <a:t>Limitations of the Study</a:t>
+            </a:r>
+          </a:p>
+        </p:txBody>
+      </p:sp>
+      <p:sp>
+        <p:nvSpPr>
+          <p:cNvPr id="4" name="TextBox 3"/>
+          <p:cNvSpPr txBox="1"/>
+          <p:nvPr/>
+        </p:nvSpPr>
+        <p:spPr>
+          <a:xfrm>
+            <a:off x="365760" y="713232"/>
+            <a:ext cx="11430000" cy="347472"/>
+          </a:xfrm>
+          <a:prstGeom prst="rect">
+            <a:avLst/>
+          </a:prstGeom>
+          <a:noFill/>
+        </p:spPr>
+        <p:txBody>
+          <a:bodyPr wrap="square">
+            <a:spAutoFit/>
+          </a:bodyPr>
+          <a:lstStyle/>
+          <a:p>
+            <a:pPr algn="l"/>
+            <a:r>
+              <a:rPr sz="1500" b="0" i="1">
+                <a:solidFill>
+                  <a:srgbClr val="ECF0F1"/>
+                </a:solidFill>
+              </a:rPr>
+              <a:t>Presenter's critical perspective</a:t>
+            </a:r>
+          </a:p>
+        </p:txBody>
+      </p:sp>
+      <p:sp>
+        <p:nvSpPr>
+          <p:cNvPr id="5" name="Rectangle 4"/>
+          <p:cNvSpPr/>
+          <p:nvPr/>
+        </p:nvSpPr>
+        <p:spPr>
+          <a:xfrm>
+            <a:off x="365760" y="1234440"/>
+            <a:ext cx="11430000" cy="1508760"/>
+          </a:xfrm>
+          <a:prstGeom prst="rect">
+            <a:avLst/>
+          </a:prstGeom>
+          <a:solidFill>
+            <a:srgbClr val="ECF0F1"/>
+          </a:solidFill>
+          <a:ln>
+            <a:noFill/>
+          </a:ln>
+        </p:spPr>
+        <p:style>
+          <a:lnRef idx="1">
+            <a:schemeClr val="accent1"/>
+          </a:lnRef>
+          <a:fillRef idx="3">
+            <a:schemeClr val="accent1"/>
+          </a:fillRef>
+          <a:effectRef idx="2">
+            <a:schemeClr val="accent1"/>
+          </a:effectRef>
+          <a:fontRef idx="minor">
+            <a:schemeClr val="lt1"/>
+          </a:fontRef>
+        </p:style>
+        <p:txBody>
+          <a:bodyPr rtlCol="0" anchor="ctr"/>
+          <a:lstStyle/>
+          <a:p>
+            <a:pPr algn="ctr"/>
+          </a:p>
+        </p:txBody>
+      </p:sp>
+      <p:sp>
+        <p:nvSpPr>
+          <p:cNvPr id="6" name="TextBox 5"/>
+          <p:cNvSpPr txBox="1"/>
+          <p:nvPr/>
+        </p:nvSpPr>
+        <p:spPr>
+          <a:xfrm>
+            <a:off x="502920" y="1325880"/>
+            <a:ext cx="11155680" cy="365760"/>
+          </a:xfrm>
+          <a:prstGeom prst="rect">
+            <a:avLst/>
+          </a:prstGeom>
+          <a:noFill/>
+        </p:spPr>
+        <p:txBody>
+          <a:bodyPr wrap="square">
+            <a:spAutoFit/>
+          </a:bodyPr>
+          <a:lstStyle/>
+          <a:p>
+            <a:pPr algn="l"/>
+            <a:r>
+              <a:rPr sz="1900" b="1" i="0">
+                <a:solidFill>
+                  <a:srgbClr val="1A2F5E"/>
+                </a:solidFill>
+              </a:rPr>
+              <a:t>Only one lab</a:t>
+            </a:r>
+          </a:p>
+        </p:txBody>
+      </p:sp>
+      <p:sp>
+        <p:nvSpPr>
+          <p:cNvPr id="7" name="TextBox 6"/>
+          <p:cNvSpPr txBox="1"/>
+          <p:nvPr/>
+        </p:nvSpPr>
+        <p:spPr>
+          <a:xfrm>
+            <a:off x="502920" y="1691640"/>
+            <a:ext cx="11155680" cy="1005840"/>
+          </a:xfrm>
+          <a:prstGeom prst="rect">
+            <a:avLst/>
+          </a:prstGeom>
+          <a:noFill/>
+        </p:spPr>
+        <p:txBody>
+          <a:bodyPr wrap="square">
+            <a:spAutoFit/>
+          </a:bodyPr>
+          <a:lstStyle/>
+          <a:p>
+            <a:pPr algn="l"/>
+            <a:r>
+              <a:rPr sz="1700" b="0" i="0">
+                <a:solidFill>
+                  <a:srgbClr val="2C3E50"/>
+                </a:solidFill>
+              </a:rPr>
+              <a:t>Argonne is atypical: classified data, federal employment law, national-security mission. Concerns about privacy and security are likely higher here than at a university lab or private biotech. The findings may not generalize beyond similarly security-sensitive orgs.</a:t>
+            </a:r>
+          </a:p>
+        </p:txBody>
+      </p:sp>
+      <p:sp>
+        <p:nvSpPr>
+          <p:cNvPr id="8" name="Rectangle 7"/>
+          <p:cNvSpPr/>
+          <p:nvPr/>
+        </p:nvSpPr>
+        <p:spPr>
+          <a:xfrm>
+            <a:off x="365760" y="2880360"/>
+            <a:ext cx="11430000" cy="1508760"/>
+          </a:xfrm>
+          <a:prstGeom prst="rect">
+            <a:avLst/>
+          </a:prstGeom>
+          <a:solidFill>
+            <a:srgbClr val="ECF0F1"/>
+          </a:solidFill>
+          <a:ln>
+            <a:noFill/>
+          </a:ln>
+        </p:spPr>
+        <p:style>
+          <a:lnRef idx="1">
+            <a:schemeClr val="accent1"/>
+          </a:lnRef>
+          <a:fillRef idx="3">
+            <a:schemeClr val="accent1"/>
+          </a:fillRef>
+          <a:effectRef idx="2">
+            <a:schemeClr val="accent1"/>
+          </a:effectRef>
+          <a:fontRef idx="minor">
+            <a:schemeClr val="lt1"/>
+          </a:fontRef>
+        </p:style>
+        <p:txBody>
+          <a:bodyPr rtlCol="0" anchor="ctr"/>
+          <a:lstStyle/>
+          <a:p>
+            <a:pPr algn="ctr"/>
+          </a:p>
+        </p:txBody>
+      </p:sp>
+      <p:sp>
+        <p:nvSpPr>
+          <p:cNvPr id="9" name="TextBox 8"/>
+          <p:cNvSpPr txBox="1"/>
+          <p:nvPr/>
+        </p:nvSpPr>
+        <p:spPr>
+          <a:xfrm>
+            <a:off x="502920" y="2971800"/>
+            <a:ext cx="11155680" cy="365760"/>
+          </a:xfrm>
+          <a:prstGeom prst="rect">
+            <a:avLst/>
+          </a:prstGeom>
+          <a:noFill/>
+        </p:spPr>
+        <p:txBody>
+          <a:bodyPr wrap="square">
+            <a:spAutoFit/>
+          </a:bodyPr>
+          <a:lstStyle/>
+          <a:p>
+            <a:pPr algn="l"/>
+            <a:r>
+              <a:rPr sz="1900" b="1" i="0">
+                <a:solidFill>
+                  <a:srgbClr val="8E44AD"/>
+                </a:solidFill>
+              </a:rPr>
+              <a:t>No new users studied</a:t>
+            </a:r>
+          </a:p>
+        </p:txBody>
+      </p:sp>
+      <p:sp>
+        <p:nvSpPr>
+          <p:cNvPr id="10" name="TextBox 9"/>
+          <p:cNvSpPr txBox="1"/>
+          <p:nvPr/>
+        </p:nvSpPr>
+        <p:spPr>
+          <a:xfrm>
+            <a:off x="502920" y="3337560"/>
+            <a:ext cx="11155680" cy="1005840"/>
+          </a:xfrm>
+          <a:prstGeom prst="rect">
+            <a:avLst/>
+          </a:prstGeom>
+          <a:noFill/>
+        </p:spPr>
+        <p:txBody>
+          <a:bodyPr wrap="square">
+            <a:spAutoFit/>
+          </a:bodyPr>
+          <a:lstStyle/>
+          <a:p>
+            <a:pPr algn="l"/>
+            <a:r>
+              <a:rPr sz="1700" b="0" i="0">
+                <a:solidFill>
+                  <a:srgbClr val="2C3E50"/>
+                </a:solidFill>
+              </a:rPr>
+              <a:t>70%+ of employees never used Argo in a given month — yet they are invisible in this dataset. Interviews and surveys only captured enthusiastic early adopters. The barriers for non-adopters (awareness? skepticism? workflow friction?) are entirely unknown.</a:t>
+            </a:r>
+          </a:p>
+        </p:txBody>
+      </p:sp>
+      <p:sp>
+        <p:nvSpPr>
+          <p:cNvPr id="11" name="Rectangle 10"/>
+          <p:cNvSpPr/>
+          <p:nvPr/>
+        </p:nvSpPr>
+        <p:spPr>
+          <a:xfrm>
+            <a:off x="365760" y="4526280"/>
+            <a:ext cx="11430000" cy="1508760"/>
+          </a:xfrm>
+          <a:prstGeom prst="rect">
+            <a:avLst/>
+          </a:prstGeom>
+          <a:solidFill>
+            <a:srgbClr val="ECF0F1"/>
+          </a:solidFill>
+          <a:ln>
+            <a:noFill/>
+          </a:ln>
+        </p:spPr>
+        <p:style>
+          <a:lnRef idx="1">
+            <a:schemeClr val="accent1"/>
+          </a:lnRef>
+          <a:fillRef idx="3">
+            <a:schemeClr val="accent1"/>
+          </a:fillRef>
+          <a:effectRef idx="2">
+            <a:schemeClr val="accent1"/>
+          </a:effectRef>
+          <a:fontRef idx="minor">
+            <a:schemeClr val="lt1"/>
+          </a:fontRef>
+        </p:style>
+        <p:txBody>
+          <a:bodyPr rtlCol="0" anchor="ctr"/>
+          <a:lstStyle/>
+          <a:p>
+            <a:pPr algn="ctr"/>
+          </a:p>
+        </p:txBody>
+      </p:sp>
+      <p:sp>
+        <p:nvSpPr>
+          <p:cNvPr id="12" name="TextBox 11"/>
+          <p:cNvSpPr txBox="1"/>
+          <p:nvPr/>
+        </p:nvSpPr>
+        <p:spPr>
+          <a:xfrm>
+            <a:off x="502920" y="4617720"/>
+            <a:ext cx="11155680" cy="365760"/>
+          </a:xfrm>
+          <a:prstGeom prst="rect">
+            <a:avLst/>
+          </a:prstGeom>
+          <a:noFill/>
+        </p:spPr>
+        <p:txBody>
+          <a:bodyPr wrap="square">
+            <a:spAutoFit/>
+          </a:bodyPr>
+          <a:lstStyle/>
+          <a:p>
+            <a:pPr algn="l"/>
+            <a:r>
+              <a:rPr sz="1900" b="1" i="0">
+                <a:solidFill>
+                  <a:srgbClr val="D35400"/>
+                </a:solidFill>
+              </a:rPr>
+              <a:t>All participants had prior LLM experience</a:t>
+            </a:r>
+          </a:p>
+        </p:txBody>
+      </p:sp>
+      <p:sp>
+        <p:nvSpPr>
+          <p:cNvPr id="13" name="TextBox 12"/>
+          <p:cNvSpPr txBox="1"/>
+          <p:nvPr/>
+        </p:nvSpPr>
+        <p:spPr>
+          <a:xfrm>
+            <a:off x="502920" y="4983480"/>
+            <a:ext cx="11155680" cy="1005840"/>
+          </a:xfrm>
+          <a:prstGeom prst="rect">
+            <a:avLst/>
+          </a:prstGeom>
+          <a:noFill/>
+        </p:spPr>
+        <p:txBody>
+          <a:bodyPr wrap="square">
+            <a:spAutoFit/>
+          </a:bodyPr>
+          <a:lstStyle/>
+          <a:p>
+            <a:pPr algn="l"/>
+            <a:r>
+              <a:rPr sz="1700" b="0" i="0">
+                <a:solidFill>
+                  <a:srgbClr val="2C3E50"/>
+                </a:solidFill>
+              </a:rPr>
+              <a:t>94% were already familiar with GenAI; 82% had used ChatGPT. This is not a sample of the average knowledge worker — it is a self-selected group already sold on the technology. Stated concerns may therefore be underestimates of what a broader rollout would surface.</a:t>
+            </a:r>
+          </a:p>
+        </p:txBody>
+      </p:sp>
+      <p:sp>
+        <p:nvSpPr>
+          <p:cNvPr id="14" name="TextBox 13"/>
+          <p:cNvSpPr txBox="1"/>
+          <p:nvPr/>
+        </p:nvSpPr>
+        <p:spPr>
+          <a:xfrm>
+            <a:off x="11704320" y="6537960"/>
+            <a:ext cx="365760" cy="274320"/>
+          </a:xfrm>
+          <a:prstGeom prst="rect">
+            <a:avLst/>
+          </a:prstGeom>
+          <a:noFill/>
+        </p:spPr>
+        <p:txBody>
+          <a:bodyPr wrap="square">
+            <a:spAutoFit/>
+          </a:bodyPr>
+          <a:lstStyle/>
+          <a:p>
+            <a:pPr algn="r"/>
+            <a:r>
+              <a:rPr sz="1200" b="0" i="0">
+                <a:solidFill>
+                  <a:srgbClr val="7F8C8D"/>
+                </a:solidFill>
+              </a:rPr>
+              <a:t>7</a:t>
+            </a:r>
+          </a:p>
+        </p:txBody>
+      </p:sp>
+    </p:spTree>
+  </p:cSld>
+  <p:clrMapOvr>
+    <a:masterClrMapping/>
+  </p:clrMapOvr>
+</p:sld>
+</file>
+
+<file path=ppt/slides/slide8.xml><?xml version="1.0" encoding="utf-8"?>
+<p:sld xmlns:a="http://schemas.openxmlformats.org/drawingml/2006/main" xmlns:p="http://schemas.openxmlformats.org/presentationml/2006/main" xmlns:r="http://schemas.openxmlformats.org/officeDocument/2006/relationships">
+  <p:cSld>
+    <p:spTree>
+      <p:nvGrpSpPr>
+        <p:cNvPr id="1" name=""/>
+        <p:cNvGrpSpPr/>
+        <p:nvPr/>
+      </p:nvGrpSpPr>
+      <p:grpSpPr/>
+      <p:sp>
+        <p:nvSpPr>
+          <p:cNvPr id="2" name="Rectangle 1"/>
+          <p:cNvSpPr/>
+          <p:nvPr/>
+        </p:nvSpPr>
+        <p:spPr>
+          <a:xfrm>
+            <a:off x="0" y="0"/>
+            <a:ext cx="12188952" cy="6858000"/>
+          </a:xfrm>
+          <a:prstGeom prst="rect">
+            <a:avLst/>
+          </a:prstGeom>
+          <a:solidFill>
+            <a:srgbClr val="1A2F5E"/>
+          </a:solidFill>
+          <a:ln>
+            <a:noFill/>
+          </a:ln>
+        </p:spPr>
+        <p:style>
+          <a:lnRef idx="1">
+            <a:schemeClr val="accent1"/>
+          </a:lnRef>
+          <a:fillRef idx="3">
+            <a:schemeClr val="accent1"/>
+          </a:fillRef>
+          <a:effectRef idx="2">
+            <a:schemeClr val="accent1"/>
+          </a:effectRef>
+          <a:fontRef idx="minor">
+            <a:schemeClr val="lt1"/>
+          </a:fontRef>
+        </p:style>
+        <p:txBody>
+          <a:bodyPr rtlCol="0" anchor="ctr"/>
+          <a:lstStyle/>
+          <a:p>
+            <a:pPr algn="ctr"/>
+          </a:p>
+        </p:txBody>
+      </p:sp>
+      <p:sp>
+        <p:nvSpPr>
+          <p:cNvPr id="3" name="TextBox 2"/>
+          <p:cNvSpPr txBox="1"/>
+          <p:nvPr/>
+        </p:nvSpPr>
+        <p:spPr>
+          <a:xfrm>
+            <a:off x="457200" y="320040"/>
+            <a:ext cx="11247120" cy="685800"/>
+          </a:xfrm>
+          <a:prstGeom prst="rect">
+            <a:avLst/>
+          </a:prstGeom>
+          <a:noFill/>
+        </p:spPr>
+        <p:txBody>
+          <a:bodyPr wrap="square">
+            <a:spAutoFit/>
+          </a:bodyPr>
+          <a:lstStyle/>
+          <a:p>
+            <a:pPr algn="l"/>
+            <a:r>
+              <a:rPr sz="3600" b="1" i="0">
+                <a:solidFill>
+                  <a:srgbClr val="FFFFFF"/>
+                </a:solidFill>
+              </a:rPr>
+              <a:t>Let's Talk About It</a:t>
+            </a:r>
+          </a:p>
+        </p:txBody>
+      </p:sp>
+      <p:sp>
+        <p:nvSpPr>
+          <p:cNvPr id="4" name="Rectangle 3"/>
+          <p:cNvSpPr/>
+          <p:nvPr/>
+        </p:nvSpPr>
+        <p:spPr>
+          <a:xfrm>
+            <a:off x="365760" y="1143000"/>
+            <a:ext cx="11430000" cy="2606040"/>
+          </a:xfrm>
+          <a:prstGeom prst="rect">
+            <a:avLst/>
+          </a:prstGeom>
+          <a:solidFill>
+            <a:srgbClr val="FFFFFF"/>
+          </a:solidFill>
+          <a:ln>
+            <a:noFill/>
+          </a:ln>
+        </p:spPr>
+        <p:style>
+          <a:lnRef idx="1">
+            <a:schemeClr val="accent1"/>
+          </a:lnRef>
+          <a:fillRef idx="3">
+            <a:schemeClr val="accent1"/>
+          </a:fillRef>
+          <a:effectRef idx="2">
+            <a:schemeClr val="accent1"/>
+          </a:effectRef>
+          <a:fontRef idx="minor">
+            <a:schemeClr val="lt1"/>
+          </a:fontRef>
+        </p:style>
+        <p:txBody>
+          <a:bodyPr rtlCol="0" anchor="ctr"/>
+          <a:lstStyle/>
+          <a:p>
+            <a:pPr algn="ctr"/>
+          </a:p>
+        </p:txBody>
+      </p:sp>
+      <p:sp>
+        <p:nvSpPr>
+          <p:cNvPr id="5" name="TextBox 4"/>
+          <p:cNvSpPr txBox="1"/>
+          <p:nvPr/>
+        </p:nvSpPr>
+        <p:spPr>
+          <a:xfrm>
+            <a:off x="594360" y="1280160"/>
+            <a:ext cx="10972800" cy="2331720"/>
+          </a:xfrm>
+          <a:prstGeom prst="rect">
+            <a:avLst/>
+          </a:prstGeom>
+          <a:noFill/>
+        </p:spPr>
+        <p:txBody>
+          <a:bodyPr wrap="square">
+            <a:spAutoFit/>
+          </a:bodyPr>
+          <a:lstStyle/>
+          <a:p>
+            <a:pPr algn="l"/>
+            <a:r>
+              <a:rPr sz="2300" b="0" i="0">
+                <a:solidFill>
+                  <a:srgbClr val="1A2F5E"/>
+                </a:solidFill>
+              </a:rPr>
+              <a:t>If your department deployed its own private GenAI tool tomorrow —
+same interface as ChatGPT, but your data never leaves the organization —
+what's the first task you'd hand off to it,
+and what's one thing you'd never let it touch?</a:t>
+            </a:r>
+          </a:p>
+        </p:txBody>
+      </p:sp>
+      <p:sp>
+        <p:nvSpPr>
+          <p:cNvPr id="6" name="TextBox 5"/>
+          <p:cNvSpPr txBox="1"/>
+          <p:nvPr/>
+        </p:nvSpPr>
+        <p:spPr>
+          <a:xfrm>
+            <a:off x="457200" y="3886200"/>
+            <a:ext cx="11247120" cy="411480"/>
+          </a:xfrm>
+          <a:prstGeom prst="rect">
+            <a:avLst/>
+          </a:prstGeom>
+          <a:noFill/>
+        </p:spPr>
+        <p:txBody>
+          <a:bodyPr wrap="square">
+            <a:spAutoFit/>
+          </a:bodyPr>
+          <a:lstStyle/>
+          <a:p>
+            <a:pPr algn="l"/>
+            <a:r>
+              <a:rPr sz="1800" b="0" i="1">
+                <a:solidFill>
+                  <a:srgbClr val="ECF0F1"/>
+                </a:solidFill>
+              </a:rPr>
+              <a:t>No right answer — be honest about where your own line is and why.</a:t>
+            </a:r>
+          </a:p>
+        </p:txBody>
+      </p:sp>
+      <p:sp>
+        <p:nvSpPr>
+          <p:cNvPr id="7" name="Rectangle 6"/>
+          <p:cNvSpPr/>
+          <p:nvPr/>
+        </p:nvSpPr>
+        <p:spPr>
+          <a:xfrm>
+            <a:off x="365760" y="4434840"/>
+            <a:ext cx="11430000" cy="1371600"/>
+          </a:xfrm>
+          <a:prstGeom prst="rect">
+            <a:avLst/>
+          </a:prstGeom>
+          <a:solidFill>
+            <a:srgbClr val="122246"/>
+          </a:solidFill>
+          <a:ln>
+            <a:noFill/>
+          </a:ln>
+        </p:spPr>
+        <p:style>
+          <a:lnRef idx="1">
+            <a:schemeClr val="accent1"/>
+          </a:lnRef>
+          <a:fillRef idx="3">
+            <a:schemeClr val="accent1"/>
+          </a:fillRef>
+          <a:effectRef idx="2">
+            <a:schemeClr val="accent1"/>
+          </a:effectRef>
+          <a:fontRef idx="minor">
+            <a:schemeClr val="lt1"/>
+          </a:fontRef>
+        </p:style>
+        <p:txBody>
+          <a:bodyPr rtlCol="0" anchor="ctr"/>
+          <a:lstStyle/>
+          <a:p>
+            <a:pPr algn="ctr"/>
+          </a:p>
+        </p:txBody>
+      </p:sp>
+      <p:sp>
+        <p:nvSpPr>
+          <p:cNvPr id="8" name="TextBox 7"/>
+          <p:cNvSpPr txBox="1"/>
+          <p:nvPr/>
+        </p:nvSpPr>
+        <p:spPr>
+          <a:xfrm>
+            <a:off x="548640" y="4498848"/>
+            <a:ext cx="11064240" cy="347472"/>
+          </a:xfrm>
+          <a:prstGeom prst="rect">
+            <a:avLst/>
+          </a:prstGeom>
+          <a:noFill/>
+        </p:spPr>
+        <p:txBody>
+          <a:bodyPr wrap="square">
+            <a:spAutoFit/>
+          </a:bodyPr>
+          <a:lstStyle/>
+          <a:p>
+            <a:pPr algn="l"/>
+            <a:r>
+              <a:rPr sz="1700" b="1" i="0">
+                <a:solidFill>
+                  <a:srgbClr val="FFFFFF"/>
+                </a:solidFill>
+              </a:rPr>
+              <a:t>Follow-up if the conversation runs:</a:t>
+            </a:r>
+          </a:p>
+        </p:txBody>
+      </p:sp>
+      <p:sp>
+        <p:nvSpPr>
+          <p:cNvPr id="9" name="TextBox 8"/>
+          <p:cNvSpPr txBox="1"/>
+          <p:nvPr/>
+        </p:nvSpPr>
+        <p:spPr>
+          <a:xfrm>
+            <a:off x="548640" y="4846320"/>
+            <a:ext cx="11064240" cy="868680"/>
+          </a:xfrm>
+          <a:prstGeom prst="rect">
+            <a:avLst/>
+          </a:prstGeom>
+          <a:noFill/>
+        </p:spPr>
+        <p:txBody>
+          <a:bodyPr wrap="square">
+            <a:spAutoFit/>
+          </a:bodyPr>
+          <a:lstStyle/>
+          <a:p>
+            <a:pPr algn="l"/>
+            <a:r>
+              <a:rPr sz="1700" b="0" i="1">
+                <a:solidFill>
+                  <a:srgbClr val="ECF0F1"/>
+                </a:solidFill>
+              </a:rPr>
+              <a:t>The scientists in this study were writing paper introductions with ChatGPT but hesitant to let it touch their actual data. Does that match how you think about it — or do you draw the line somewhere different?</a:t>
+            </a:r>
+          </a:p>
+        </p:txBody>
+      </p:sp>
+      <p:sp>
+        <p:nvSpPr>
+          <p:cNvPr id="10" name="TextBox 9"/>
+          <p:cNvSpPr txBox="1"/>
+          <p:nvPr/>
+        </p:nvSpPr>
+        <p:spPr>
+          <a:xfrm>
+            <a:off x="11704320" y="6537960"/>
+            <a:ext cx="365760" cy="274320"/>
+          </a:xfrm>
+          <a:prstGeom prst="rect">
+            <a:avLst/>
+          </a:prstGeom>
+          <a:noFill/>
+        </p:spPr>
+        <p:txBody>
+          <a:bodyPr wrap="square">
+            <a:spAutoFit/>
+          </a:bodyPr>
+          <a:lstStyle/>
+          <a:p>
+            <a:pPr algn="r"/>
+            <a:r>
+              <a:rPr sz="1200" b="0" i="0">
+                <a:solidFill>
+                  <a:srgbClr val="7F8C8D"/>
+                </a:solidFill>
+              </a:rPr>
+              <a:t>8</a:t>
             </a:r>
           </a:p>
         </p:txBody>
